--- a/decks/anger-is-information-lesson-v2.pptx
+++ b/decks/anger-is-information-lesson-v2.pptx
@@ -17,6 +17,7 @@
     <p:sldId id="265" r:id="rId17"/>
     <p:sldId id="266" r:id="rId18"/>
     <p:sldId id="267" r:id="rId19"/>
+    <p:sldId id="268" r:id="rId20"/>
   </p:sldIdLst>
   <p:sldSz cx="12192000" cy="6858000" type="screen4x3"/>
   <p:notesSz cx="6858000" cy="9144000"/>
@@ -513,7 +514,77 @@
           <a:lstStyle/>
           <a:p>
             <a:r>
-              <a:t>This page and the next three are hidden. They stay in the deck for you and are skipped when you present.</a:t>
+              <a:t>This page is hidden and skipped when you present. The full plan, care notes and research are on the hidden pages at the end of the deck, if you want them.</a:t>
+            </a:r>
+          </a:p>
+        </p:txBody>
+      </p:sp>
+      <p:sp>
+        <p:nvSpPr>
+          <p:cNvPr id="4" name="Slide Number Placeholder 3"/>
+          <p:cNvSpPr>
+            <a:spLocks noGrp="1"/>
+          </p:cNvSpPr>
+          <p:nvPr>
+            <p:ph type="sldNum" idx="5" sz="quarter"/>
+          </p:nvPr>
+        </p:nvSpPr>
+        <p:spPr/>
+      </p:sp>
+    </p:spTree>
+  </p:cSld>
+  <p:clrMapOvr>
+    <a:masterClrMapping/>
+  </p:clrMapOvr>
+</p:notes>
+</file>
+
+<file path=ppt/notesSlides/notesSlide10.xml><?xml version="1.0" encoding="utf-8"?>
+<p:notes xmlns:a="http://schemas.openxmlformats.org/drawingml/2006/main" xmlns:p="http://schemas.openxmlformats.org/presentationml/2006/main" xmlns:r="http://schemas.openxmlformats.org/officeDocument/2006/relationships">
+  <p:cSld>
+    <p:spTree>
+      <p:nvGrpSpPr>
+        <p:cNvPr id="1" name=""/>
+        <p:cNvGrpSpPr/>
+        <p:nvPr/>
+      </p:nvGrpSpPr>
+      <p:grpSpPr>
+        <a:xfrm>
+          <a:off x="0" y="0"/>
+          <a:ext cx="0" cy="0"/>
+          <a:chOff x="0" y="0"/>
+          <a:chExt cx="0" cy="0"/>
+        </a:xfrm>
+      </p:grpSpPr>
+      <p:sp>
+        <p:nvSpPr>
+          <p:cNvPr id="2" name="Slide Image Placeholder 1"/>
+          <p:cNvSpPr>
+            <a:spLocks noGrp="1"/>
+          </p:cNvSpPr>
+          <p:nvPr>
+            <p:ph type="sldImg" idx="2"/>
+          </p:nvPr>
+        </p:nvSpPr>
+        <p:spPr/>
+      </p:sp>
+      <p:sp>
+        <p:nvSpPr>
+          <p:cNvPr id="3" name="Notes Placeholder 2"/>
+          <p:cNvSpPr>
+            <a:spLocks noGrp="1"/>
+          </p:cNvSpPr>
+          <p:nvPr>
+            <p:ph type="body" idx="3" sz="quarter"/>
+          </p:nvPr>
+        </p:nvSpPr>
+        <p:spPr/>
+        <p:txBody>
+          <a:bodyPr/>
+          <a:lstStyle/>
+          <a:p>
+            <a:r>
+              <a:t>If you want more: this page and the next three are hidden and skipped when you present.</a:t>
             </a:r>
           </a:p>
         </p:txBody>
@@ -4165,7 +4236,7 @@
                 </a:solidFill>
                 <a:latin typeface="Inter Tight"/>
               </a:rPr>
-              <a:t>TEACHER PAGE  ·  skipped when you present  ·  Lesson plan</a:t>
+              <a:t>TEACHER PAGE  ·  skipped when you present  ·  Before you start</a:t>
             </a:r>
           </a:p>
         </p:txBody>
@@ -4256,8 +4327,8 @@
         </p:nvSpPr>
         <p:spPr>
           <a:xfrm>
-            <a:off x="548640" y="1828800"/>
-            <a:ext cx="5120640" cy="4389120"/>
+            <a:off x="548640" y="2011680"/>
+            <a:ext cx="11064240" cy="4206240"/>
           </a:xfrm>
           <a:prstGeom prst="rect">
             <a:avLst/>
@@ -4272,43 +4343,43 @@
           <a:p>
             <a:pPr algn="l">
               <a:spcAft>
-                <a:spcPts val="675"/>
-              </a:spcAft>
-            </a:pPr>
-            <a:r>
-              <a:rPr sz="1100" b="1" i="0">
+                <a:spcPts val="900"/>
+              </a:spcAft>
+            </a:pPr>
+            <a:r>
+              <a:rPr sz="1200" b="1" i="0">
                 <a:solidFill>
                   <a:srgbClr val="0B2D5B"/>
                 </a:solidFill>
                 <a:latin typeface="Inter Tight"/>
               </a:rPr>
-              <a:t>GOAL</a:t>
-            </a:r>
-          </a:p>
-          <a:p>
-            <a:pPr algn="l">
-              <a:spcAft>
-                <a:spcPts val="675"/>
-              </a:spcAft>
-            </a:pPr>
-            <a:r>
-              <a:rPr sz="1500" b="0" i="0">
+              <a:t>BEFORE YOU START</a:t>
+            </a:r>
+          </a:p>
+          <a:p>
+            <a:pPr algn="l">
+              <a:spcAft>
+                <a:spcPts val="900"/>
+              </a:spcAft>
+            </a:pPr>
+            <a:r>
+              <a:rPr sz="2000" b="0" i="0">
                 <a:solidFill>
                   <a:srgbClr val="1C1B19"/>
                 </a:solidFill>
                 <a:latin typeface="Source Serif 4"/>
               </a:rPr>
-              <a:t>Students can explain why anger moves faster than judgment (a fast alarm, slower brakes), why venting tends to feed anger, and how to handle anger in order: let the energy drop, then use the information. Each student leaves with one move they'd like to try. Nobody has to share a real blowup.</a:t>
-            </a:r>
-          </a:p>
-          <a:p>
-            <a:pPr algn="l">
-              <a:spcAft>
-                <a:spcPts val="675"/>
-              </a:spcAft>
-            </a:pPr>
-            <a:r>
-              <a:rPr sz="1500" b="0" i="0">
+              <a:t>Students learn that anger moves faster than judgment, that venting tends to feed it, and to let the energy drop before they act on what it's telling them. Bring index cards, keep real names and real blowups out of it, and pass anything about feeling unsafe to a counselor that day.</a:t>
+            </a:r>
+          </a:p>
+          <a:p>
+            <a:pPr algn="l">
+              <a:spcAft>
+                <a:spcPts val="900"/>
+              </a:spcAft>
+            </a:pPr>
+            <a:r>
+              <a:rPr sz="2000" b="0" i="0">
                 <a:solidFill>
                   <a:srgbClr val="1C1B19"/>
                 </a:solidFill>
@@ -4320,327 +4391,33 @@
           <a:p>
             <a:pPr algn="l">
               <a:spcAft>
-                <a:spcPts val="675"/>
-              </a:spcAft>
-            </a:pPr>
-            <a:r>
-              <a:rPr sz="1100" b="1" i="0">
+                <a:spcPts val="900"/>
+              </a:spcAft>
+            </a:pPr>
+            <a:r>
+              <a:rPr sz="1200" b="1" i="0">
                 <a:solidFill>
                   <a:srgbClr val="0B2D5B"/>
                 </a:solidFill>
                 <a:latin typeface="Inter Tight"/>
               </a:rPr>
-              <a:t>MATERIALS</a:t>
-            </a:r>
-          </a:p>
-          <a:p>
-            <a:pPr algn="l">
-              <a:spcAft>
-                <a:spcPts val="675"/>
-              </a:spcAft>
-            </a:pPr>
-            <a:r>
-              <a:rPr sz="1500" b="0" i="0">
+              <a:t>EVERY STUDENT IN THE ROOM</a:t>
+            </a:r>
+          </a:p>
+          <a:p>
+            <a:pPr algn="l">
+              <a:spcAft>
+                <a:spcPts val="900"/>
+              </a:spcAft>
+            </a:pPr>
+            <a:r>
+              <a:rPr sz="2000" b="0" i="0">
                 <a:solidFill>
                   <a:srgbClr val="1C1B19"/>
                 </a:solidFill>
                 <a:latin typeface="Source Serif 4"/>
               </a:rPr>
-              <a:t>Index cards for the private reflection</a:t>
-            </a:r>
-          </a:p>
-          <a:p>
-            <a:pPr algn="l">
-              <a:spcAft>
-                <a:spcPts val="675"/>
-              </a:spcAft>
-            </a:pPr>
-            <a:r>
-              <a:rPr sz="1500" b="0" i="0">
-                <a:solidFill>
-                  <a:srgbClr val="1C1B19"/>
-                </a:solidFill>
-                <a:latin typeface="Source Serif 4"/>
-              </a:rPr>
-              <a:t>Optional: a board to note the vote and first signs</a:t>
-            </a:r>
-          </a:p>
-          <a:p>
-            <a:pPr algn="l">
-              <a:spcAft>
-                <a:spcPts val="675"/>
-              </a:spcAft>
-            </a:pPr>
-            <a:r>
-              <a:rPr sz="1500" b="0" i="0">
-                <a:solidFill>
-                  <a:srgbClr val="1C1B19"/>
-                </a:solidFill>
-                <a:latin typeface="Source Serif 4"/>
-              </a:rPr>
-              <a:t>The student page link (last slide) to share after advisory</a:t>
-            </a:r>
-          </a:p>
-        </p:txBody>
-      </p:sp>
-      <p:sp>
-        <p:nvSpPr>
-          <p:cNvPr id="7" name="TextBox 6"/>
-          <p:cNvSpPr txBox="1"/>
-          <p:nvPr/>
-        </p:nvSpPr>
-        <p:spPr>
-          <a:xfrm>
-            <a:off x="6126480" y="1828800"/>
-            <a:ext cx="5486400" cy="4389120"/>
-          </a:xfrm>
-          <a:prstGeom prst="rect">
-            <a:avLst/>
-          </a:prstGeom>
-          <a:noFill/>
-        </p:spPr>
-        <p:txBody>
-          <a:bodyPr wrap="square" anchor="t" lIns="0" rIns="0" tIns="0" bIns="0">
-            <a:spAutoFit/>
-          </a:bodyPr>
-          <a:lstStyle/>
-          <a:p>
-            <a:pPr algn="l">
-              <a:spcAft>
-                <a:spcPts val="630"/>
-              </a:spcAft>
-            </a:pPr>
-            <a:r>
-              <a:rPr sz="1100" b="1" i="0">
-                <a:solidFill>
-                  <a:srgbClr val="0B2D5B"/>
-                </a:solidFill>
-                <a:latin typeface="Inter Tight"/>
-              </a:rPr>
-              <a:t>FLOW</a:t>
-            </a:r>
-          </a:p>
-          <a:p>
-            <a:pPr algn="l">
-              <a:spcAft>
-                <a:spcPts val="630"/>
-              </a:spcAft>
-            </a:pPr>
-            <a:r>
-              <a:rPr sz="1300" b="1" i="0">
-                <a:solidFill>
-                  <a:srgbClr val="F47B20"/>
-                </a:solidFill>
-                <a:latin typeface="Inter Tight"/>
-              </a:rPr>
-              <a:t>3 min   </a:t>
-            </a:r>
-            <a:r>
-              <a:rPr sz="1400" b="0" i="0">
-                <a:solidFill>
-                  <a:srgbClr val="1C1B19"/>
-                </a:solidFill>
-                <a:latin typeface="Source Serif 4"/>
-              </a:rPr>
-              <a:t>Sound familiar? (hands up)</a:t>
-            </a:r>
-          </a:p>
-          <a:p>
-            <a:pPr algn="l">
-              <a:spcAft>
-                <a:spcPts val="630"/>
-              </a:spcAft>
-            </a:pPr>
-            <a:r>
-              <a:rPr sz="1300" b="1" i="0">
-                <a:solidFill>
-                  <a:srgbClr val="F47B20"/>
-                </a:solidFill>
-                <a:latin typeface="Inter Tight"/>
-              </a:rPr>
-              <a:t>3 min   </a:t>
-            </a:r>
-            <a:r>
-              <a:rPr sz="1400" b="0" i="0">
-                <a:solidFill>
-                  <a:srgbClr val="1C1B19"/>
-                </a:solidFill>
-                <a:latin typeface="Source Serif 4"/>
-              </a:rPr>
-              <a:t>A fast alarm, slower brakes</a:t>
-            </a:r>
-          </a:p>
-          <a:p>
-            <a:pPr algn="l">
-              <a:spcAft>
-                <a:spcPts val="630"/>
-              </a:spcAft>
-            </a:pPr>
-            <a:r>
-              <a:rPr sz="1300" b="1" i="0">
-                <a:solidFill>
-                  <a:srgbClr val="F47B20"/>
-                </a:solidFill>
-                <a:latin typeface="Inter Tight"/>
-              </a:rPr>
-              <a:t>3 min   </a:t>
-            </a:r>
-            <a:r>
-              <a:rPr sz="1400" b="0" i="0">
-                <a:solidFill>
-                  <a:srgbClr val="1C1B19"/>
-                </a:solidFill>
-                <a:latin typeface="Source Serif 4"/>
-              </a:rPr>
-              <a:t>Quick vote: does venting help?</a:t>
-            </a:r>
-          </a:p>
-          <a:p>
-            <a:pPr algn="l">
-              <a:spcAft>
-                <a:spcPts val="630"/>
-              </a:spcAft>
-            </a:pPr>
-            <a:r>
-              <a:rPr sz="1300" b="1" i="0">
-                <a:solidFill>
-                  <a:srgbClr val="F47B20"/>
-                </a:solidFill>
-                <a:latin typeface="Inter Tight"/>
-              </a:rPr>
-              <a:t>3 min   </a:t>
-            </a:r>
-            <a:r>
-              <a:rPr sz="1400" b="0" i="0">
-                <a:solidFill>
-                  <a:srgbClr val="1C1B19"/>
-                </a:solidFill>
-                <a:latin typeface="Source Serif 4"/>
-              </a:rPr>
-              <a:t>Two things at once: handle them in order</a:t>
-            </a:r>
-          </a:p>
-          <a:p>
-            <a:pPr algn="l">
-              <a:spcAft>
-                <a:spcPts val="630"/>
-              </a:spcAft>
-            </a:pPr>
-            <a:r>
-              <a:rPr sz="1300" b="1" i="0">
-                <a:solidFill>
-                  <a:srgbClr val="F47B20"/>
-                </a:solidFill>
-                <a:latin typeface="Inter Tight"/>
-              </a:rPr>
-              <a:t>5 min   </a:t>
-            </a:r>
-            <a:r>
-              <a:rPr sz="1400" b="0" i="0">
-                <a:solidFill>
-                  <a:srgbClr val="1C1B19"/>
-                </a:solidFill>
-                <a:latin typeface="Source Serif 4"/>
-              </a:rPr>
-              <a:t>Three situations (pairs)</a:t>
-            </a:r>
-          </a:p>
-          <a:p>
-            <a:pPr algn="l">
-              <a:spcAft>
-                <a:spcPts val="630"/>
-              </a:spcAft>
-            </a:pPr>
-            <a:r>
-              <a:rPr sz="1300" b="1" i="0">
-                <a:solidFill>
-                  <a:srgbClr val="F47B20"/>
-                </a:solidFill>
-                <a:latin typeface="Inter Tight"/>
-              </a:rPr>
-              <a:t>2 min   </a:t>
-            </a:r>
-            <a:r>
-              <a:rPr sz="1400" b="0" i="0">
-                <a:solidFill>
-                  <a:srgbClr val="1C1B19"/>
-                </a:solidFill>
-                <a:latin typeface="Source Serif 4"/>
-              </a:rPr>
-              <a:t>What was under it? (private reflection)</a:t>
-            </a:r>
-          </a:p>
-          <a:p>
-            <a:pPr algn="l">
-              <a:spcAft>
-                <a:spcPts val="630"/>
-              </a:spcAft>
-            </a:pPr>
-            <a:r>
-              <a:rPr sz="1300" b="1" i="0">
-                <a:solidFill>
-                  <a:srgbClr val="F47B20"/>
-                </a:solidFill>
-                <a:latin typeface="Inter Tight"/>
-              </a:rPr>
-              <a:t>1 min   </a:t>
-            </a:r>
-            <a:r>
-              <a:rPr sz="1400" b="0" i="0">
-                <a:solidFill>
-                  <a:srgbClr val="1C1B19"/>
-                </a:solidFill>
-                <a:latin typeface="Source Serif 4"/>
-              </a:rPr>
-              <a:t>One move, and the student page</a:t>
-            </a:r>
-          </a:p>
-          <a:p>
-            <a:pPr algn="l">
-              <a:spcAft>
-                <a:spcPts val="630"/>
-              </a:spcAft>
-            </a:pPr>
-            <a:r>
-              <a:rPr sz="1400" b="0" i="0">
-                <a:solidFill>
-                  <a:srgbClr val="1C1B19"/>
-                </a:solidFill>
-                <a:latin typeface="Source Serif 4"/>
-              </a:rPr>
-              <a:t/>
-            </a:r>
-          </a:p>
-          <a:p>
-            <a:pPr algn="l">
-              <a:spcAft>
-                <a:spcPts val="630"/>
-              </a:spcAft>
-            </a:pPr>
-            <a:r>
-              <a:rPr sz="1100" b="1" i="0">
-                <a:solidFill>
-                  <a:srgbClr val="0B2D5B"/>
-                </a:solidFill>
-                <a:latin typeface="Inter Tight"/>
-              </a:rPr>
-              <a:t>SHORT ON TIME (10-MINUTE CHECK-IN)</a:t>
-            </a:r>
-          </a:p>
-          <a:p>
-            <a:pPr algn="l">
-              <a:spcAft>
-                <a:spcPts val="630"/>
-              </a:spcAft>
-            </a:pPr>
-            <a:r>
-              <a:rPr sz="1400" b="0" i="0">
-                <a:solidFill>
-                  <a:srgbClr val="1C1B19"/>
-                </a:solidFill>
-                <a:latin typeface="Source Serif 4"/>
-              </a:rPr>
-              <a:t>Quick vote on venting (3), two things at once (3), one of the three situations as a whole group (3), one move and the student page (1).</a:t>
+              <a:t>When the research slide comes up, present who gets called aggressive as bias in the people watching, and remember that some students, like Ines, can't simply walk away from the situation.</a:t>
             </a:r>
           </a:p>
         </p:txBody>
@@ -4654,6 +4431,2244 @@
 </file>
 
 <file path=ppt/slides/slide10.xml><?xml version="1.0" encoding="utf-8"?>
+<p:sld xmlns:a="http://schemas.openxmlformats.org/drawingml/2006/main" xmlns:p="http://schemas.openxmlformats.org/presentationml/2006/main" xmlns:r="http://schemas.openxmlformats.org/officeDocument/2006/relationships" show="0">
+  <p:cSld>
+    <p:bg>
+      <p:bgPr>
+        <a:solidFill>
+          <a:srgbClr val="EEEBE4"/>
+        </a:solidFill>
+        <a:effectLst/>
+      </p:bgPr>
+    </p:bg>
+    <p:spTree>
+      <p:nvGrpSpPr>
+        <p:cNvPr id="1" name=""/>
+        <p:cNvGrpSpPr/>
+        <p:nvPr/>
+      </p:nvGrpSpPr>
+      <p:grpSpPr/>
+      <p:sp>
+        <p:nvSpPr>
+          <p:cNvPr id="2" name="Rectangle 1"/>
+          <p:cNvSpPr/>
+          <p:nvPr/>
+        </p:nvSpPr>
+        <p:spPr>
+          <a:xfrm>
+            <a:off x="0" y="0"/>
+            <a:ext cx="12191695" cy="384048"/>
+          </a:xfrm>
+          <a:prstGeom prst="rect">
+            <a:avLst/>
+          </a:prstGeom>
+          <a:solidFill>
+            <a:srgbClr val="0B2D5B"/>
+          </a:solidFill>
+          <a:ln>
+            <a:noFill/>
+          </a:ln>
+          <a:effectLst/>
+        </p:spPr>
+        <p:style>
+          <a:lnRef idx="1">
+            <a:schemeClr val="accent1"/>
+          </a:lnRef>
+          <a:fillRef idx="3">
+            <a:schemeClr val="accent1"/>
+          </a:fillRef>
+          <a:effectRef idx="2">
+            <a:schemeClr val="accent1"/>
+          </a:effectRef>
+          <a:fontRef idx="minor">
+            <a:schemeClr val="lt1"/>
+          </a:fontRef>
+        </p:style>
+        <p:txBody>
+          <a:bodyPr rtlCol="0" anchor="ctr"/>
+          <a:lstStyle/>
+          <a:p>
+            <a:pPr algn="ctr"/>
+          </a:p>
+        </p:txBody>
+      </p:sp>
+      <p:sp>
+        <p:nvSpPr>
+          <p:cNvPr id="3" name="TextBox 2"/>
+          <p:cNvSpPr txBox="1"/>
+          <p:nvPr/>
+        </p:nvSpPr>
+        <p:spPr>
+          <a:xfrm>
+            <a:off x="548640" y="100584"/>
+            <a:ext cx="10972800" cy="274320"/>
+          </a:xfrm>
+          <a:prstGeom prst="rect">
+            <a:avLst/>
+          </a:prstGeom>
+          <a:noFill/>
+        </p:spPr>
+        <p:txBody>
+          <a:bodyPr wrap="square" anchor="t" lIns="0" rIns="0" tIns="0" bIns="0">
+            <a:spAutoFit/>
+          </a:bodyPr>
+          <a:lstStyle/>
+          <a:p>
+            <a:pPr algn="l">
+              <a:spcAft>
+                <a:spcPts val="495"/>
+              </a:spcAft>
+            </a:pPr>
+            <a:r>
+              <a:rPr sz="1100" b="1" i="0">
+                <a:solidFill>
+                  <a:srgbClr val="FFFFFF"/>
+                </a:solidFill>
+                <a:latin typeface="Inter Tight"/>
+              </a:rPr>
+              <a:t>TEACHER PAGE  ·  skipped when you present  ·  Lesson plan</a:t>
+            </a:r>
+          </a:p>
+        </p:txBody>
+      </p:sp>
+      <p:sp>
+        <p:nvSpPr>
+          <p:cNvPr id="4" name="TextBox 3"/>
+          <p:cNvSpPr txBox="1"/>
+          <p:nvPr/>
+        </p:nvSpPr>
+        <p:spPr>
+          <a:xfrm>
+            <a:off x="548640" y="685800"/>
+            <a:ext cx="10972800" cy="731520"/>
+          </a:xfrm>
+          <a:prstGeom prst="rect">
+            <a:avLst/>
+          </a:prstGeom>
+          <a:noFill/>
+        </p:spPr>
+        <p:txBody>
+          <a:bodyPr wrap="square" anchor="t" lIns="0" rIns="0" tIns="0" bIns="0">
+            <a:spAutoFit/>
+          </a:bodyPr>
+          <a:lstStyle/>
+          <a:p>
+            <a:pPr algn="l">
+              <a:spcAft>
+                <a:spcPts val="1530"/>
+              </a:spcAft>
+            </a:pPr>
+            <a:r>
+              <a:rPr sz="3400" b="1" i="0">
+                <a:solidFill>
+                  <a:srgbClr val="1C1B19"/>
+                </a:solidFill>
+                <a:latin typeface="Source Serif 4"/>
+              </a:rPr>
+              <a:t>Anger Is Information</a:t>
+            </a:r>
+          </a:p>
+        </p:txBody>
+      </p:sp>
+      <p:sp>
+        <p:nvSpPr>
+          <p:cNvPr id="5" name="TextBox 4"/>
+          <p:cNvSpPr txBox="1"/>
+          <p:nvPr/>
+        </p:nvSpPr>
+        <p:spPr>
+          <a:xfrm>
+            <a:off x="548640" y="1325880"/>
+            <a:ext cx="10972800" cy="365760"/>
+          </a:xfrm>
+          <a:prstGeom prst="rect">
+            <a:avLst/>
+          </a:prstGeom>
+          <a:noFill/>
+        </p:spPr>
+        <p:txBody>
+          <a:bodyPr wrap="square" anchor="t" lIns="0" rIns="0" tIns="0" bIns="0">
+            <a:spAutoFit/>
+          </a:bodyPr>
+          <a:lstStyle/>
+          <a:p>
+            <a:pPr algn="l">
+              <a:spcAft>
+                <a:spcPts val="630"/>
+              </a:spcAft>
+            </a:pPr>
+            <a:r>
+              <a:rPr sz="1400" b="0" i="0">
+                <a:solidFill>
+                  <a:srgbClr val="5D5A54"/>
+                </a:solidFill>
+                <a:latin typeface="Inter Tight"/>
+              </a:rPr>
+              <a:t>Upper School  ·  20 minutes (fits a 30-minute advisory, with time for your opening check-in; 10-minute version below)  ·  Any grade</a:t>
+            </a:r>
+          </a:p>
+        </p:txBody>
+      </p:sp>
+      <p:sp>
+        <p:nvSpPr>
+          <p:cNvPr id="6" name="TextBox 5"/>
+          <p:cNvSpPr txBox="1"/>
+          <p:nvPr/>
+        </p:nvSpPr>
+        <p:spPr>
+          <a:xfrm>
+            <a:off x="548640" y="1828800"/>
+            <a:ext cx="5120640" cy="4389120"/>
+          </a:xfrm>
+          <a:prstGeom prst="rect">
+            <a:avLst/>
+          </a:prstGeom>
+          <a:noFill/>
+        </p:spPr>
+        <p:txBody>
+          <a:bodyPr wrap="square" anchor="t" lIns="0" rIns="0" tIns="0" bIns="0">
+            <a:spAutoFit/>
+          </a:bodyPr>
+          <a:lstStyle/>
+          <a:p>
+            <a:pPr algn="l">
+              <a:spcAft>
+                <a:spcPts val="675"/>
+              </a:spcAft>
+            </a:pPr>
+            <a:r>
+              <a:rPr sz="1100" b="1" i="0">
+                <a:solidFill>
+                  <a:srgbClr val="0B2D5B"/>
+                </a:solidFill>
+                <a:latin typeface="Inter Tight"/>
+              </a:rPr>
+              <a:t>GOAL</a:t>
+            </a:r>
+          </a:p>
+          <a:p>
+            <a:pPr algn="l">
+              <a:spcAft>
+                <a:spcPts val="675"/>
+              </a:spcAft>
+            </a:pPr>
+            <a:r>
+              <a:rPr sz="1500" b="0" i="0">
+                <a:solidFill>
+                  <a:srgbClr val="1C1B19"/>
+                </a:solidFill>
+                <a:latin typeface="Source Serif 4"/>
+              </a:rPr>
+              <a:t>Students can explain why anger moves faster than judgment (a fast alarm, slower brakes), why venting tends to feed anger, and how to handle anger in order: let the energy drop, then use the information. Each student leaves with one move they'd like to try. Nobody has to share a real blowup.</a:t>
+            </a:r>
+          </a:p>
+          <a:p>
+            <a:pPr algn="l">
+              <a:spcAft>
+                <a:spcPts val="675"/>
+              </a:spcAft>
+            </a:pPr>
+            <a:r>
+              <a:rPr sz="1500" b="0" i="0">
+                <a:solidFill>
+                  <a:srgbClr val="1C1B19"/>
+                </a:solidFill>
+                <a:latin typeface="Source Serif 4"/>
+              </a:rPr>
+              <a:t/>
+            </a:r>
+          </a:p>
+          <a:p>
+            <a:pPr algn="l">
+              <a:spcAft>
+                <a:spcPts val="675"/>
+              </a:spcAft>
+            </a:pPr>
+            <a:r>
+              <a:rPr sz="1100" b="1" i="0">
+                <a:solidFill>
+                  <a:srgbClr val="0B2D5B"/>
+                </a:solidFill>
+                <a:latin typeface="Inter Tight"/>
+              </a:rPr>
+              <a:t>MATERIALS</a:t>
+            </a:r>
+          </a:p>
+          <a:p>
+            <a:pPr algn="l">
+              <a:spcAft>
+                <a:spcPts val="675"/>
+              </a:spcAft>
+            </a:pPr>
+            <a:r>
+              <a:rPr sz="1500" b="0" i="0">
+                <a:solidFill>
+                  <a:srgbClr val="1C1B19"/>
+                </a:solidFill>
+                <a:latin typeface="Source Serif 4"/>
+              </a:rPr>
+              <a:t>Index cards for the private reflection</a:t>
+            </a:r>
+          </a:p>
+          <a:p>
+            <a:pPr algn="l">
+              <a:spcAft>
+                <a:spcPts val="675"/>
+              </a:spcAft>
+            </a:pPr>
+            <a:r>
+              <a:rPr sz="1500" b="0" i="0">
+                <a:solidFill>
+                  <a:srgbClr val="1C1B19"/>
+                </a:solidFill>
+                <a:latin typeface="Source Serif 4"/>
+              </a:rPr>
+              <a:t>Optional: a board to note the vote and first signs</a:t>
+            </a:r>
+          </a:p>
+          <a:p>
+            <a:pPr algn="l">
+              <a:spcAft>
+                <a:spcPts val="675"/>
+              </a:spcAft>
+            </a:pPr>
+            <a:r>
+              <a:rPr sz="1500" b="0" i="0">
+                <a:solidFill>
+                  <a:srgbClr val="1C1B19"/>
+                </a:solidFill>
+                <a:latin typeface="Source Serif 4"/>
+              </a:rPr>
+              <a:t>The student page link (last slide) to share after advisory</a:t>
+            </a:r>
+          </a:p>
+        </p:txBody>
+      </p:sp>
+      <p:sp>
+        <p:nvSpPr>
+          <p:cNvPr id="7" name="TextBox 6"/>
+          <p:cNvSpPr txBox="1"/>
+          <p:nvPr/>
+        </p:nvSpPr>
+        <p:spPr>
+          <a:xfrm>
+            <a:off x="6126480" y="1828800"/>
+            <a:ext cx="5486400" cy="4389120"/>
+          </a:xfrm>
+          <a:prstGeom prst="rect">
+            <a:avLst/>
+          </a:prstGeom>
+          <a:noFill/>
+        </p:spPr>
+        <p:txBody>
+          <a:bodyPr wrap="square" anchor="t" lIns="0" rIns="0" tIns="0" bIns="0">
+            <a:spAutoFit/>
+          </a:bodyPr>
+          <a:lstStyle/>
+          <a:p>
+            <a:pPr algn="l">
+              <a:spcAft>
+                <a:spcPts val="630"/>
+              </a:spcAft>
+            </a:pPr>
+            <a:r>
+              <a:rPr sz="1100" b="1" i="0">
+                <a:solidFill>
+                  <a:srgbClr val="0B2D5B"/>
+                </a:solidFill>
+                <a:latin typeface="Inter Tight"/>
+              </a:rPr>
+              <a:t>FLOW</a:t>
+            </a:r>
+          </a:p>
+          <a:p>
+            <a:pPr algn="l">
+              <a:spcAft>
+                <a:spcPts val="630"/>
+              </a:spcAft>
+            </a:pPr>
+            <a:r>
+              <a:rPr sz="1300" b="1" i="0">
+                <a:solidFill>
+                  <a:srgbClr val="F47B20"/>
+                </a:solidFill>
+                <a:latin typeface="Inter Tight"/>
+              </a:rPr>
+              <a:t>3 min   </a:t>
+            </a:r>
+            <a:r>
+              <a:rPr sz="1400" b="0" i="0">
+                <a:solidFill>
+                  <a:srgbClr val="1C1B19"/>
+                </a:solidFill>
+                <a:latin typeface="Source Serif 4"/>
+              </a:rPr>
+              <a:t>Sound familiar? (hands up)</a:t>
+            </a:r>
+          </a:p>
+          <a:p>
+            <a:pPr algn="l">
+              <a:spcAft>
+                <a:spcPts val="630"/>
+              </a:spcAft>
+            </a:pPr>
+            <a:r>
+              <a:rPr sz="1300" b="1" i="0">
+                <a:solidFill>
+                  <a:srgbClr val="F47B20"/>
+                </a:solidFill>
+                <a:latin typeface="Inter Tight"/>
+              </a:rPr>
+              <a:t>3 min   </a:t>
+            </a:r>
+            <a:r>
+              <a:rPr sz="1400" b="0" i="0">
+                <a:solidFill>
+                  <a:srgbClr val="1C1B19"/>
+                </a:solidFill>
+                <a:latin typeface="Source Serif 4"/>
+              </a:rPr>
+              <a:t>A fast alarm, slower brakes</a:t>
+            </a:r>
+          </a:p>
+          <a:p>
+            <a:pPr algn="l">
+              <a:spcAft>
+                <a:spcPts val="630"/>
+              </a:spcAft>
+            </a:pPr>
+            <a:r>
+              <a:rPr sz="1300" b="1" i="0">
+                <a:solidFill>
+                  <a:srgbClr val="F47B20"/>
+                </a:solidFill>
+                <a:latin typeface="Inter Tight"/>
+              </a:rPr>
+              <a:t>3 min   </a:t>
+            </a:r>
+            <a:r>
+              <a:rPr sz="1400" b="0" i="0">
+                <a:solidFill>
+                  <a:srgbClr val="1C1B19"/>
+                </a:solidFill>
+                <a:latin typeface="Source Serif 4"/>
+              </a:rPr>
+              <a:t>Quick vote: does venting help?</a:t>
+            </a:r>
+          </a:p>
+          <a:p>
+            <a:pPr algn="l">
+              <a:spcAft>
+                <a:spcPts val="630"/>
+              </a:spcAft>
+            </a:pPr>
+            <a:r>
+              <a:rPr sz="1300" b="1" i="0">
+                <a:solidFill>
+                  <a:srgbClr val="F47B20"/>
+                </a:solidFill>
+                <a:latin typeface="Inter Tight"/>
+              </a:rPr>
+              <a:t>3 min   </a:t>
+            </a:r>
+            <a:r>
+              <a:rPr sz="1400" b="0" i="0">
+                <a:solidFill>
+                  <a:srgbClr val="1C1B19"/>
+                </a:solidFill>
+                <a:latin typeface="Source Serif 4"/>
+              </a:rPr>
+              <a:t>Two things at once: handle them in order</a:t>
+            </a:r>
+          </a:p>
+          <a:p>
+            <a:pPr algn="l">
+              <a:spcAft>
+                <a:spcPts val="630"/>
+              </a:spcAft>
+            </a:pPr>
+            <a:r>
+              <a:rPr sz="1300" b="1" i="0">
+                <a:solidFill>
+                  <a:srgbClr val="F47B20"/>
+                </a:solidFill>
+                <a:latin typeface="Inter Tight"/>
+              </a:rPr>
+              <a:t>5 min   </a:t>
+            </a:r>
+            <a:r>
+              <a:rPr sz="1400" b="0" i="0">
+                <a:solidFill>
+                  <a:srgbClr val="1C1B19"/>
+                </a:solidFill>
+                <a:latin typeface="Source Serif 4"/>
+              </a:rPr>
+              <a:t>Three situations (pairs)</a:t>
+            </a:r>
+          </a:p>
+          <a:p>
+            <a:pPr algn="l">
+              <a:spcAft>
+                <a:spcPts val="630"/>
+              </a:spcAft>
+            </a:pPr>
+            <a:r>
+              <a:rPr sz="1300" b="1" i="0">
+                <a:solidFill>
+                  <a:srgbClr val="F47B20"/>
+                </a:solidFill>
+                <a:latin typeface="Inter Tight"/>
+              </a:rPr>
+              <a:t>2 min   </a:t>
+            </a:r>
+            <a:r>
+              <a:rPr sz="1400" b="0" i="0">
+                <a:solidFill>
+                  <a:srgbClr val="1C1B19"/>
+                </a:solidFill>
+                <a:latin typeface="Source Serif 4"/>
+              </a:rPr>
+              <a:t>What was under it? (private reflection)</a:t>
+            </a:r>
+          </a:p>
+          <a:p>
+            <a:pPr algn="l">
+              <a:spcAft>
+                <a:spcPts val="630"/>
+              </a:spcAft>
+            </a:pPr>
+            <a:r>
+              <a:rPr sz="1300" b="1" i="0">
+                <a:solidFill>
+                  <a:srgbClr val="F47B20"/>
+                </a:solidFill>
+                <a:latin typeface="Inter Tight"/>
+              </a:rPr>
+              <a:t>1 min   </a:t>
+            </a:r>
+            <a:r>
+              <a:rPr sz="1400" b="0" i="0">
+                <a:solidFill>
+                  <a:srgbClr val="1C1B19"/>
+                </a:solidFill>
+                <a:latin typeface="Source Serif 4"/>
+              </a:rPr>
+              <a:t>One move, and the student page</a:t>
+            </a:r>
+          </a:p>
+          <a:p>
+            <a:pPr algn="l">
+              <a:spcAft>
+                <a:spcPts val="630"/>
+              </a:spcAft>
+            </a:pPr>
+            <a:r>
+              <a:rPr sz="1400" b="0" i="0">
+                <a:solidFill>
+                  <a:srgbClr val="1C1B19"/>
+                </a:solidFill>
+                <a:latin typeface="Source Serif 4"/>
+              </a:rPr>
+              <a:t/>
+            </a:r>
+          </a:p>
+          <a:p>
+            <a:pPr algn="l">
+              <a:spcAft>
+                <a:spcPts val="630"/>
+              </a:spcAft>
+            </a:pPr>
+            <a:r>
+              <a:rPr sz="1100" b="1" i="0">
+                <a:solidFill>
+                  <a:srgbClr val="0B2D5B"/>
+                </a:solidFill>
+                <a:latin typeface="Inter Tight"/>
+              </a:rPr>
+              <a:t>SHORT ON TIME (10-MINUTE CHECK-IN)</a:t>
+            </a:r>
+          </a:p>
+          <a:p>
+            <a:pPr algn="l">
+              <a:spcAft>
+                <a:spcPts val="630"/>
+              </a:spcAft>
+            </a:pPr>
+            <a:r>
+              <a:rPr sz="1400" b="0" i="0">
+                <a:solidFill>
+                  <a:srgbClr val="1C1B19"/>
+                </a:solidFill>
+                <a:latin typeface="Source Serif 4"/>
+              </a:rPr>
+              <a:t>Quick vote on venting (3), two things at once (3), one of the three situations as a whole group (3), one move and the student page (1).</a:t>
+            </a:r>
+          </a:p>
+        </p:txBody>
+      </p:sp>
+    </p:spTree>
+  </p:cSld>
+  <p:clrMapOvr>
+    <a:masterClrMapping/>
+  </p:clrMapOvr>
+</p:sld>
+</file>
+
+<file path=ppt/slides/slide11.xml><?xml version="1.0" encoding="utf-8"?>
+<p:sld xmlns:a="http://schemas.openxmlformats.org/drawingml/2006/main" xmlns:p="http://schemas.openxmlformats.org/presentationml/2006/main" xmlns:r="http://schemas.openxmlformats.org/officeDocument/2006/relationships" show="0">
+  <p:cSld>
+    <p:bg>
+      <p:bgPr>
+        <a:solidFill>
+          <a:srgbClr val="EEEBE4"/>
+        </a:solidFill>
+        <a:effectLst/>
+      </p:bgPr>
+    </p:bg>
+    <p:spTree>
+      <p:nvGrpSpPr>
+        <p:cNvPr id="1" name=""/>
+        <p:cNvGrpSpPr/>
+        <p:nvPr/>
+      </p:nvGrpSpPr>
+      <p:grpSpPr/>
+      <p:sp>
+        <p:nvSpPr>
+          <p:cNvPr id="2" name="Rectangle 1"/>
+          <p:cNvSpPr/>
+          <p:nvPr/>
+        </p:nvSpPr>
+        <p:spPr>
+          <a:xfrm>
+            <a:off x="0" y="0"/>
+            <a:ext cx="12191695" cy="384048"/>
+          </a:xfrm>
+          <a:prstGeom prst="rect">
+            <a:avLst/>
+          </a:prstGeom>
+          <a:solidFill>
+            <a:srgbClr val="0B2D5B"/>
+          </a:solidFill>
+          <a:ln>
+            <a:noFill/>
+          </a:ln>
+          <a:effectLst/>
+        </p:spPr>
+        <p:style>
+          <a:lnRef idx="1">
+            <a:schemeClr val="accent1"/>
+          </a:lnRef>
+          <a:fillRef idx="3">
+            <a:schemeClr val="accent1"/>
+          </a:fillRef>
+          <a:effectRef idx="2">
+            <a:schemeClr val="accent1"/>
+          </a:effectRef>
+          <a:fontRef idx="minor">
+            <a:schemeClr val="lt1"/>
+          </a:fontRef>
+        </p:style>
+        <p:txBody>
+          <a:bodyPr rtlCol="0" anchor="ctr"/>
+          <a:lstStyle/>
+          <a:p>
+            <a:pPr algn="ctr"/>
+          </a:p>
+        </p:txBody>
+      </p:sp>
+      <p:sp>
+        <p:nvSpPr>
+          <p:cNvPr id="3" name="TextBox 2"/>
+          <p:cNvSpPr txBox="1"/>
+          <p:nvPr/>
+        </p:nvSpPr>
+        <p:spPr>
+          <a:xfrm>
+            <a:off x="548640" y="100584"/>
+            <a:ext cx="10972800" cy="274320"/>
+          </a:xfrm>
+          <a:prstGeom prst="rect">
+            <a:avLst/>
+          </a:prstGeom>
+          <a:noFill/>
+        </p:spPr>
+        <p:txBody>
+          <a:bodyPr wrap="square" anchor="t" lIns="0" rIns="0" tIns="0" bIns="0">
+            <a:spAutoFit/>
+          </a:bodyPr>
+          <a:lstStyle/>
+          <a:p>
+            <a:pPr algn="l">
+              <a:spcAft>
+                <a:spcPts val="495"/>
+              </a:spcAft>
+            </a:pPr>
+            <a:r>
+              <a:rPr sz="1100" b="1" i="0">
+                <a:solidFill>
+                  <a:srgbClr val="FFFFFF"/>
+                </a:solidFill>
+                <a:latin typeface="Inter Tight"/>
+              </a:rPr>
+              <a:t>TEACHER PAGE  ·  skipped when you present  ·  Before you teach</a:t>
+            </a:r>
+          </a:p>
+        </p:txBody>
+      </p:sp>
+      <p:sp>
+        <p:nvSpPr>
+          <p:cNvPr id="4" name="TextBox 3"/>
+          <p:cNvSpPr txBox="1"/>
+          <p:nvPr/>
+        </p:nvSpPr>
+        <p:spPr>
+          <a:xfrm>
+            <a:off x="548640" y="685800"/>
+            <a:ext cx="10972800" cy="640080"/>
+          </a:xfrm>
+          <a:prstGeom prst="rect">
+            <a:avLst/>
+          </a:prstGeom>
+          <a:noFill/>
+        </p:spPr>
+        <p:txBody>
+          <a:bodyPr wrap="square" anchor="t" lIns="0" rIns="0" tIns="0" bIns="0">
+            <a:spAutoFit/>
+          </a:bodyPr>
+          <a:lstStyle/>
+          <a:p>
+            <a:pPr algn="l">
+              <a:spcAft>
+                <a:spcPts val="1350"/>
+              </a:spcAft>
+            </a:pPr>
+            <a:r>
+              <a:rPr sz="3000" b="1" i="0">
+                <a:solidFill>
+                  <a:srgbClr val="1C1B19"/>
+                </a:solidFill>
+                <a:latin typeface="Source Serif 4"/>
+              </a:rPr>
+              <a:t>Before you teach</a:t>
+            </a:r>
+          </a:p>
+        </p:txBody>
+      </p:sp>
+      <p:sp>
+        <p:nvSpPr>
+          <p:cNvPr id="5" name="TextBox 4"/>
+          <p:cNvSpPr txBox="1"/>
+          <p:nvPr/>
+        </p:nvSpPr>
+        <p:spPr>
+          <a:xfrm>
+            <a:off x="548640" y="1463040"/>
+            <a:ext cx="5394960" cy="4937760"/>
+          </a:xfrm>
+          <a:prstGeom prst="rect">
+            <a:avLst/>
+          </a:prstGeom>
+          <a:noFill/>
+        </p:spPr>
+        <p:txBody>
+          <a:bodyPr wrap="square" anchor="t" lIns="0" rIns="0" tIns="0" bIns="0">
+            <a:spAutoFit/>
+          </a:bodyPr>
+          <a:lstStyle/>
+          <a:p>
+            <a:pPr algn="l">
+              <a:spcAft>
+                <a:spcPts val="585"/>
+              </a:spcAft>
+            </a:pPr>
+            <a:r>
+              <a:rPr sz="1500" b="1" i="0">
+                <a:solidFill>
+                  <a:srgbClr val="1C1B19"/>
+                </a:solidFill>
+                <a:latin typeface="Source Serif 4"/>
+              </a:rPr>
+              <a:t>Keep it off real people in the room.</a:t>
+            </a:r>
+          </a:p>
+          <a:p>
+            <a:pPr algn="l">
+              <a:spcAft>
+                <a:spcPts val="585"/>
+              </a:spcAft>
+            </a:pPr>
+            <a:r>
+              <a:rPr sz="1300" b="0" i="0">
+                <a:solidFill>
+                  <a:srgbClr val="1C1B19"/>
+                </a:solidFill>
+                <a:latin typeface="Source Serif 4"/>
+              </a:rPr>
+              <a:t>Anger talk can slide into naming a teacher, a teammate or a sibling. Steer back gently: "Let's keep names out of it. What would help in a moment like that?" The scenarios are there so nobody has to use their own story.</a:t>
+            </a:r>
+          </a:p>
+          <a:p>
+            <a:pPr algn="l">
+              <a:spcAft>
+                <a:spcPts val="585"/>
+              </a:spcAft>
+            </a:pPr>
+            <a:r>
+              <a:rPr sz="1300" b="0" i="0">
+                <a:solidFill>
+                  <a:srgbClr val="1C1B19"/>
+                </a:solidFill>
+                <a:latin typeface="Source Serif 4"/>
+              </a:rPr>
+              <a:t/>
+            </a:r>
+          </a:p>
+          <a:p>
+            <a:pPr algn="l">
+              <a:spcAft>
+                <a:spcPts val="585"/>
+              </a:spcAft>
+            </a:pPr>
+            <a:r>
+              <a:rPr sz="1500" b="1" i="0">
+                <a:solidFill>
+                  <a:srgbClr val="1C1B19"/>
+                </a:solidFill>
+                <a:latin typeface="Source Serif 4"/>
+              </a:rPr>
+              <a:t>Nobody shares their own blowup.</a:t>
+            </a:r>
+          </a:p>
+          <a:p>
+            <a:pPr algn="l">
+              <a:spcAft>
+                <a:spcPts val="585"/>
+              </a:spcAft>
+            </a:pPr>
+            <a:r>
+              <a:rPr sz="1300" b="0" i="0">
+                <a:solidFill>
+                  <a:srgbClr val="1C1B19"/>
+                </a:solidFill>
+                <a:latin typeface="Source Serif 4"/>
+              </a:rPr>
+              <a:t>The reflection card is private and goes home with the student. Passing is always fine in the circle.</a:t>
+            </a:r>
+          </a:p>
+          <a:p>
+            <a:pPr algn="l">
+              <a:spcAft>
+                <a:spcPts val="585"/>
+              </a:spcAft>
+            </a:pPr>
+            <a:r>
+              <a:rPr sz="1300" b="0" i="0">
+                <a:solidFill>
+                  <a:srgbClr val="1C1B19"/>
+                </a:solidFill>
+                <a:latin typeface="Source Serif 4"/>
+              </a:rPr>
+              <a:t/>
+            </a:r>
+          </a:p>
+          <a:p>
+            <a:pPr algn="l">
+              <a:spcAft>
+                <a:spcPts val="585"/>
+              </a:spcAft>
+            </a:pPr>
+            <a:r>
+              <a:rPr sz="1500" b="1" i="0">
+                <a:solidFill>
+                  <a:srgbClr val="1C1B19"/>
+                </a:solidFill>
+                <a:latin typeface="Source Serif 4"/>
+              </a:rPr>
+              <a:t>If someone else's anger feels unsafe.</a:t>
+            </a:r>
+          </a:p>
+          <a:p>
+            <a:pPr algn="l">
+              <a:spcAft>
+                <a:spcPts val="585"/>
+              </a:spcAft>
+            </a:pPr>
+            <a:r>
+              <a:rPr sz="1300" b="0" i="0">
+                <a:solidFill>
+                  <a:srgbClr val="1C1B19"/>
+                </a:solidFill>
+                <a:latin typeface="Source Serif 4"/>
+              </a:rPr>
+              <a:t>If a student says anger at home, in a relationship or at school makes them feel unsafe, thank them, don't dig for details in the group, and connect them with a counselor that day. The student page says plainly that this isn't theirs to handle alone.</a:t>
+            </a:r>
+          </a:p>
+          <a:p>
+            <a:pPr algn="l">
+              <a:spcAft>
+                <a:spcPts val="585"/>
+              </a:spcAft>
+            </a:pPr>
+            <a:r>
+              <a:rPr sz="1300" b="0" i="0">
+                <a:solidFill>
+                  <a:srgbClr val="1C1B19"/>
+                </a:solidFill>
+                <a:latin typeface="Source Serif 4"/>
+              </a:rPr>
+              <a:t/>
+            </a:r>
+          </a:p>
+        </p:txBody>
+      </p:sp>
+      <p:sp>
+        <p:nvSpPr>
+          <p:cNvPr id="6" name="TextBox 5"/>
+          <p:cNvSpPr txBox="1"/>
+          <p:nvPr/>
+        </p:nvSpPr>
+        <p:spPr>
+          <a:xfrm>
+            <a:off x="6217920" y="1463040"/>
+            <a:ext cx="5394960" cy="4937760"/>
+          </a:xfrm>
+          <a:prstGeom prst="rect">
+            <a:avLst/>
+          </a:prstGeom>
+          <a:noFill/>
+        </p:spPr>
+        <p:txBody>
+          <a:bodyPr wrap="square" anchor="t" lIns="0" rIns="0" tIns="0" bIns="0">
+            <a:spAutoFit/>
+          </a:bodyPr>
+          <a:lstStyle/>
+          <a:p>
+            <a:pPr algn="l">
+              <a:spcAft>
+                <a:spcPts val="585"/>
+              </a:spcAft>
+            </a:pPr>
+            <a:r>
+              <a:rPr sz="1500" b="1" i="0">
+                <a:solidFill>
+                  <a:srgbClr val="1C1B19"/>
+                </a:solidFill>
+                <a:latin typeface="Source Serif 4"/>
+              </a:rPr>
+              <a:t>If a student has hurt someone or themselves when angry.</a:t>
+            </a:r>
+          </a:p>
+          <a:p>
+            <a:pPr algn="l">
+              <a:spcAft>
+                <a:spcPts val="585"/>
+              </a:spcAft>
+            </a:pPr>
+            <a:r>
+              <a:rPr sz="1300" b="0" i="0">
+                <a:solidFill>
+                  <a:srgbClr val="1C1B19"/>
+                </a:solidFill>
+                <a:latin typeface="Source Serif 4"/>
+              </a:rPr>
+              <a:t>That's a counselor conversation, not a discussion topic. Don't ask screening questions in advisory. Walk them over or let the counselor know after.</a:t>
+            </a:r>
+          </a:p>
+          <a:p>
+            <a:pPr algn="l">
+              <a:spcAft>
+                <a:spcPts val="585"/>
+              </a:spcAft>
+            </a:pPr>
+            <a:r>
+              <a:rPr sz="1300" b="0" i="0">
+                <a:solidFill>
+                  <a:srgbClr val="1C1B19"/>
+                </a:solidFill>
+                <a:latin typeface="Source Serif 4"/>
+              </a:rPr>
+              <a:t/>
+            </a:r>
+          </a:p>
+          <a:p>
+            <a:pPr algn="l">
+              <a:spcAft>
+                <a:spcPts val="585"/>
+              </a:spcAft>
+            </a:pPr>
+            <a:r>
+              <a:rPr sz="1500" b="1" i="0">
+                <a:solidFill>
+                  <a:srgbClr val="1C1B19"/>
+                </a:solidFill>
+                <a:latin typeface="Source Serif 4"/>
+              </a:rPr>
+              <a:t>Who gets read as angry is a real topic.</a:t>
+            </a:r>
+          </a:p>
+          <a:p>
+            <a:pPr algn="l">
+              <a:spcAft>
+                <a:spcPts val="585"/>
+              </a:spcAft>
+            </a:pPr>
+            <a:r>
+              <a:rPr sz="1300" b="0" i="0">
+                <a:solidFill>
+                  <a:srgbClr val="1C1B19"/>
+                </a:solidFill>
+                <a:latin typeface="Source Serif 4"/>
+              </a:rPr>
+              <a:t>Some students, often Black students and students of color, have been called aggressive when they were being firm. If it comes up, believe them and name it as unfair. Don't ask anyone to prove it or explain it for the group.</a:t>
+            </a:r>
+          </a:p>
+          <a:p>
+            <a:pPr algn="l">
+              <a:spcAft>
+                <a:spcPts val="585"/>
+              </a:spcAft>
+            </a:pPr>
+            <a:r>
+              <a:rPr sz="1300" b="0" i="0">
+                <a:solidFill>
+                  <a:srgbClr val="1C1B19"/>
+                </a:solidFill>
+                <a:latin typeface="Source Serif 4"/>
+              </a:rPr>
+              <a:t/>
+            </a:r>
+          </a:p>
+          <a:p>
+            <a:pPr algn="l">
+              <a:spcAft>
+                <a:spcPts val="585"/>
+              </a:spcAft>
+            </a:pPr>
+            <a:r>
+              <a:rPr sz="1500" b="1" i="0">
+                <a:solidFill>
+                  <a:srgbClr val="1C1B19"/>
+                </a:solidFill>
+                <a:latin typeface="Source Serif 4"/>
+              </a:rPr>
+              <a:t>Model the skill you're teaching.</a:t>
+            </a:r>
+          </a:p>
+          <a:p>
+            <a:pPr algn="l">
+              <a:spcAft>
+                <a:spcPts val="585"/>
+              </a:spcAft>
+            </a:pPr>
+            <a:r>
+              <a:rPr sz="1300" b="0" i="0">
+                <a:solidFill>
+                  <a:srgbClr val="1C1B19"/>
+                </a:solidFill>
+                <a:latin typeface="Source Serif 4"/>
+              </a:rPr>
+              <a:t>If the room gets heated, you can say it out loud: "I'm going to slow this down for a second." Students learn the time-out from watching an adult use one.</a:t>
+            </a:r>
+          </a:p>
+          <a:p>
+            <a:pPr algn="l">
+              <a:spcAft>
+                <a:spcPts val="585"/>
+              </a:spcAft>
+            </a:pPr>
+            <a:r>
+              <a:rPr sz="1300" b="0" i="0">
+                <a:solidFill>
+                  <a:srgbClr val="1C1B19"/>
+                </a:solidFill>
+                <a:latin typeface="Source Serif 4"/>
+              </a:rPr>
+              <a:t/>
+            </a:r>
+          </a:p>
+        </p:txBody>
+      </p:sp>
+    </p:spTree>
+  </p:cSld>
+  <p:clrMapOvr>
+    <a:masterClrMapping/>
+  </p:clrMapOvr>
+</p:sld>
+</file>
+
+<file path=ppt/slides/slide12.xml><?xml version="1.0" encoding="utf-8"?>
+<p:sld xmlns:a="http://schemas.openxmlformats.org/drawingml/2006/main" xmlns:p="http://schemas.openxmlformats.org/presentationml/2006/main" xmlns:r="http://schemas.openxmlformats.org/officeDocument/2006/relationships" show="0">
+  <p:cSld>
+    <p:bg>
+      <p:bgPr>
+        <a:solidFill>
+          <a:srgbClr val="EEEBE4"/>
+        </a:solidFill>
+        <a:effectLst/>
+      </p:bgPr>
+    </p:bg>
+    <p:spTree>
+      <p:nvGrpSpPr>
+        <p:cNvPr id="1" name=""/>
+        <p:cNvGrpSpPr/>
+        <p:nvPr/>
+      </p:nvGrpSpPr>
+      <p:grpSpPr/>
+      <p:sp>
+        <p:nvSpPr>
+          <p:cNvPr id="2" name="Rectangle 1"/>
+          <p:cNvSpPr/>
+          <p:nvPr/>
+        </p:nvSpPr>
+        <p:spPr>
+          <a:xfrm>
+            <a:off x="0" y="0"/>
+            <a:ext cx="12191695" cy="384048"/>
+          </a:xfrm>
+          <a:prstGeom prst="rect">
+            <a:avLst/>
+          </a:prstGeom>
+          <a:solidFill>
+            <a:srgbClr val="0B2D5B"/>
+          </a:solidFill>
+          <a:ln>
+            <a:noFill/>
+          </a:ln>
+          <a:effectLst/>
+        </p:spPr>
+        <p:style>
+          <a:lnRef idx="1">
+            <a:schemeClr val="accent1"/>
+          </a:lnRef>
+          <a:fillRef idx="3">
+            <a:schemeClr val="accent1"/>
+          </a:fillRef>
+          <a:effectRef idx="2">
+            <a:schemeClr val="accent1"/>
+          </a:effectRef>
+          <a:fontRef idx="minor">
+            <a:schemeClr val="lt1"/>
+          </a:fontRef>
+        </p:style>
+        <p:txBody>
+          <a:bodyPr rtlCol="0" anchor="ctr"/>
+          <a:lstStyle/>
+          <a:p>
+            <a:pPr algn="ctr"/>
+          </a:p>
+        </p:txBody>
+      </p:sp>
+      <p:sp>
+        <p:nvSpPr>
+          <p:cNvPr id="3" name="TextBox 2"/>
+          <p:cNvSpPr txBox="1"/>
+          <p:nvPr/>
+        </p:nvSpPr>
+        <p:spPr>
+          <a:xfrm>
+            <a:off x="548640" y="100584"/>
+            <a:ext cx="10972800" cy="274320"/>
+          </a:xfrm>
+          <a:prstGeom prst="rect">
+            <a:avLst/>
+          </a:prstGeom>
+          <a:noFill/>
+        </p:spPr>
+        <p:txBody>
+          <a:bodyPr wrap="square" anchor="t" lIns="0" rIns="0" tIns="0" bIns="0">
+            <a:spAutoFit/>
+          </a:bodyPr>
+          <a:lstStyle/>
+          <a:p>
+            <a:pPr algn="l">
+              <a:spcAft>
+                <a:spcPts val="495"/>
+              </a:spcAft>
+            </a:pPr>
+            <a:r>
+              <a:rPr sz="1100" b="1" i="0">
+                <a:solidFill>
+                  <a:srgbClr val="FFFFFF"/>
+                </a:solidFill>
+                <a:latin typeface="Inter Tight"/>
+              </a:rPr>
+              <a:t>TEACHER PAGE  ·  skipped when you present  ·  Every student in the room</a:t>
+            </a:r>
+          </a:p>
+        </p:txBody>
+      </p:sp>
+      <p:sp>
+        <p:nvSpPr>
+          <p:cNvPr id="4" name="TextBox 3"/>
+          <p:cNvSpPr txBox="1"/>
+          <p:nvPr/>
+        </p:nvSpPr>
+        <p:spPr>
+          <a:xfrm>
+            <a:off x="548640" y="685800"/>
+            <a:ext cx="10972800" cy="640080"/>
+          </a:xfrm>
+          <a:prstGeom prst="rect">
+            <a:avLst/>
+          </a:prstGeom>
+          <a:noFill/>
+        </p:spPr>
+        <p:txBody>
+          <a:bodyPr wrap="square" anchor="t" lIns="0" rIns="0" tIns="0" bIns="0">
+            <a:spAutoFit/>
+          </a:bodyPr>
+          <a:lstStyle/>
+          <a:p>
+            <a:pPr algn="l">
+              <a:spcAft>
+                <a:spcPts val="1350"/>
+              </a:spcAft>
+            </a:pPr>
+            <a:r>
+              <a:rPr sz="3000" b="1" i="0">
+                <a:solidFill>
+                  <a:srgbClr val="1C1B19"/>
+                </a:solidFill>
+                <a:latin typeface="Source Serif 4"/>
+              </a:rPr>
+              <a:t>Every student in the room</a:t>
+            </a:r>
+          </a:p>
+        </p:txBody>
+      </p:sp>
+      <p:sp>
+        <p:nvSpPr>
+          <p:cNvPr id="5" name="TextBox 4"/>
+          <p:cNvSpPr txBox="1"/>
+          <p:nvPr/>
+        </p:nvSpPr>
+        <p:spPr>
+          <a:xfrm>
+            <a:off x="548640" y="1325880"/>
+            <a:ext cx="10972800" cy="365760"/>
+          </a:xfrm>
+          <a:prstGeom prst="rect">
+            <a:avLst/>
+          </a:prstGeom>
+          <a:noFill/>
+        </p:spPr>
+        <p:txBody>
+          <a:bodyPr wrap="square" anchor="t" lIns="0" rIns="0" tIns="0" bIns="0">
+            <a:spAutoFit/>
+          </a:bodyPr>
+          <a:lstStyle/>
+          <a:p>
+            <a:pPr algn="l">
+              <a:spcAft>
+                <a:spcPts val="630"/>
+              </a:spcAft>
+            </a:pPr>
+            <a:r>
+              <a:rPr sz="1400" b="0" i="0">
+                <a:solidFill>
+                  <a:srgbClr val="5D5A54"/>
+                </a:solidFill>
+                <a:latin typeface="Inter Tight"/>
+              </a:rPr>
+              <a:t>Culture, family, identity, ability and money: what to keep in mind for this topic.</a:t>
+            </a:r>
+          </a:p>
+        </p:txBody>
+      </p:sp>
+      <p:sp>
+        <p:nvSpPr>
+          <p:cNvPr id="6" name="TextBox 5"/>
+          <p:cNvSpPr txBox="1"/>
+          <p:nvPr/>
+        </p:nvSpPr>
+        <p:spPr>
+          <a:xfrm>
+            <a:off x="548640" y="1828800"/>
+            <a:ext cx="5394960" cy="4572000"/>
+          </a:xfrm>
+          <a:prstGeom prst="rect">
+            <a:avLst/>
+          </a:prstGeom>
+          <a:noFill/>
+        </p:spPr>
+        <p:txBody>
+          <a:bodyPr wrap="square" anchor="t" lIns="0" rIns="0" tIns="0" bIns="0">
+            <a:spAutoFit/>
+          </a:bodyPr>
+          <a:lstStyle/>
+          <a:p>
+            <a:pPr algn="l">
+              <a:spcAft>
+                <a:spcPts val="585"/>
+              </a:spcAft>
+            </a:pPr>
+            <a:r>
+              <a:rPr sz="1500" b="1" i="0">
+                <a:solidFill>
+                  <a:srgbClr val="1C1B19"/>
+                </a:solidFill>
+                <a:latin typeface="Source Serif 4"/>
+              </a:rPr>
+              <a:t>Race and who gets called aggressive.</a:t>
+            </a:r>
+          </a:p>
+          <a:p>
+            <a:pPr algn="l">
+              <a:spcAft>
+                <a:spcPts val="585"/>
+              </a:spcAft>
+            </a:pPr>
+            <a:r>
+              <a:rPr sz="1300" b="0" i="0">
+                <a:solidFill>
+                  <a:srgbClr val="1C1B19"/>
+                </a:solidFill>
+                <a:latin typeface="Source Serif 4"/>
+              </a:rPr>
+              <a:t>The Hugenberg study is on the slide on purpose. Present it as bias in the people watching, and keep the focus on what a student can do if they've been misread: talk it through with someone they trust. Avoid using any student's experience as the example.</a:t>
+            </a:r>
+          </a:p>
+          <a:p>
+            <a:pPr algn="l">
+              <a:spcAft>
+                <a:spcPts val="585"/>
+              </a:spcAft>
+            </a:pPr>
+            <a:r>
+              <a:rPr sz="1300" b="0" i="0">
+                <a:solidFill>
+                  <a:srgbClr val="1C1B19"/>
+                </a:solidFill>
+                <a:latin typeface="Source Serif 4"/>
+              </a:rPr>
+              <a:t/>
+            </a:r>
+          </a:p>
+          <a:p>
+            <a:pPr algn="l">
+              <a:spcAft>
+                <a:spcPts val="585"/>
+              </a:spcAft>
+            </a:pPr>
+            <a:r>
+              <a:rPr sz="1500" b="1" i="0">
+                <a:solidFill>
+                  <a:srgbClr val="1C1B19"/>
+                </a:solidFill>
+                <a:latin typeface="Source Serif 4"/>
+              </a:rPr>
+              <a:t>Family anger rules differ.</a:t>
+            </a:r>
+          </a:p>
+          <a:p>
+            <a:pPr algn="l">
+              <a:spcAft>
+                <a:spcPts val="585"/>
+              </a:spcAft>
+            </a:pPr>
+            <a:r>
+              <a:rPr sz="1300" b="0" i="0">
+                <a:solidFill>
+                  <a:srgbClr val="1C1B19"/>
+                </a:solidFill>
+                <a:latin typeface="Source Serif 4"/>
+              </a:rPr>
+              <a:t>In some homes raised voices blow over in minutes. In others, anger at an elder crosses a serious line. Present both as normal, avoid "In X families" generalizations, and keep the family-rules question private. Say "parent or caregiver": Sam's scenario uses a grandmother.</a:t>
+            </a:r>
+          </a:p>
+          <a:p>
+            <a:pPr algn="l">
+              <a:spcAft>
+                <a:spcPts val="585"/>
+              </a:spcAft>
+            </a:pPr>
+            <a:r>
+              <a:rPr sz="1300" b="0" i="0">
+                <a:solidFill>
+                  <a:srgbClr val="1C1B19"/>
+                </a:solidFill>
+                <a:latin typeface="Source Serif 4"/>
+              </a:rPr>
+              <a:t/>
+            </a:r>
+          </a:p>
+          <a:p>
+            <a:pPr algn="l">
+              <a:spcAft>
+                <a:spcPts val="585"/>
+              </a:spcAft>
+            </a:pPr>
+            <a:r>
+              <a:rPr sz="1500" b="1" i="0">
+                <a:solidFill>
+                  <a:srgbClr val="1C1B19"/>
+                </a:solidFill>
+                <a:latin typeface="Source Serif 4"/>
+              </a:rPr>
+              <a:t>Girls get angry. Boys get hurt.</a:t>
+            </a:r>
+          </a:p>
+          <a:p>
+            <a:pPr algn="l">
+              <a:spcAft>
+                <a:spcPts val="585"/>
+              </a:spcAft>
+            </a:pPr>
+            <a:r>
+              <a:rPr sz="1300" b="0" i="0">
+                <a:solidFill>
+                  <a:srgbClr val="1C1B19"/>
+                </a:solidFill>
+                <a:latin typeface="Source Serif 4"/>
+              </a:rPr>
+              <a:t>Students hear early on that anger is unattractive in girls and that boys should only show anger. Mix genders in your examples, and when naming what's under anger, say clearly that anyone can be hurt, scared or embarrassed.</a:t>
+            </a:r>
+          </a:p>
+          <a:p>
+            <a:pPr algn="l">
+              <a:spcAft>
+                <a:spcPts val="585"/>
+              </a:spcAft>
+            </a:pPr>
+            <a:r>
+              <a:rPr sz="1300" b="0" i="0">
+                <a:solidFill>
+                  <a:srgbClr val="1C1B19"/>
+                </a:solidFill>
+                <a:latin typeface="Source Serif 4"/>
+              </a:rPr>
+              <a:t/>
+            </a:r>
+          </a:p>
+        </p:txBody>
+      </p:sp>
+      <p:sp>
+        <p:nvSpPr>
+          <p:cNvPr id="7" name="TextBox 6"/>
+          <p:cNvSpPr txBox="1"/>
+          <p:nvPr/>
+        </p:nvSpPr>
+        <p:spPr>
+          <a:xfrm>
+            <a:off x="6217920" y="1828800"/>
+            <a:ext cx="5394960" cy="4572000"/>
+          </a:xfrm>
+          <a:prstGeom prst="rect">
+            <a:avLst/>
+          </a:prstGeom>
+          <a:noFill/>
+        </p:spPr>
+        <p:txBody>
+          <a:bodyPr wrap="square" anchor="t" lIns="0" rIns="0" tIns="0" bIns="0">
+            <a:spAutoFit/>
+          </a:bodyPr>
+          <a:lstStyle/>
+          <a:p>
+            <a:pPr algn="l">
+              <a:spcAft>
+                <a:spcPts val="585"/>
+              </a:spcAft>
+            </a:pPr>
+            <a:r>
+              <a:rPr sz="1500" b="1" i="0">
+                <a:solidFill>
+                  <a:srgbClr val="1C1B19"/>
+                </a:solidFill>
+                <a:latin typeface="Source Serif 4"/>
+              </a:rPr>
+              <a:t>Bodies and brains signal differently.</a:t>
+            </a:r>
+          </a:p>
+          <a:p>
+            <a:pPr algn="l">
+              <a:spcAft>
+                <a:spcPts val="585"/>
+              </a:spcAft>
+            </a:pPr>
+            <a:r>
+              <a:rPr sz="1300" b="0" i="0">
+                <a:solidFill>
+                  <a:srgbClr val="1C1B19"/>
+                </a:solidFill>
+                <a:latin typeface="Source Serif 4"/>
+              </a:rPr>
+              <a:t>Some students, including autistic students and students with ADHD, notice body signals late, or get flooded by noise, crowds or sensory overload before anger shows. "Catch it early" can mean noticing the room, too. Don't treat eye contact or staying seated as signs of calm, and never use "psycho" or "crazy" as shorthand.</a:t>
+            </a:r>
+          </a:p>
+          <a:p>
+            <a:pPr algn="l">
+              <a:spcAft>
+                <a:spcPts val="585"/>
+              </a:spcAft>
+            </a:pPr>
+            <a:r>
+              <a:rPr sz="1300" b="0" i="0">
+                <a:solidFill>
+                  <a:srgbClr val="1C1B19"/>
+                </a:solidFill>
+                <a:latin typeface="Source Serif 4"/>
+              </a:rPr>
+              <a:t/>
+            </a:r>
+          </a:p>
+          <a:p>
+            <a:pPr algn="l">
+              <a:spcAft>
+                <a:spcPts val="585"/>
+              </a:spcAft>
+            </a:pPr>
+            <a:r>
+              <a:rPr sz="1500" b="1" i="0">
+                <a:solidFill>
+                  <a:srgbClr val="1C1B19"/>
+                </a:solidFill>
+                <a:latin typeface="Source Serif 4"/>
+              </a:rPr>
+              <a:t>Not everyone can walk away.</a:t>
+            </a:r>
+          </a:p>
+          <a:p>
+            <a:pPr algn="l">
+              <a:spcAft>
+                <a:spcPts val="585"/>
+              </a:spcAft>
+            </a:pPr>
+            <a:r>
+              <a:rPr sz="1300" b="0" i="0">
+                <a:solidFill>
+                  <a:srgbClr val="1C1B19"/>
+                </a:solidFill>
+                <a:latin typeface="Source Serif 4"/>
+              </a:rPr>
+              <a:t>Ines may not be able to quit a job her family counts on, and some students can't leave a room at work or at home. Breathing out slowly and cold water on the hands work anywhere and cost nothing. Name those first.</a:t>
+            </a:r>
+          </a:p>
+          <a:p>
+            <a:pPr algn="l">
+              <a:spcAft>
+                <a:spcPts val="585"/>
+              </a:spcAft>
+            </a:pPr>
+            <a:r>
+              <a:rPr sz="1300" b="0" i="0">
+                <a:solidFill>
+                  <a:srgbClr val="1C1B19"/>
+                </a:solidFill>
+                <a:latin typeface="Source Serif 4"/>
+              </a:rPr>
+              <a:t/>
+            </a:r>
+          </a:p>
+          <a:p>
+            <a:pPr algn="l">
+              <a:spcAft>
+                <a:spcPts val="585"/>
+              </a:spcAft>
+            </a:pPr>
+            <a:r>
+              <a:rPr sz="1500" b="1" i="0">
+                <a:solidFill>
+                  <a:srgbClr val="1C1B19"/>
+                </a:solidFill>
+                <a:latin typeface="Source Serif 4"/>
+              </a:rPr>
+              <a:t>Faith can be a tool.</a:t>
+            </a:r>
+          </a:p>
+          <a:p>
+            <a:pPr algn="l">
+              <a:spcAft>
+                <a:spcPts val="585"/>
+              </a:spcAft>
+            </a:pPr>
+            <a:r>
+              <a:rPr sz="1300" b="0" i="0">
+                <a:solidFill>
+                  <a:srgbClr val="1C1B19"/>
+                </a:solidFill>
+                <a:latin typeface="Source Serif 4"/>
+              </a:rPr>
+              <a:t>For some students, prayer, a verse or a moment of quiet is how they cool down. For others it's music or a walk. "Whatever brings your body down" covers all of it.</a:t>
+            </a:r>
+          </a:p>
+          <a:p>
+            <a:pPr algn="l">
+              <a:spcAft>
+                <a:spcPts val="585"/>
+              </a:spcAft>
+            </a:pPr>
+            <a:r>
+              <a:rPr sz="1300" b="0" i="0">
+                <a:solidFill>
+                  <a:srgbClr val="1C1B19"/>
+                </a:solidFill>
+                <a:latin typeface="Source Serif 4"/>
+              </a:rPr>
+              <a:t/>
+            </a:r>
+          </a:p>
+        </p:txBody>
+      </p:sp>
+    </p:spTree>
+  </p:cSld>
+  <p:clrMapOvr>
+    <a:masterClrMapping/>
+  </p:clrMapOvr>
+</p:sld>
+</file>
+
+<file path=ppt/slides/slide13.xml><?xml version="1.0" encoding="utf-8"?>
+<p:sld xmlns:a="http://schemas.openxmlformats.org/drawingml/2006/main" xmlns:p="http://schemas.openxmlformats.org/presentationml/2006/main" xmlns:r="http://schemas.openxmlformats.org/officeDocument/2006/relationships" show="0">
+  <p:cSld>
+    <p:bg>
+      <p:bgPr>
+        <a:solidFill>
+          <a:srgbClr val="EEEBE4"/>
+        </a:solidFill>
+        <a:effectLst/>
+      </p:bgPr>
+    </p:bg>
+    <p:spTree>
+      <p:nvGrpSpPr>
+        <p:cNvPr id="1" name=""/>
+        <p:cNvGrpSpPr/>
+        <p:nvPr/>
+      </p:nvGrpSpPr>
+      <p:grpSpPr/>
+      <p:sp>
+        <p:nvSpPr>
+          <p:cNvPr id="2" name="Rectangle 1"/>
+          <p:cNvSpPr/>
+          <p:nvPr/>
+        </p:nvSpPr>
+        <p:spPr>
+          <a:xfrm>
+            <a:off x="0" y="0"/>
+            <a:ext cx="12191695" cy="384048"/>
+          </a:xfrm>
+          <a:prstGeom prst="rect">
+            <a:avLst/>
+          </a:prstGeom>
+          <a:solidFill>
+            <a:srgbClr val="0B2D5B"/>
+          </a:solidFill>
+          <a:ln>
+            <a:noFill/>
+          </a:ln>
+          <a:effectLst/>
+        </p:spPr>
+        <p:style>
+          <a:lnRef idx="1">
+            <a:schemeClr val="accent1"/>
+          </a:lnRef>
+          <a:fillRef idx="3">
+            <a:schemeClr val="accent1"/>
+          </a:fillRef>
+          <a:effectRef idx="2">
+            <a:schemeClr val="accent1"/>
+          </a:effectRef>
+          <a:fontRef idx="minor">
+            <a:schemeClr val="lt1"/>
+          </a:fontRef>
+        </p:style>
+        <p:txBody>
+          <a:bodyPr rtlCol="0" anchor="ctr"/>
+          <a:lstStyle/>
+          <a:p>
+            <a:pPr algn="ctr"/>
+          </a:p>
+        </p:txBody>
+      </p:sp>
+      <p:sp>
+        <p:nvSpPr>
+          <p:cNvPr id="3" name="TextBox 2"/>
+          <p:cNvSpPr txBox="1"/>
+          <p:nvPr/>
+        </p:nvSpPr>
+        <p:spPr>
+          <a:xfrm>
+            <a:off x="548640" y="100584"/>
+            <a:ext cx="10972800" cy="274320"/>
+          </a:xfrm>
+          <a:prstGeom prst="rect">
+            <a:avLst/>
+          </a:prstGeom>
+          <a:noFill/>
+        </p:spPr>
+        <p:txBody>
+          <a:bodyPr wrap="square" anchor="t" lIns="0" rIns="0" tIns="0" bIns="0">
+            <a:spAutoFit/>
+          </a:bodyPr>
+          <a:lstStyle/>
+          <a:p>
+            <a:pPr algn="l">
+              <a:spcAft>
+                <a:spcPts val="495"/>
+              </a:spcAft>
+            </a:pPr>
+            <a:r>
+              <a:rPr sz="1100" b="1" i="0">
+                <a:solidFill>
+                  <a:srgbClr val="FFFFFF"/>
+                </a:solidFill>
+                <a:latin typeface="Inter Tight"/>
+              </a:rPr>
+              <a:t>TEACHER PAGE  ·  skipped when you present  ·  Background</a:t>
+            </a:r>
+          </a:p>
+        </p:txBody>
+      </p:sp>
+      <p:sp>
+        <p:nvSpPr>
+          <p:cNvPr id="4" name="TextBox 3"/>
+          <p:cNvSpPr txBox="1"/>
+          <p:nvPr/>
+        </p:nvSpPr>
+        <p:spPr>
+          <a:xfrm>
+            <a:off x="548640" y="685800"/>
+            <a:ext cx="10972800" cy="640080"/>
+          </a:xfrm>
+          <a:prstGeom prst="rect">
+            <a:avLst/>
+          </a:prstGeom>
+          <a:noFill/>
+        </p:spPr>
+        <p:txBody>
+          <a:bodyPr wrap="square" anchor="t" lIns="0" rIns="0" tIns="0" bIns="0">
+            <a:spAutoFit/>
+          </a:bodyPr>
+          <a:lstStyle/>
+          <a:p>
+            <a:pPr algn="l">
+              <a:spcAft>
+                <a:spcPts val="1350"/>
+              </a:spcAft>
+            </a:pPr>
+            <a:r>
+              <a:rPr sz="3000" b="1" i="0">
+                <a:solidFill>
+                  <a:srgbClr val="1C1B19"/>
+                </a:solidFill>
+                <a:latin typeface="Source Serif 4"/>
+              </a:rPr>
+              <a:t>What the research says</a:t>
+            </a:r>
+          </a:p>
+        </p:txBody>
+      </p:sp>
+      <p:sp>
+        <p:nvSpPr>
+          <p:cNvPr id="5" name="TextBox 4"/>
+          <p:cNvSpPr txBox="1"/>
+          <p:nvPr/>
+        </p:nvSpPr>
+        <p:spPr>
+          <a:xfrm>
+            <a:off x="548640" y="1463040"/>
+            <a:ext cx="5394960" cy="4937760"/>
+          </a:xfrm>
+          <a:prstGeom prst="rect">
+            <a:avLst/>
+          </a:prstGeom>
+          <a:noFill/>
+        </p:spPr>
+        <p:txBody>
+          <a:bodyPr wrap="square" anchor="t" lIns="0" rIns="0" tIns="0" bIns="0">
+            <a:spAutoFit/>
+          </a:bodyPr>
+          <a:lstStyle/>
+          <a:p>
+            <a:pPr algn="l">
+              <a:spcAft>
+                <a:spcPts val="585"/>
+              </a:spcAft>
+            </a:pPr>
+            <a:r>
+              <a:rPr sz="1300" b="0" i="0">
+                <a:solidFill>
+                  <a:srgbClr val="1C1B19"/>
+                </a:solidFill>
+                <a:latin typeface="Source Serif 4"/>
+              </a:rPr>
+              <a:t>Neuroscientist James Blair calls the amygdala, hypothalamus and periaqueductal gray the brain's "basic threat system" and links it to both anger and reactive aggression. The prefrontal cortex reads context and can turn the alarm down.</a:t>
+            </a:r>
+          </a:p>
+          <a:p>
+            <a:pPr algn="l">
+              <a:spcAft>
+                <a:spcPts val="585"/>
+              </a:spcAft>
+            </a:pPr>
+            <a:r>
+              <a:rPr sz="1050" b="0" i="0">
+                <a:solidFill>
+                  <a:srgbClr val="5D5A54"/>
+                </a:solidFill>
+                <a:latin typeface="Inter Tight"/>
+              </a:rPr>
+              <a:t>Blair, 2012, WIREs Cognitive Science</a:t>
+            </a:r>
+          </a:p>
+          <a:p>
+            <a:pPr algn="l">
+              <a:spcAft>
+                <a:spcPts val="585"/>
+              </a:spcAft>
+            </a:pPr>
+            <a:r>
+              <a:rPr sz="1300" b="0" i="0">
+                <a:solidFill>
+                  <a:srgbClr val="1C1B19"/>
+                </a:solidFill>
+                <a:latin typeface="Source Serif 4"/>
+              </a:rPr>
+              <a:t>Angry college students who hit a punching bag while thinking about the person who angered them ended up angrier and more aggressive than students who did nothing at all.</a:t>
+            </a:r>
+          </a:p>
+          <a:p>
+            <a:pPr algn="l">
+              <a:spcAft>
+                <a:spcPts val="585"/>
+              </a:spcAft>
+            </a:pPr>
+            <a:r>
+              <a:rPr sz="1050" b="0" i="0">
+                <a:solidFill>
+                  <a:srgbClr val="5D5A54"/>
+                </a:solidFill>
+                <a:latin typeface="Inter Tight"/>
+              </a:rPr>
+              <a:t>Bushman, 2002, Personality and Social Psychology Bulletin</a:t>
+            </a:r>
+          </a:p>
+          <a:p>
+            <a:pPr algn="l">
+              <a:spcAft>
+                <a:spcPts val="585"/>
+              </a:spcAft>
+            </a:pPr>
+            <a:r>
+              <a:rPr sz="1300" b="0" i="0">
+                <a:solidFill>
+                  <a:srgbClr val="1C1B19"/>
+                </a:solidFill>
+                <a:latin typeface="Source Serif 4"/>
+              </a:rPr>
+              <a:t>A review of 154 studies found that activities that lower arousal (slow breathing, muscle relaxation, mindfulness, slow yoga, a time-out) reduced anger. Activities that raise it, like running or boxing, generally did not, and sometimes made it worse.</a:t>
+            </a:r>
+          </a:p>
+          <a:p>
+            <a:pPr algn="l">
+              <a:spcAft>
+                <a:spcPts val="585"/>
+              </a:spcAft>
+            </a:pPr>
+            <a:r>
+              <a:rPr sz="1050" b="0" i="0">
+                <a:solidFill>
+                  <a:srgbClr val="5D5A54"/>
+                </a:solidFill>
+                <a:latin typeface="Inter Tight"/>
+              </a:rPr>
+              <a:t>Kjærvik and Bushman, 2024, Clinical Psychology Review</a:t>
+            </a:r>
+          </a:p>
+        </p:txBody>
+      </p:sp>
+      <p:sp>
+        <p:nvSpPr>
+          <p:cNvPr id="6" name="TextBox 5"/>
+          <p:cNvSpPr txBox="1"/>
+          <p:nvPr/>
+        </p:nvSpPr>
+        <p:spPr>
+          <a:xfrm>
+            <a:off x="6217920" y="1463040"/>
+            <a:ext cx="5394960" cy="4937760"/>
+          </a:xfrm>
+          <a:prstGeom prst="rect">
+            <a:avLst/>
+          </a:prstGeom>
+          <a:noFill/>
+        </p:spPr>
+        <p:txBody>
+          <a:bodyPr wrap="square" anchor="t" lIns="0" rIns="0" tIns="0" bIns="0">
+            <a:spAutoFit/>
+          </a:bodyPr>
+          <a:lstStyle/>
+          <a:p>
+            <a:pPr algn="l">
+              <a:spcAft>
+                <a:spcPts val="585"/>
+              </a:spcAft>
+            </a:pPr>
+            <a:r>
+              <a:rPr sz="1300" b="0" i="0">
+                <a:solidFill>
+                  <a:srgbClr val="1C1B19"/>
+                </a:solidFill>
+                <a:latin typeface="Source Serif 4"/>
+              </a:rPr>
+              <a:t>People who looked back on an angering memory from a "fly on the wall" view felt less angry than people who relived it from the inside.</a:t>
+            </a:r>
+          </a:p>
+          <a:p>
+            <a:pPr algn="l">
+              <a:spcAft>
+                <a:spcPts val="585"/>
+              </a:spcAft>
+            </a:pPr>
+            <a:r>
+              <a:rPr sz="1050" b="0" i="0">
+                <a:solidFill>
+                  <a:srgbClr val="5D5A54"/>
+                </a:solidFill>
+                <a:latin typeface="Inter Tight"/>
+              </a:rPr>
+              <a:t>Kross, Ayduk and Mischel, 2005, Psychological Science</a:t>
+            </a:r>
+          </a:p>
+          <a:p>
+            <a:pPr algn="l">
+              <a:spcAft>
+                <a:spcPts val="585"/>
+              </a:spcAft>
+            </a:pPr>
+            <a:r>
+              <a:rPr sz="1300" b="0" i="0">
+                <a:solidFill>
+                  <a:srgbClr val="1C1B19"/>
+                </a:solidFill>
+                <a:latin typeface="Source Serif 4"/>
+              </a:rPr>
+              <a:t>White participants with more implicit racial bias were quicker to see anger in Black faces than in white faces.</a:t>
+            </a:r>
+          </a:p>
+          <a:p>
+            <a:pPr algn="l">
+              <a:spcAft>
+                <a:spcPts val="585"/>
+              </a:spcAft>
+            </a:pPr>
+            <a:r>
+              <a:rPr sz="1050" b="0" i="0">
+                <a:solidFill>
+                  <a:srgbClr val="5D5A54"/>
+                </a:solidFill>
+                <a:latin typeface="Inter Tight"/>
+              </a:rPr>
+              <a:t>Hugenberg and Bodenhausen, 2003, Psychological Science</a:t>
+            </a:r>
+          </a:p>
+          <a:p>
+            <a:pPr algn="l">
+              <a:spcAft>
+                <a:spcPts val="585"/>
+              </a:spcAft>
+            </a:pPr>
+            <a:r>
+              <a:rPr sz="1300" b="0" i="0">
+                <a:solidFill>
+                  <a:srgbClr val="1C1B19"/>
+                </a:solidFill>
+                <a:latin typeface="Source Serif 4"/>
+              </a:rPr>
+              <a:t>People who suppressed their emotions during a conversation came across as less responsive, and their partners formed more negative impressions. The cost was smaller for people with more Asian cultural values, where restraint is expected.</a:t>
+            </a:r>
+          </a:p>
+          <a:p>
+            <a:pPr algn="l">
+              <a:spcAft>
+                <a:spcPts val="585"/>
+              </a:spcAft>
+            </a:pPr>
+            <a:r>
+              <a:rPr sz="1050" b="0" i="0">
+                <a:solidFill>
+                  <a:srgbClr val="5D5A54"/>
+                </a:solidFill>
+                <a:latin typeface="Inter Tight"/>
+              </a:rPr>
+              <a:t>Butler, Lee and Gross, 2007, Emotion</a:t>
+            </a:r>
+          </a:p>
+        </p:txBody>
+      </p:sp>
+    </p:spTree>
+  </p:cSld>
+  <p:clrMapOvr>
+    <a:masterClrMapping/>
+  </p:clrMapOvr>
+</p:sld>
+</file>
+
+<file path=ppt/slides/slide2.xml><?xml version="1.0" encoding="utf-8"?>
+<p:sld xmlns:a="http://schemas.openxmlformats.org/drawingml/2006/main" xmlns:p="http://schemas.openxmlformats.org/presentationml/2006/main" xmlns:r="http://schemas.openxmlformats.org/officeDocument/2006/relationships">
+  <p:cSld>
+    <p:bg>
+      <p:bgPr>
+        <a:solidFill>
+          <a:srgbClr val="0B2D5B"/>
+        </a:solidFill>
+        <a:effectLst/>
+      </p:bgPr>
+    </p:bg>
+    <p:spTree>
+      <p:nvGrpSpPr>
+        <p:cNvPr id="1" name=""/>
+        <p:cNvGrpSpPr/>
+        <p:nvPr/>
+      </p:nvGrpSpPr>
+      <p:grpSpPr/>
+      <p:sp>
+        <p:nvSpPr>
+          <p:cNvPr id="2" name="Rectangle 1"/>
+          <p:cNvSpPr/>
+          <p:nvPr/>
+        </p:nvSpPr>
+        <p:spPr>
+          <a:xfrm>
+            <a:off x="548640" y="502920"/>
+            <a:ext cx="457200" cy="54864"/>
+          </a:xfrm>
+          <a:prstGeom prst="rect">
+            <a:avLst/>
+          </a:prstGeom>
+          <a:solidFill>
+            <a:srgbClr val="F47B20"/>
+          </a:solidFill>
+          <a:ln>
+            <a:noFill/>
+          </a:ln>
+          <a:effectLst/>
+        </p:spPr>
+        <p:style>
+          <a:lnRef idx="1">
+            <a:schemeClr val="accent1"/>
+          </a:lnRef>
+          <a:fillRef idx="3">
+            <a:schemeClr val="accent1"/>
+          </a:fillRef>
+          <a:effectRef idx="2">
+            <a:schemeClr val="accent1"/>
+          </a:effectRef>
+          <a:fontRef idx="minor">
+            <a:schemeClr val="lt1"/>
+          </a:fontRef>
+        </p:style>
+        <p:txBody>
+          <a:bodyPr rtlCol="0" anchor="ctr"/>
+          <a:lstStyle/>
+          <a:p>
+            <a:pPr algn="ctr"/>
+          </a:p>
+        </p:txBody>
+      </p:sp>
+      <p:sp>
+        <p:nvSpPr>
+          <p:cNvPr id="3" name="TextBox 2"/>
+          <p:cNvSpPr txBox="1"/>
+          <p:nvPr/>
+        </p:nvSpPr>
+        <p:spPr>
+          <a:xfrm>
+            <a:off x="1143000" y="393192"/>
+            <a:ext cx="8229600" cy="274320"/>
+          </a:xfrm>
+          <a:prstGeom prst="rect">
+            <a:avLst/>
+          </a:prstGeom>
+          <a:noFill/>
+        </p:spPr>
+        <p:txBody>
+          <a:bodyPr wrap="square" anchor="t" lIns="0" rIns="0" tIns="0" bIns="0">
+            <a:spAutoFit/>
+          </a:bodyPr>
+          <a:lstStyle/>
+          <a:p>
+            <a:pPr algn="l">
+              <a:spcAft>
+                <a:spcPts val="540"/>
+              </a:spcAft>
+            </a:pPr>
+            <a:r>
+              <a:rPr sz="1200" b="1" i="0">
+                <a:solidFill>
+                  <a:srgbClr val="5D5A54"/>
+                </a:solidFill>
+                <a:latin typeface="Inter Tight"/>
+              </a:rPr>
+              <a:t>ANGER IS INFORMATION</a:t>
+            </a:r>
+          </a:p>
+        </p:txBody>
+      </p:sp>
+      <p:sp>
+        <p:nvSpPr>
+          <p:cNvPr id="4" name="TextBox 3"/>
+          <p:cNvSpPr txBox="1"/>
+          <p:nvPr/>
+        </p:nvSpPr>
+        <p:spPr>
+          <a:xfrm>
+            <a:off x="8229600" y="6400800"/>
+            <a:ext cx="3410712" cy="274320"/>
+          </a:xfrm>
+          <a:prstGeom prst="rect">
+            <a:avLst/>
+          </a:prstGeom>
+          <a:noFill/>
+        </p:spPr>
+        <p:txBody>
+          <a:bodyPr wrap="square" anchor="t" lIns="0" rIns="0" tIns="0" bIns="0">
+            <a:spAutoFit/>
+          </a:bodyPr>
+          <a:lstStyle/>
+          <a:p>
+            <a:pPr algn="r">
+              <a:spcAft>
+                <a:spcPts val="450"/>
+              </a:spcAft>
+            </a:pPr>
+            <a:r>
+              <a:rPr sz="1000" b="0" i="0">
+                <a:solidFill>
+                  <a:srgbClr val="5D5A54"/>
+                </a:solidFill>
+                <a:latin typeface="Inter Tight"/>
+              </a:rPr>
+              <a:t>Beaver Counseling</a:t>
+            </a:r>
+          </a:p>
+        </p:txBody>
+      </p:sp>
+      <p:sp>
+        <p:nvSpPr>
+          <p:cNvPr id="5" name="TextBox 4"/>
+          <p:cNvSpPr txBox="1"/>
+          <p:nvPr/>
+        </p:nvSpPr>
+        <p:spPr>
+          <a:xfrm>
+            <a:off x="822960" y="2011680"/>
+            <a:ext cx="10515600" cy="1463040"/>
+          </a:xfrm>
+          <a:prstGeom prst="rect">
+            <a:avLst/>
+          </a:prstGeom>
+          <a:noFill/>
+        </p:spPr>
+        <p:txBody>
+          <a:bodyPr wrap="square" anchor="b" lIns="0" rIns="0" tIns="0" bIns="0">
+            <a:spAutoFit/>
+          </a:bodyPr>
+          <a:lstStyle/>
+          <a:p>
+            <a:pPr algn="l">
+              <a:spcAft>
+                <a:spcPts val="2700"/>
+              </a:spcAft>
+            </a:pPr>
+            <a:r>
+              <a:rPr sz="6000" b="1" i="0">
+                <a:solidFill>
+                  <a:srgbClr val="FFFFFF"/>
+                </a:solidFill>
+                <a:latin typeface="Source Serif 4"/>
+              </a:rPr>
+              <a:t>Anger Is Information</a:t>
+            </a:r>
+          </a:p>
+        </p:txBody>
+      </p:sp>
+      <p:sp>
+        <p:nvSpPr>
+          <p:cNvPr id="6" name="TextBox 5"/>
+          <p:cNvSpPr txBox="1"/>
+          <p:nvPr/>
+        </p:nvSpPr>
+        <p:spPr>
+          <a:xfrm>
+            <a:off x="822960" y="3611880"/>
+            <a:ext cx="10515600" cy="914400"/>
+          </a:xfrm>
+          <a:prstGeom prst="rect">
+            <a:avLst/>
+          </a:prstGeom>
+          <a:noFill/>
+        </p:spPr>
+        <p:txBody>
+          <a:bodyPr wrap="square" anchor="t" lIns="0" rIns="0" tIns="0" bIns="0">
+            <a:spAutoFit/>
+          </a:bodyPr>
+          <a:lstStyle/>
+          <a:p>
+            <a:pPr algn="l">
+              <a:spcAft>
+                <a:spcPts val="1080"/>
+              </a:spcAft>
+            </a:pPr>
+            <a:r>
+              <a:rPr sz="2400" b="0" i="1">
+                <a:solidFill>
+                  <a:srgbClr val="E8E4DA"/>
+                </a:solidFill>
+                <a:latin typeface="Source Serif 4"/>
+              </a:rPr>
+              <a:t>Usually right about the problem. Often wrong about the response.</a:t>
+            </a:r>
+          </a:p>
+        </p:txBody>
+      </p:sp>
+      <p:sp>
+        <p:nvSpPr>
+          <p:cNvPr id="7" name="TextBox 6"/>
+          <p:cNvSpPr txBox="1"/>
+          <p:nvPr/>
+        </p:nvSpPr>
+        <p:spPr>
+          <a:xfrm>
+            <a:off x="822960" y="6035040"/>
+            <a:ext cx="7315200" cy="365760"/>
+          </a:xfrm>
+          <a:prstGeom prst="rect">
+            <a:avLst/>
+          </a:prstGeom>
+          <a:noFill/>
+        </p:spPr>
+        <p:txBody>
+          <a:bodyPr wrap="square" anchor="t" lIns="0" rIns="0" tIns="0" bIns="0">
+            <a:spAutoFit/>
+          </a:bodyPr>
+          <a:lstStyle/>
+          <a:p>
+            <a:pPr algn="l">
+              <a:spcAft>
+                <a:spcPts val="585"/>
+              </a:spcAft>
+            </a:pPr>
+            <a:r>
+              <a:rPr sz="1300" b="0" i="0">
+                <a:solidFill>
+                  <a:srgbClr val="E8E4DA"/>
+                </a:solidFill>
+                <a:latin typeface="Inter Tight"/>
+              </a:rPr>
+              <a:t>Beaver Upper School · Counseling</a:t>
+            </a:r>
+          </a:p>
+        </p:txBody>
+      </p:sp>
+    </p:spTree>
+  </p:cSld>
+  <p:clrMapOvr>
+    <a:masterClrMapping/>
+  </p:clrMapOvr>
+</p:sld>
+</file>
+
+<file path=ppt/slides/slide3.xml><?xml version="1.0" encoding="utf-8"?>
 <p:sld xmlns:a="http://schemas.openxmlformats.org/drawingml/2006/main" xmlns:p="http://schemas.openxmlformats.org/presentationml/2006/main" xmlns:r="http://schemas.openxmlformats.org/officeDocument/2006/relationships">
   <p:cSld>
     <p:bg>
@@ -4749,7 +6764,7 @@
                 </a:solidFill>
                 <a:latin typeface="Inter Tight"/>
               </a:rPr>
-              <a:t>THREE SITUATIONS</a:t>
+              <a:t>SOUND FAMILIAR?</a:t>
             </a:r>
           </a:p>
         </p:txBody>
@@ -4802,7 +6817,7 @@
         <p:spPr>
           <a:xfrm>
             <a:off x="822960" y="1005840"/>
-            <a:ext cx="10515600" cy="914400"/>
+            <a:ext cx="10515600" cy="1097280"/>
           </a:xfrm>
           <a:prstGeom prst="rect">
             <a:avLst/>
@@ -4817,64 +6832,57 @@
           <a:p>
             <a:pPr algn="l">
               <a:spcAft>
-                <a:spcPts val="1530"/>
-              </a:spcAft>
-            </a:pPr>
-            <a:r>
-              <a:rPr sz="3400" b="1" i="0">
+                <a:spcPts val="1620"/>
+              </a:spcAft>
+            </a:pPr>
+            <a:r>
+              <a:rPr sz="3600" b="1" i="0">
                 <a:solidFill>
                   <a:srgbClr val="1C1B19"/>
                 </a:solidFill>
                 <a:latin typeface="Source Serif 4"/>
               </a:rPr>
-              <a:t>Stand up without blowing up.</a:t>
-            </a:r>
-          </a:p>
-        </p:txBody>
-      </p:sp>
-      <p:sp>
-        <p:nvSpPr>
-          <p:cNvPr id="6" name="Rectangle 5"/>
-          <p:cNvSpPr/>
+              <a:t>Hand up if this has happened to you.</a:t>
+            </a:r>
+          </a:p>
+        </p:txBody>
+      </p:sp>
+      <p:sp>
+        <p:nvSpPr>
+          <p:cNvPr id="6" name="TextBox 5"/>
+          <p:cNvSpPr txBox="1"/>
           <p:nvPr/>
         </p:nvSpPr>
         <p:spPr>
           <a:xfrm>
-            <a:off x="822960" y="2103120"/>
-            <a:ext cx="3322320" cy="3840480"/>
-          </a:xfrm>
-          <a:prstGeom prst="rect">
-            <a:avLst/>
-          </a:prstGeom>
-          <a:solidFill>
-            <a:srgbClr val="FFFFFF"/>
-          </a:solidFill>
-          <a:ln w="15875">
-            <a:solidFill>
-              <a:srgbClr val="D8D2C6"/>
-            </a:solidFill>
-          </a:ln>
-          <a:effectLst/>
-        </p:spPr>
-        <p:style>
-          <a:lnRef idx="1">
-            <a:schemeClr val="accent1"/>
-          </a:lnRef>
-          <a:fillRef idx="3">
-            <a:schemeClr val="accent1"/>
-          </a:fillRef>
-          <a:effectRef idx="2">
-            <a:schemeClr val="accent1"/>
-          </a:effectRef>
-          <a:fontRef idx="minor">
-            <a:schemeClr val="lt1"/>
-          </a:fontRef>
-        </p:style>
-        <p:txBody>
-          <a:bodyPr rtlCol="0" anchor="ctr"/>
-          <a:lstStyle/>
-          <a:p>
-            <a:pPr algn="ctr"/>
+            <a:off x="822960" y="2057400"/>
+            <a:ext cx="548640" cy="804672"/>
+          </a:xfrm>
+          <a:prstGeom prst="rect">
+            <a:avLst/>
+          </a:prstGeom>
+          <a:noFill/>
+        </p:spPr>
+        <p:txBody>
+          <a:bodyPr wrap="square" anchor="t" lIns="0" rIns="0" tIns="0" bIns="0">
+            <a:spAutoFit/>
+          </a:bodyPr>
+          <a:lstStyle/>
+          <a:p>
+            <a:pPr algn="l">
+              <a:spcAft>
+                <a:spcPts val="1170"/>
+              </a:spcAft>
+            </a:pPr>
+            <a:r>
+              <a:rPr sz="2600" b="1" i="0">
+                <a:solidFill>
+                  <a:srgbClr val="F47B20"/>
+                </a:solidFill>
+                <a:latin typeface="Source Serif 4"/>
+              </a:rPr>
+              <a:t>•</a:t>
+            </a:r>
           </a:p>
         </p:txBody>
       </p:sp>
@@ -4886,8 +6894,8 @@
         </p:nvSpPr>
         <p:spPr>
           <a:xfrm>
-            <a:off x="1051560" y="2286000"/>
-            <a:ext cx="2865120" cy="365760"/>
+            <a:off x="1463040" y="2093976"/>
+            <a:ext cx="9875520" cy="804672"/>
           </a:xfrm>
           <a:prstGeom prst="rect">
             <a:avLst/>
@@ -4902,17 +6910,33 @@
           <a:p>
             <a:pPr algn="l">
               <a:spcAft>
-                <a:spcPts val="585"/>
-              </a:spcAft>
-            </a:pPr>
-            <a:r>
-              <a:rPr sz="1300" b="1" i="0">
-                <a:solidFill>
-                  <a:srgbClr val="0B2D5B"/>
-                </a:solidFill>
-                <a:latin typeface="Inter Tight"/>
-              </a:rPr>
-              <a:t>INES</a:t>
+                <a:spcPts val="945"/>
+              </a:spcAft>
+            </a:pPr>
+            <a:r>
+              <a:rPr sz="2100" b="1" i="0">
+                <a:solidFill>
+                  <a:srgbClr val="1C1B19"/>
+                </a:solidFill>
+                <a:latin typeface="Source Serif 4"/>
+              </a:rPr>
+              <a:t>Your voice came out louder than you meant.</a:t>
+            </a:r>
+          </a:p>
+          <a:p>
+            <a:pPr algn="l">
+              <a:spcAft>
+                <a:spcPts val="945"/>
+              </a:spcAft>
+            </a:pPr>
+            <a:r>
+              <a:rPr sz="1600" b="0" i="0">
+                <a:solidFill>
+                  <a:srgbClr val="5D5A54"/>
+                </a:solidFill>
+                <a:latin typeface="Source Serif 4"/>
+              </a:rPr>
+              <a:t>Marked late when you weren't, for example.</a:t>
             </a:r>
           </a:p>
         </p:txBody>
@@ -4925,8 +6949,8 @@
         </p:nvSpPr>
         <p:spPr>
           <a:xfrm>
-            <a:off x="1051560" y="2743200"/>
-            <a:ext cx="2865120" cy="3017520"/>
+            <a:off x="822960" y="2862072"/>
+            <a:ext cx="548640" cy="804672"/>
           </a:xfrm>
           <a:prstGeom prst="rect">
             <a:avLst/>
@@ -4941,64 +6965,73 @@
           <a:p>
             <a:pPr algn="l">
               <a:spcAft>
-                <a:spcPts val="810"/>
-              </a:spcAft>
-            </a:pPr>
-            <a:r>
-              <a:rPr sz="1800" b="0" i="0">
+                <a:spcPts val="1170"/>
+              </a:spcAft>
+            </a:pPr>
+            <a:r>
+              <a:rPr sz="2600" b="1" i="0">
+                <a:solidFill>
+                  <a:srgbClr val="F47B20"/>
+                </a:solidFill>
+                <a:latin typeface="Source Serif 4"/>
+              </a:rPr>
+              <a:t>•</a:t>
+            </a:r>
+          </a:p>
+        </p:txBody>
+      </p:sp>
+      <p:sp>
+        <p:nvSpPr>
+          <p:cNvPr id="9" name="TextBox 8"/>
+          <p:cNvSpPr txBox="1"/>
+          <p:nvPr/>
+        </p:nvSpPr>
+        <p:spPr>
+          <a:xfrm>
+            <a:off x="1463040" y="2898648"/>
+            <a:ext cx="9875520" cy="804672"/>
+          </a:xfrm>
+          <a:prstGeom prst="rect">
+            <a:avLst/>
+          </a:prstGeom>
+          <a:noFill/>
+        </p:spPr>
+        <p:txBody>
+          <a:bodyPr wrap="square" anchor="t" lIns="0" rIns="0" tIns="0" bIns="0">
+            <a:spAutoFit/>
+          </a:bodyPr>
+          <a:lstStyle/>
+          <a:p>
+            <a:pPr algn="l">
+              <a:spcAft>
+                <a:spcPts val="945"/>
+              </a:spcAft>
+            </a:pPr>
+            <a:r>
+              <a:rPr sz="2100" b="1" i="0">
                 <a:solidFill>
                   <a:srgbClr val="1C1B19"/>
                 </a:solidFill>
                 <a:latin typeface="Source Serif 4"/>
               </a:rPr>
-              <a:t>Asked off from her weekend job weeks ago. Her manager scheduled her anyway, then said, "You should have reminded me."</a:t>
-            </a:r>
-          </a:p>
-        </p:txBody>
-      </p:sp>
-      <p:sp>
-        <p:nvSpPr>
-          <p:cNvPr id="9" name="Rectangle 8"/>
-          <p:cNvSpPr/>
-          <p:nvPr/>
-        </p:nvSpPr>
-        <p:spPr>
-          <a:xfrm>
-            <a:off x="4419600" y="2103120"/>
-            <a:ext cx="3322320" cy="3840480"/>
-          </a:xfrm>
-          <a:prstGeom prst="rect">
-            <a:avLst/>
-          </a:prstGeom>
-          <a:solidFill>
-            <a:srgbClr val="FFFFFF"/>
-          </a:solidFill>
-          <a:ln w="15875">
-            <a:solidFill>
-              <a:srgbClr val="D8D2C6"/>
-            </a:solidFill>
-          </a:ln>
-          <a:effectLst/>
-        </p:spPr>
-        <p:style>
-          <a:lnRef idx="1">
-            <a:schemeClr val="accent1"/>
-          </a:lnRef>
-          <a:fillRef idx="3">
-            <a:schemeClr val="accent1"/>
-          </a:fillRef>
-          <a:effectRef idx="2">
-            <a:schemeClr val="accent1"/>
-          </a:effectRef>
-          <a:fontRef idx="minor">
-            <a:schemeClr val="lt1"/>
-          </a:fontRef>
-        </p:style>
-        <p:txBody>
-          <a:bodyPr rtlCol="0" anchor="ctr"/>
-          <a:lstStyle/>
-          <a:p>
-            <a:pPr algn="ctr"/>
+              <a:t>You sent a reply in 40 seconds.</a:t>
+            </a:r>
+          </a:p>
+          <a:p>
+            <a:pPr algn="l">
+              <a:spcAft>
+                <a:spcPts val="945"/>
+              </a:spcAft>
+            </a:pPr>
+            <a:r>
+              <a:rPr sz="1600" b="0" i="0">
+                <a:solidFill>
+                  <a:srgbClr val="5D5A54"/>
+                </a:solidFill>
+                <a:latin typeface="Source Serif 4"/>
+              </a:rPr>
+              <a:t>Then spent two days cleaning it up.</a:t>
+            </a:r>
           </a:p>
         </p:txBody>
       </p:sp>
@@ -5010,8 +7043,8 @@
         </p:nvSpPr>
         <p:spPr>
           <a:xfrm>
-            <a:off x="4648200" y="2286000"/>
-            <a:ext cx="2865120" cy="365760"/>
+            <a:off x="822960" y="3666744"/>
+            <a:ext cx="548640" cy="804672"/>
           </a:xfrm>
           <a:prstGeom prst="rect">
             <a:avLst/>
@@ -5026,17 +7059,17 @@
           <a:p>
             <a:pPr algn="l">
               <a:spcAft>
-                <a:spcPts val="585"/>
-              </a:spcAft>
-            </a:pPr>
-            <a:r>
-              <a:rPr sz="1300" b="1" i="0">
-                <a:solidFill>
-                  <a:srgbClr val="0B2D5B"/>
-                </a:solidFill>
-                <a:latin typeface="Inter Tight"/>
-              </a:rPr>
-              <a:t>KOFI</a:t>
+                <a:spcPts val="1170"/>
+              </a:spcAft>
+            </a:pPr>
+            <a:r>
+              <a:rPr sz="2600" b="1" i="0">
+                <a:solidFill>
+                  <a:srgbClr val="F47B20"/>
+                </a:solidFill>
+                <a:latin typeface="Source Serif 4"/>
+              </a:rPr>
+              <a:t>•</a:t>
             </a:r>
           </a:p>
         </p:txBody>
@@ -5049,8 +7082,8 @@
         </p:nvSpPr>
         <p:spPr>
           <a:xfrm>
-            <a:off x="4648200" y="2743200"/>
-            <a:ext cx="2865120" cy="3017520"/>
+            <a:off x="1463040" y="3703320"/>
+            <a:ext cx="9875520" cy="804672"/>
           </a:xfrm>
           <a:prstGeom prst="rect">
             <a:avLst/>
@@ -5065,64 +7098,73 @@
           <a:p>
             <a:pPr algn="l">
               <a:spcAft>
-                <a:spcPts val="810"/>
-              </a:spcAft>
-            </a:pPr>
-            <a:r>
-              <a:rPr sz="1800" b="0" i="0">
+                <a:spcPts val="945"/>
+              </a:spcAft>
+            </a:pPr>
+            <a:r>
+              <a:rPr sz="2100" b="1" i="0">
                 <a:solidFill>
                   <a:srgbClr val="1C1B19"/>
                 </a:solidFill>
                 <a:latin typeface="Source Serif 4"/>
               </a:rPr>
-              <a:t>In a class discussion, a classmate makes a comment about his neighborhood. A few people laugh.</a:t>
-            </a:r>
-          </a:p>
-        </p:txBody>
-      </p:sp>
-      <p:sp>
-        <p:nvSpPr>
-          <p:cNvPr id="12" name="Rectangle 11"/>
-          <p:cNvSpPr/>
+              <a:t>"Watch your tone."</a:t>
+            </a:r>
+          </a:p>
+          <a:p>
+            <a:pPr algn="l">
+              <a:spcAft>
+                <a:spcPts val="945"/>
+              </a:spcAft>
+            </a:pPr>
+            <a:r>
+              <a:rPr sz="1600" b="0" i="0">
+                <a:solidFill>
+                  <a:srgbClr val="5D5A54"/>
+                </a:solidFill>
+                <a:latin typeface="Source Serif 4"/>
+              </a:rPr>
+              <a:t>Now the argument is about your tone, not the curfew.</a:t>
+            </a:r>
+          </a:p>
+        </p:txBody>
+      </p:sp>
+      <p:sp>
+        <p:nvSpPr>
+          <p:cNvPr id="12" name="TextBox 11"/>
+          <p:cNvSpPr txBox="1"/>
           <p:nvPr/>
         </p:nvSpPr>
         <p:spPr>
           <a:xfrm>
-            <a:off x="8016239" y="2103120"/>
-            <a:ext cx="3322320" cy="3840480"/>
-          </a:xfrm>
-          <a:prstGeom prst="rect">
-            <a:avLst/>
-          </a:prstGeom>
-          <a:solidFill>
-            <a:srgbClr val="FFFFFF"/>
-          </a:solidFill>
-          <a:ln w="15875">
-            <a:solidFill>
-              <a:srgbClr val="D8D2C6"/>
-            </a:solidFill>
-          </a:ln>
-          <a:effectLst/>
-        </p:spPr>
-        <p:style>
-          <a:lnRef idx="1">
-            <a:schemeClr val="accent1"/>
-          </a:lnRef>
-          <a:fillRef idx="3">
-            <a:schemeClr val="accent1"/>
-          </a:fillRef>
-          <a:effectRef idx="2">
-            <a:schemeClr val="accent1"/>
-          </a:effectRef>
-          <a:fontRef idx="minor">
-            <a:schemeClr val="lt1"/>
-          </a:fontRef>
-        </p:style>
-        <p:txBody>
-          <a:bodyPr rtlCol="0" anchor="ctr"/>
-          <a:lstStyle/>
-          <a:p>
-            <a:pPr algn="ctr"/>
+            <a:off x="822960" y="4471416"/>
+            <a:ext cx="548640" cy="804672"/>
+          </a:xfrm>
+          <a:prstGeom prst="rect">
+            <a:avLst/>
+          </a:prstGeom>
+          <a:noFill/>
+        </p:spPr>
+        <p:txBody>
+          <a:bodyPr wrap="square" anchor="t" lIns="0" rIns="0" tIns="0" bIns="0">
+            <a:spAutoFit/>
+          </a:bodyPr>
+          <a:lstStyle/>
+          <a:p>
+            <a:pPr algn="l">
+              <a:spcAft>
+                <a:spcPts val="1170"/>
+              </a:spcAft>
+            </a:pPr>
+            <a:r>
+              <a:rPr sz="2600" b="1" i="0">
+                <a:solidFill>
+                  <a:srgbClr val="F47B20"/>
+                </a:solidFill>
+                <a:latin typeface="Source Serif 4"/>
+              </a:rPr>
+              <a:t>•</a:t>
+            </a:r>
           </a:p>
         </p:txBody>
       </p:sp>
@@ -5134,8 +7176,8 @@
         </p:nvSpPr>
         <p:spPr>
           <a:xfrm>
-            <a:off x="8244839" y="2286000"/>
-            <a:ext cx="2865120" cy="365760"/>
+            <a:off x="1463040" y="4507992"/>
+            <a:ext cx="9875520" cy="804672"/>
           </a:xfrm>
           <a:prstGeom prst="rect">
             <a:avLst/>
@@ -5150,17 +7192,33 @@
           <a:p>
             <a:pPr algn="l">
               <a:spcAft>
-                <a:spcPts val="585"/>
-              </a:spcAft>
-            </a:pPr>
-            <a:r>
-              <a:rPr sz="1300" b="1" i="0">
-                <a:solidFill>
-                  <a:srgbClr val="0B2D5B"/>
-                </a:solidFill>
-                <a:latin typeface="Inter Tight"/>
-              </a:rPr>
-              <a:t>SAM</a:t>
+                <a:spcPts val="945"/>
+              </a:spcAft>
+            </a:pPr>
+            <a:r>
+              <a:rPr sz="2100" b="1" i="0">
+                <a:solidFill>
+                  <a:srgbClr val="1C1B19"/>
+                </a:solidFill>
+                <a:latin typeface="Source Serif 4"/>
+              </a:rPr>
+              <a:t>A clip built to make people furious worked.</a:t>
+            </a:r>
+          </a:p>
+          <a:p>
+            <a:pPr algn="l">
+              <a:spcAft>
+                <a:spcPts val="945"/>
+              </a:spcAft>
+            </a:pPr>
+            <a:r>
+              <a:rPr sz="1600" b="0" i="0">
+                <a:solidFill>
+                  <a:srgbClr val="5D5A54"/>
+                </a:solidFill>
+                <a:latin typeface="Source Serif 4"/>
+              </a:rPr>
+              <a:t>For an hour.</a:t>
             </a:r>
           </a:p>
         </p:txBody>
@@ -5173,8 +7231,8 @@
         </p:nvSpPr>
         <p:spPr>
           <a:xfrm>
-            <a:off x="8244839" y="2743200"/>
-            <a:ext cx="2865120" cy="3017520"/>
+            <a:off x="822960" y="5276088"/>
+            <a:ext cx="548640" cy="804672"/>
           </a:xfrm>
           <a:prstGeom prst="rect">
             <a:avLst/>
@@ -5189,17 +7247,56 @@
           <a:p>
             <a:pPr algn="l">
               <a:spcAft>
-                <a:spcPts val="810"/>
-              </a:spcAft>
-            </a:pPr>
-            <a:r>
-              <a:rPr sz="1800" b="0" i="0">
+                <a:spcPts val="1170"/>
+              </a:spcAft>
+            </a:pPr>
+            <a:r>
+              <a:rPr sz="2600" b="1" i="0">
+                <a:solidFill>
+                  <a:srgbClr val="F47B20"/>
+                </a:solidFill>
+                <a:latin typeface="Source Serif 4"/>
+              </a:rPr>
+              <a:t>•</a:t>
+            </a:r>
+          </a:p>
+        </p:txBody>
+      </p:sp>
+      <p:sp>
+        <p:nvSpPr>
+          <p:cNvPr id="15" name="TextBox 14"/>
+          <p:cNvSpPr txBox="1"/>
+          <p:nvPr/>
+        </p:nvSpPr>
+        <p:spPr>
+          <a:xfrm>
+            <a:off x="1463040" y="5312664"/>
+            <a:ext cx="9875520" cy="804672"/>
+          </a:xfrm>
+          <a:prstGeom prst="rect">
+            <a:avLst/>
+          </a:prstGeom>
+          <a:noFill/>
+        </p:spPr>
+        <p:txBody>
+          <a:bodyPr wrap="square" anchor="t" lIns="0" rIns="0" tIns="0" bIns="0">
+            <a:spAutoFit/>
+          </a:bodyPr>
+          <a:lstStyle/>
+          <a:p>
+            <a:pPr algn="l">
+              <a:spcAft>
+                <a:spcPts val="945"/>
+              </a:spcAft>
+            </a:pPr>
+            <a:r>
+              <a:rPr sz="2100" b="1" i="0">
                 <a:solidFill>
                   <a:srgbClr val="1C1B19"/>
                 </a:solidFill>
                 <a:latin typeface="Source Serif 4"/>
               </a:rPr>
-              <a:t>Finds out his grandmother, who he lives with, has been reading his messages without asking. He's furious.</a:t>
+              <a:t>Calm all day at school, then you come apart at home.</a:t>
             </a:r>
           </a:p>
         </p:txBody>
@@ -5212,7 +7309,7 @@
 </p:sld>
 </file>
 
-<file path=ppt/slides/slide11.xml><?xml version="1.0" encoding="utf-8"?>
+<file path=ppt/slides/slide4.xml><?xml version="1.0" encoding="utf-8"?>
 <p:sld xmlns:a="http://schemas.openxmlformats.org/drawingml/2006/main" xmlns:p="http://schemas.openxmlformats.org/presentationml/2006/main" xmlns:r="http://schemas.openxmlformats.org/officeDocument/2006/relationships">
   <p:cSld>
     <p:bg>
@@ -5308,7 +7405,7 @@
                 </a:solidFill>
                 <a:latin typeface="Inter Tight"/>
               </a:rPr>
-              <a:t>PRIVATE REFLECTION</a:t>
+              <a:t>WHAT HAPPENS IN YOUR BRAIN</a:t>
             </a:r>
           </a:p>
         </p:txBody>
@@ -5354,23 +7451,64 @@
       </p:sp>
       <p:sp>
         <p:nvSpPr>
-          <p:cNvPr id="5" name="Rectangle 4"/>
+          <p:cNvPr id="5" name="TextBox 4"/>
+          <p:cNvSpPr txBox="1"/>
+          <p:nvPr/>
+        </p:nvSpPr>
+        <p:spPr>
+          <a:xfrm>
+            <a:off x="822960" y="1005840"/>
+            <a:ext cx="10515600" cy="914400"/>
+          </a:xfrm>
+          <a:prstGeom prst="rect">
+            <a:avLst/>
+          </a:prstGeom>
+          <a:noFill/>
+        </p:spPr>
+        <p:txBody>
+          <a:bodyPr wrap="square" anchor="t" lIns="0" rIns="0" tIns="0" bIns="0">
+            <a:spAutoFit/>
+          </a:bodyPr>
+          <a:lstStyle/>
+          <a:p>
+            <a:pPr algn="l">
+              <a:spcAft>
+                <a:spcPts val="1530"/>
+              </a:spcAft>
+            </a:pPr>
+            <a:r>
+              <a:rPr sz="3400" b="1" i="0">
+                <a:solidFill>
+                  <a:srgbClr val="1C1B19"/>
+                </a:solidFill>
+                <a:latin typeface="Source Serif 4"/>
+              </a:rPr>
+              <a:t>A fast alarm, and slower brakes</a:t>
+            </a:r>
+          </a:p>
+        </p:txBody>
+      </p:sp>
+      <p:sp>
+        <p:nvSpPr>
+          <p:cNvPr id="6" name="Rectangle 5"/>
           <p:cNvSpPr/>
           <p:nvPr/>
         </p:nvSpPr>
         <p:spPr>
           <a:xfrm>
-            <a:off x="822960" y="1371600"/>
-            <a:ext cx="73152" cy="3566160"/>
+            <a:off x="822960" y="2103120"/>
+            <a:ext cx="5120640" cy="3931920"/>
           </a:xfrm>
           <a:prstGeom prst="rect">
             <a:avLst/>
           </a:prstGeom>
           <a:solidFill>
-            <a:srgbClr val="F47B20"/>
+            <a:srgbClr val="FFFFFF"/>
           </a:solidFill>
-          <a:ln>
-            <a:noFill/>
+          <a:ln w="15875">
+            <a:solidFill>
+              <a:srgbClr val="D8D2C6"/>
+            </a:solidFill>
           </a:ln>
           <a:effectLst/>
         </p:spPr>
@@ -5398,53 +7536,14 @@
       </p:sp>
       <p:sp>
         <p:nvSpPr>
-          <p:cNvPr id="6" name="TextBox 5"/>
-          <p:cNvSpPr txBox="1"/>
-          <p:nvPr/>
-        </p:nvSpPr>
-        <p:spPr>
-          <a:xfrm>
-            <a:off x="1188720" y="1371600"/>
-            <a:ext cx="10058400" cy="3566160"/>
-          </a:xfrm>
-          <a:prstGeom prst="rect">
-            <a:avLst/>
-          </a:prstGeom>
-          <a:noFill/>
-        </p:spPr>
-        <p:txBody>
-          <a:bodyPr wrap="square" anchor="ctr" lIns="0" rIns="0" tIns="0" bIns="0">
-            <a:spAutoFit/>
-          </a:bodyPr>
-          <a:lstStyle/>
-          <a:p>
-            <a:pPr algn="l">
-              <a:spcAft>
-                <a:spcPts val="1800"/>
-              </a:spcAft>
-            </a:pPr>
-            <a:r>
-              <a:rPr sz="4000" b="0" i="1">
-                <a:solidFill>
-                  <a:srgbClr val="1C1B19"/>
-                </a:solidFill>
-                <a:latin typeface="Source Serif 4"/>
-              </a:rPr>
-              <a:t>Your last big blowup: what was underneath?</a:t>
-            </a:r>
-          </a:p>
-        </p:txBody>
-      </p:sp>
-      <p:sp>
-        <p:nvSpPr>
           <p:cNvPr id="7" name="TextBox 6"/>
           <p:cNvSpPr txBox="1"/>
           <p:nvPr/>
         </p:nvSpPr>
         <p:spPr>
           <a:xfrm>
-            <a:off x="1188720" y="5120640"/>
-            <a:ext cx="10058400" cy="914400"/>
+            <a:off x="1097280" y="2286000"/>
+            <a:ext cx="4572000" cy="457200"/>
           </a:xfrm>
           <a:prstGeom prst="rect">
             <a:avLst/>
@@ -5459,17 +7558,276 @@
           <a:p>
             <a:pPr algn="l">
               <a:spcAft>
-                <a:spcPts val="810"/>
-              </a:spcAft>
-            </a:pPr>
-            <a:r>
-              <a:rPr sz="1800" b="0" i="0">
-                <a:solidFill>
-                  <a:srgbClr val="5D5A54"/>
+                <a:spcPts val="585"/>
+              </a:spcAft>
+            </a:pPr>
+            <a:r>
+              <a:rPr sz="1300" b="1" i="0">
+                <a:solidFill>
+                  <a:srgbClr val="0B2D5B"/>
                 </a:solidFill>
                 <a:latin typeface="Inter Tight"/>
               </a:rPr>
-              <a:t>Hurt, embarrassed, left out, scared, controlled, exhausted? On your card, just for you.</a:t>
+              <a:t>THE ALARM (FAST)</a:t>
+            </a:r>
+          </a:p>
+        </p:txBody>
+      </p:sp>
+      <p:sp>
+        <p:nvSpPr>
+          <p:cNvPr id="8" name="TextBox 7"/>
+          <p:cNvSpPr txBox="1"/>
+          <p:nvPr/>
+        </p:nvSpPr>
+        <p:spPr>
+          <a:xfrm>
+            <a:off x="1097280" y="2788920"/>
+            <a:ext cx="4572000" cy="3108960"/>
+          </a:xfrm>
+          <a:prstGeom prst="rect">
+            <a:avLst/>
+          </a:prstGeom>
+          <a:noFill/>
+        </p:spPr>
+        <p:txBody>
+          <a:bodyPr wrap="square" anchor="t" lIns="0" rIns="0" tIns="0" bIns="0">
+            <a:spAutoFit/>
+          </a:bodyPr>
+          <a:lstStyle/>
+          <a:p>
+            <a:pPr algn="l">
+              <a:spcAft>
+                <a:spcPts val="855"/>
+              </a:spcAft>
+            </a:pPr>
+            <a:r>
+              <a:rPr sz="1900" b="0" i="0">
+                <a:solidFill>
+                  <a:srgbClr val="1C1B19"/>
+                </a:solidFill>
+                <a:latin typeface="Source Serif 4"/>
+              </a:rPr>
+              <a:t>Spots an insult or something unfair</a:t>
+            </a:r>
+          </a:p>
+          <a:p>
+            <a:pPr algn="l">
+              <a:spcAft>
+                <a:spcPts val="855"/>
+              </a:spcAft>
+            </a:pPr>
+            <a:r>
+              <a:rPr sz="1900" b="0" i="0">
+                <a:solidFill>
+                  <a:srgbClr val="1C1B19"/>
+                </a:solidFill>
+                <a:latin typeface="Source Serif 4"/>
+              </a:rPr>
+              <a:t>Heart speeds up, face gets hot</a:t>
+            </a:r>
+          </a:p>
+          <a:p>
+            <a:pPr algn="l">
+              <a:spcAft>
+                <a:spcPts val="855"/>
+              </a:spcAft>
+            </a:pPr>
+            <a:r>
+              <a:rPr sz="1900" b="0" i="0">
+                <a:solidFill>
+                  <a:srgbClr val="1C1B19"/>
+                </a:solidFill>
+                <a:latin typeface="Source Serif 4"/>
+              </a:rPr>
+              <a:t>Muscles tighten, ready to push back</a:t>
+            </a:r>
+          </a:p>
+          <a:p>
+            <a:pPr algn="l">
+              <a:spcAft>
+                <a:spcPts val="855"/>
+              </a:spcAft>
+            </a:pPr>
+            <a:r>
+              <a:rPr sz="1900" b="0" i="0">
+                <a:solidFill>
+                  <a:srgbClr val="1C1B19"/>
+                </a:solidFill>
+                <a:latin typeface="Source Serif 4"/>
+              </a:rPr>
+              <a:t>Often before you've thought it through</a:t>
+            </a:r>
+          </a:p>
+        </p:txBody>
+      </p:sp>
+      <p:sp>
+        <p:nvSpPr>
+          <p:cNvPr id="9" name="Rectangle 8"/>
+          <p:cNvSpPr/>
+          <p:nvPr/>
+        </p:nvSpPr>
+        <p:spPr>
+          <a:xfrm>
+            <a:off x="6309360" y="2103120"/>
+            <a:ext cx="5120640" cy="3931920"/>
+          </a:xfrm>
+          <a:prstGeom prst="rect">
+            <a:avLst/>
+          </a:prstGeom>
+          <a:solidFill>
+            <a:srgbClr val="FFFFFF"/>
+          </a:solidFill>
+          <a:ln w="15875">
+            <a:solidFill>
+              <a:srgbClr val="D8D2C6"/>
+            </a:solidFill>
+          </a:ln>
+          <a:effectLst/>
+        </p:spPr>
+        <p:style>
+          <a:lnRef idx="1">
+            <a:schemeClr val="accent1"/>
+          </a:lnRef>
+          <a:fillRef idx="3">
+            <a:schemeClr val="accent1"/>
+          </a:fillRef>
+          <a:effectRef idx="2">
+            <a:schemeClr val="accent1"/>
+          </a:effectRef>
+          <a:fontRef idx="minor">
+            <a:schemeClr val="lt1"/>
+          </a:fontRef>
+        </p:style>
+        <p:txBody>
+          <a:bodyPr rtlCol="0" anchor="ctr"/>
+          <a:lstStyle/>
+          <a:p>
+            <a:pPr algn="ctr"/>
+          </a:p>
+        </p:txBody>
+      </p:sp>
+      <p:sp>
+        <p:nvSpPr>
+          <p:cNvPr id="10" name="TextBox 9"/>
+          <p:cNvSpPr txBox="1"/>
+          <p:nvPr/>
+        </p:nvSpPr>
+        <p:spPr>
+          <a:xfrm>
+            <a:off x="6583680" y="2286000"/>
+            <a:ext cx="4572000" cy="457200"/>
+          </a:xfrm>
+          <a:prstGeom prst="rect">
+            <a:avLst/>
+          </a:prstGeom>
+          <a:noFill/>
+        </p:spPr>
+        <p:txBody>
+          <a:bodyPr wrap="square" anchor="t" lIns="0" rIns="0" tIns="0" bIns="0">
+            <a:spAutoFit/>
+          </a:bodyPr>
+          <a:lstStyle/>
+          <a:p>
+            <a:pPr algn="l">
+              <a:spcAft>
+                <a:spcPts val="585"/>
+              </a:spcAft>
+            </a:pPr>
+            <a:r>
+              <a:rPr sz="1300" b="1" i="0">
+                <a:solidFill>
+                  <a:srgbClr val="0B2D5B"/>
+                </a:solidFill>
+                <a:latin typeface="Inter Tight"/>
+              </a:rPr>
+              <a:t>THE BRAKES (SLOWER)</a:t>
+            </a:r>
+          </a:p>
+        </p:txBody>
+      </p:sp>
+      <p:sp>
+        <p:nvSpPr>
+          <p:cNvPr id="11" name="TextBox 10"/>
+          <p:cNvSpPr txBox="1"/>
+          <p:nvPr/>
+        </p:nvSpPr>
+        <p:spPr>
+          <a:xfrm>
+            <a:off x="6583680" y="2788920"/>
+            <a:ext cx="4572000" cy="3108960"/>
+          </a:xfrm>
+          <a:prstGeom prst="rect">
+            <a:avLst/>
+          </a:prstGeom>
+          <a:noFill/>
+        </p:spPr>
+        <p:txBody>
+          <a:bodyPr wrap="square" anchor="t" lIns="0" rIns="0" tIns="0" bIns="0">
+            <a:spAutoFit/>
+          </a:bodyPr>
+          <a:lstStyle/>
+          <a:p>
+            <a:pPr algn="l">
+              <a:spcAft>
+                <a:spcPts val="855"/>
+              </a:spcAft>
+            </a:pPr>
+            <a:r>
+              <a:rPr sz="1900" b="0" i="0">
+                <a:solidFill>
+                  <a:srgbClr val="1C1B19"/>
+                </a:solidFill>
+                <a:latin typeface="Source Serif 4"/>
+              </a:rPr>
+              <a:t>Reads context: is this a real threat?</a:t>
+            </a:r>
+          </a:p>
+          <a:p>
+            <a:pPr algn="l">
+              <a:spcAft>
+                <a:spcPts val="855"/>
+              </a:spcAft>
+            </a:pPr>
+            <a:r>
+              <a:rPr sz="1900" b="0" i="0">
+                <a:solidFill>
+                  <a:srgbClr val="1C1B19"/>
+                </a:solidFill>
+                <a:latin typeface="Source Serif 4"/>
+              </a:rPr>
+              <a:t>Asks what reacting will cost</a:t>
+            </a:r>
+          </a:p>
+          <a:p>
+            <a:pPr algn="l">
+              <a:spcAft>
+                <a:spcPts val="855"/>
+              </a:spcAft>
+            </a:pPr>
+            <a:r>
+              <a:rPr sz="1900" b="0" i="0">
+                <a:solidFill>
+                  <a:srgbClr val="1C1B19"/>
+                </a:solidFill>
+                <a:latin typeface="Source Serif 4"/>
+              </a:rPr>
+              <a:t>Can turn the alarm down</a:t>
+            </a:r>
+          </a:p>
+          <a:p>
+            <a:pPr algn="l">
+              <a:spcAft>
+                <a:spcPts val="855"/>
+              </a:spcAft>
+            </a:pPr>
+            <a:r>
+              <a:rPr sz="1900" b="0" i="0">
+                <a:solidFill>
+                  <a:srgbClr val="1C1B19"/>
+                </a:solidFill>
+                <a:latin typeface="Source Serif 4"/>
+              </a:rPr>
+              <a:t>Weaker when tired, hungry or flooded</a:t>
             </a:r>
           </a:p>
         </p:txBody>
@@ -5482,7 +7840,7 @@
 </p:sld>
 </file>
 
-<file path=ppt/slides/slide12.xml><?xml version="1.0" encoding="utf-8"?>
+<file path=ppt/slides/slide5.xml><?xml version="1.0" encoding="utf-8"?>
 <p:sld xmlns:a="http://schemas.openxmlformats.org/drawingml/2006/main" xmlns:p="http://schemas.openxmlformats.org/presentationml/2006/main" xmlns:r="http://schemas.openxmlformats.org/officeDocument/2006/relationships">
   <p:cSld>
     <p:bg>
@@ -5578,7 +7936,7 @@
                 </a:solidFill>
                 <a:latin typeface="Inter Tight"/>
               </a:rPr>
-              <a:t>BEFORE YOU GO</a:t>
+              <a:t>QUICK VOTE</a:t>
             </a:r>
           </a:p>
         </p:txBody>
@@ -5624,103 +7982,23 @@
       </p:sp>
       <p:sp>
         <p:nvSpPr>
-          <p:cNvPr id="5" name="TextBox 4"/>
-          <p:cNvSpPr txBox="1"/>
-          <p:nvPr/>
-        </p:nvSpPr>
-        <p:spPr>
-          <a:xfrm>
-            <a:off x="822960" y="1188720"/>
-            <a:ext cx="10515600" cy="914400"/>
-          </a:xfrm>
-          <a:prstGeom prst="rect">
-            <a:avLst/>
-          </a:prstGeom>
-          <a:noFill/>
-        </p:spPr>
-        <p:txBody>
-          <a:bodyPr wrap="square" anchor="t" lIns="0" rIns="0" tIns="0" bIns="0">
-            <a:spAutoFit/>
-          </a:bodyPr>
-          <a:lstStyle/>
-          <a:p>
-            <a:pPr algn="l">
-              <a:spcAft>
-                <a:spcPts val="1620"/>
-              </a:spcAft>
-            </a:pPr>
-            <a:r>
-              <a:rPr sz="3600" b="1" i="0">
-                <a:solidFill>
-                  <a:srgbClr val="1C1B19"/>
-                </a:solidFill>
-                <a:latin typeface="Source Serif 4"/>
-              </a:rPr>
-              <a:t>One move</a:t>
-            </a:r>
-          </a:p>
-        </p:txBody>
-      </p:sp>
-      <p:sp>
-        <p:nvSpPr>
-          <p:cNvPr id="6" name="TextBox 5"/>
-          <p:cNvSpPr txBox="1"/>
-          <p:nvPr/>
-        </p:nvSpPr>
-        <p:spPr>
-          <a:xfrm>
-            <a:off x="822960" y="2286000"/>
-            <a:ext cx="10515600" cy="1463040"/>
-          </a:xfrm>
-          <a:prstGeom prst="rect">
-            <a:avLst/>
-          </a:prstGeom>
-          <a:noFill/>
-        </p:spPr>
-        <p:txBody>
-          <a:bodyPr wrap="square" anchor="t" lIns="0" rIns="0" tIns="0" bIns="0">
-            <a:spAutoFit/>
-          </a:bodyPr>
-          <a:lstStyle/>
-          <a:p>
-            <a:pPr algn="l">
-              <a:spcAft>
-                <a:spcPts val="1080"/>
-              </a:spcAft>
-            </a:pPr>
-            <a:r>
-              <a:rPr sz="2400" b="0" i="0">
-                <a:solidFill>
-                  <a:srgbClr val="1C1B19"/>
-                </a:solidFill>
-                <a:latin typeface="Source Serif 4"/>
-              </a:rPr>
-              <a:t>Next time it hits a 7, what will you try first? Long exhales, cold water, a walk, a time-out, or the fly on the wall.</a:t>
-            </a:r>
-          </a:p>
-        </p:txBody>
-      </p:sp>
-      <p:sp>
-        <p:nvSpPr>
-          <p:cNvPr id="7" name="Rectangle 6"/>
+          <p:cNvPr id="5" name="Rectangle 4"/>
           <p:cNvSpPr/>
           <p:nvPr/>
         </p:nvSpPr>
         <p:spPr>
           <a:xfrm>
-            <a:off x="822960" y="4023360"/>
-            <a:ext cx="10515600" cy="1371600"/>
+            <a:off x="822960" y="1371600"/>
+            <a:ext cx="73152" cy="3566160"/>
           </a:xfrm>
           <a:prstGeom prst="rect">
             <a:avLst/>
           </a:prstGeom>
           <a:solidFill>
-            <a:srgbClr val="FFFFFF"/>
+            <a:srgbClr val="F47B20"/>
           </a:solidFill>
-          <a:ln w="15875">
-            <a:solidFill>
-              <a:srgbClr val="1C1B19"/>
-            </a:solidFill>
+          <a:ln>
+            <a:noFill/>
           </a:ln>
           <a:effectLst/>
         </p:spPr>
@@ -5748,14 +8026,53 @@
       </p:sp>
       <p:sp>
         <p:nvSpPr>
-          <p:cNvPr id="8" name="TextBox 7"/>
+          <p:cNvPr id="6" name="TextBox 5"/>
           <p:cNvSpPr txBox="1"/>
           <p:nvPr/>
         </p:nvSpPr>
         <p:spPr>
           <a:xfrm>
-            <a:off x="1097280" y="4206240"/>
-            <a:ext cx="10058400" cy="365760"/>
+            <a:off x="1188720" y="1371600"/>
+            <a:ext cx="10058400" cy="3566160"/>
+          </a:xfrm>
+          <a:prstGeom prst="rect">
+            <a:avLst/>
+          </a:prstGeom>
+          <a:noFill/>
+        </p:spPr>
+        <p:txBody>
+          <a:bodyPr wrap="square" anchor="ctr" lIns="0" rIns="0" tIns="0" bIns="0">
+            <a:spAutoFit/>
+          </a:bodyPr>
+          <a:lstStyle/>
+          <a:p>
+            <a:pPr algn="l">
+              <a:spcAft>
+                <a:spcPts val="1800"/>
+              </a:spcAft>
+            </a:pPr>
+            <a:r>
+              <a:rPr sz="4000" b="0" i="1">
+                <a:solidFill>
+                  <a:srgbClr val="1C1B19"/>
+                </a:solidFill>
+                <a:latin typeface="Source Serif 4"/>
+              </a:rPr>
+              <a:t>Does hitting a punching bag help anger drain out?</a:t>
+            </a:r>
+          </a:p>
+        </p:txBody>
+      </p:sp>
+      <p:sp>
+        <p:nvSpPr>
+          <p:cNvPr id="7" name="TextBox 6"/>
+          <p:cNvSpPr txBox="1"/>
+          <p:nvPr/>
+        </p:nvSpPr>
+        <p:spPr>
+          <a:xfrm>
+            <a:off x="1188720" y="5120640"/>
+            <a:ext cx="10058400" cy="914400"/>
           </a:xfrm>
           <a:prstGeom prst="rect">
             <a:avLst/>
@@ -5770,1710 +8087,17 @@
           <a:p>
             <a:pPr algn="l">
               <a:spcAft>
-                <a:spcPts val="540"/>
-              </a:spcAft>
-            </a:pPr>
-            <a:r>
-              <a:rPr sz="1200" b="1" i="0">
-                <a:solidFill>
-                  <a:srgbClr val="0B2D5B"/>
+                <a:spcPts val="810"/>
+              </a:spcAft>
+            </a:pPr>
+            <a:r>
+              <a:rPr sz="1800" b="0" i="0">
+                <a:solidFill>
+                  <a:srgbClr val="5D5A54"/>
                 </a:solidFill>
                 <a:latin typeface="Inter Tight"/>
               </a:rPr>
-              <a:t>STUDENT PAGE</a:t>
-            </a:r>
-          </a:p>
-        </p:txBody>
-      </p:sp>
-      <p:sp>
-        <p:nvSpPr>
-          <p:cNvPr id="9" name="TextBox 8"/>
-          <p:cNvSpPr txBox="1"/>
-          <p:nvPr/>
-        </p:nvSpPr>
-        <p:spPr>
-          <a:xfrm>
-            <a:off x="1097280" y="4617720"/>
-            <a:ext cx="10058400" cy="640080"/>
-          </a:xfrm>
-          <a:prstGeom prst="rect">
-            <a:avLst/>
-          </a:prstGeom>
-          <a:noFill/>
-        </p:spPr>
-        <p:txBody>
-          <a:bodyPr wrap="square" anchor="t" lIns="0" rIns="0" tIns="0" bIns="0">
-            <a:spAutoFit/>
-          </a:bodyPr>
-          <a:lstStyle/>
-          <a:p>
-            <a:pPr algn="l">
-              <a:spcAft>
-                <a:spcPts val="900"/>
-              </a:spcAft>
-            </a:pPr>
-            <a:r>
-              <a:rPr sz="2000" b="0" i="0">
-                <a:solidFill>
-                  <a:srgbClr val="1C1B19"/>
-                </a:solidFill>
-                <a:latin typeface="Inter Tight"/>
-              </a:rPr>
-              <a:t>https://rmwtoolkit.github.io/bcds-toolkit/anger-is-information-high-school.html</a:t>
-            </a:r>
-          </a:p>
-        </p:txBody>
-      </p:sp>
-    </p:spTree>
-  </p:cSld>
-  <p:clrMapOvr>
-    <a:masterClrMapping/>
-  </p:clrMapOvr>
-</p:sld>
-</file>
-
-<file path=ppt/slides/slide2.xml><?xml version="1.0" encoding="utf-8"?>
-<p:sld xmlns:a="http://schemas.openxmlformats.org/drawingml/2006/main" xmlns:p="http://schemas.openxmlformats.org/presentationml/2006/main" xmlns:r="http://schemas.openxmlformats.org/officeDocument/2006/relationships" show="0">
-  <p:cSld>
-    <p:bg>
-      <p:bgPr>
-        <a:solidFill>
-          <a:srgbClr val="EEEBE4"/>
-        </a:solidFill>
-        <a:effectLst/>
-      </p:bgPr>
-    </p:bg>
-    <p:spTree>
-      <p:nvGrpSpPr>
-        <p:cNvPr id="1" name=""/>
-        <p:cNvGrpSpPr/>
-        <p:nvPr/>
-      </p:nvGrpSpPr>
-      <p:grpSpPr/>
-      <p:sp>
-        <p:nvSpPr>
-          <p:cNvPr id="2" name="Rectangle 1"/>
-          <p:cNvSpPr/>
-          <p:nvPr/>
-        </p:nvSpPr>
-        <p:spPr>
-          <a:xfrm>
-            <a:off x="0" y="0"/>
-            <a:ext cx="12191695" cy="384048"/>
-          </a:xfrm>
-          <a:prstGeom prst="rect">
-            <a:avLst/>
-          </a:prstGeom>
-          <a:solidFill>
-            <a:srgbClr val="0B2D5B"/>
-          </a:solidFill>
-          <a:ln>
-            <a:noFill/>
-          </a:ln>
-          <a:effectLst/>
-        </p:spPr>
-        <p:style>
-          <a:lnRef idx="1">
-            <a:schemeClr val="accent1"/>
-          </a:lnRef>
-          <a:fillRef idx="3">
-            <a:schemeClr val="accent1"/>
-          </a:fillRef>
-          <a:effectRef idx="2">
-            <a:schemeClr val="accent1"/>
-          </a:effectRef>
-          <a:fontRef idx="minor">
-            <a:schemeClr val="lt1"/>
-          </a:fontRef>
-        </p:style>
-        <p:txBody>
-          <a:bodyPr rtlCol="0" anchor="ctr"/>
-          <a:lstStyle/>
-          <a:p>
-            <a:pPr algn="ctr"/>
-          </a:p>
-        </p:txBody>
-      </p:sp>
-      <p:sp>
-        <p:nvSpPr>
-          <p:cNvPr id="3" name="TextBox 2"/>
-          <p:cNvSpPr txBox="1"/>
-          <p:nvPr/>
-        </p:nvSpPr>
-        <p:spPr>
-          <a:xfrm>
-            <a:off x="548640" y="100584"/>
-            <a:ext cx="10972800" cy="274320"/>
-          </a:xfrm>
-          <a:prstGeom prst="rect">
-            <a:avLst/>
-          </a:prstGeom>
-          <a:noFill/>
-        </p:spPr>
-        <p:txBody>
-          <a:bodyPr wrap="square" anchor="t" lIns="0" rIns="0" tIns="0" bIns="0">
-            <a:spAutoFit/>
-          </a:bodyPr>
-          <a:lstStyle/>
-          <a:p>
-            <a:pPr algn="l">
-              <a:spcAft>
-                <a:spcPts val="495"/>
-              </a:spcAft>
-            </a:pPr>
-            <a:r>
-              <a:rPr sz="1100" b="1" i="0">
-                <a:solidFill>
-                  <a:srgbClr val="FFFFFF"/>
-                </a:solidFill>
-                <a:latin typeface="Inter Tight"/>
-              </a:rPr>
-              <a:t>TEACHER PAGE  ·  skipped when you present  ·  Before you teach</a:t>
-            </a:r>
-          </a:p>
-        </p:txBody>
-      </p:sp>
-      <p:sp>
-        <p:nvSpPr>
-          <p:cNvPr id="4" name="TextBox 3"/>
-          <p:cNvSpPr txBox="1"/>
-          <p:nvPr/>
-        </p:nvSpPr>
-        <p:spPr>
-          <a:xfrm>
-            <a:off x="548640" y="685800"/>
-            <a:ext cx="10972800" cy="640080"/>
-          </a:xfrm>
-          <a:prstGeom prst="rect">
-            <a:avLst/>
-          </a:prstGeom>
-          <a:noFill/>
-        </p:spPr>
-        <p:txBody>
-          <a:bodyPr wrap="square" anchor="t" lIns="0" rIns="0" tIns="0" bIns="0">
-            <a:spAutoFit/>
-          </a:bodyPr>
-          <a:lstStyle/>
-          <a:p>
-            <a:pPr algn="l">
-              <a:spcAft>
-                <a:spcPts val="1350"/>
-              </a:spcAft>
-            </a:pPr>
-            <a:r>
-              <a:rPr sz="3000" b="1" i="0">
-                <a:solidFill>
-                  <a:srgbClr val="1C1B19"/>
-                </a:solidFill>
-                <a:latin typeface="Source Serif 4"/>
-              </a:rPr>
-              <a:t>Before you teach</a:t>
-            </a:r>
-          </a:p>
-        </p:txBody>
-      </p:sp>
-      <p:sp>
-        <p:nvSpPr>
-          <p:cNvPr id="5" name="TextBox 4"/>
-          <p:cNvSpPr txBox="1"/>
-          <p:nvPr/>
-        </p:nvSpPr>
-        <p:spPr>
-          <a:xfrm>
-            <a:off x="548640" y="1463040"/>
-            <a:ext cx="5394960" cy="4937760"/>
-          </a:xfrm>
-          <a:prstGeom prst="rect">
-            <a:avLst/>
-          </a:prstGeom>
-          <a:noFill/>
-        </p:spPr>
-        <p:txBody>
-          <a:bodyPr wrap="square" anchor="t" lIns="0" rIns="0" tIns="0" bIns="0">
-            <a:spAutoFit/>
-          </a:bodyPr>
-          <a:lstStyle/>
-          <a:p>
-            <a:pPr algn="l">
-              <a:spcAft>
-                <a:spcPts val="585"/>
-              </a:spcAft>
-            </a:pPr>
-            <a:r>
-              <a:rPr sz="1500" b="1" i="0">
-                <a:solidFill>
-                  <a:srgbClr val="1C1B19"/>
-                </a:solidFill>
-                <a:latin typeface="Source Serif 4"/>
-              </a:rPr>
-              <a:t>Keep it off real people in the room.</a:t>
-            </a:r>
-          </a:p>
-          <a:p>
-            <a:pPr algn="l">
-              <a:spcAft>
-                <a:spcPts val="585"/>
-              </a:spcAft>
-            </a:pPr>
-            <a:r>
-              <a:rPr sz="1300" b="0" i="0">
-                <a:solidFill>
-                  <a:srgbClr val="1C1B19"/>
-                </a:solidFill>
-                <a:latin typeface="Source Serif 4"/>
-              </a:rPr>
-              <a:t>Anger talk can slide into naming a teacher, a teammate or a sibling. Steer back gently: "Let's keep names out of it. What would help in a moment like that?" The scenarios are there so nobody has to use their own story.</a:t>
-            </a:r>
-          </a:p>
-          <a:p>
-            <a:pPr algn="l">
-              <a:spcAft>
-                <a:spcPts val="585"/>
-              </a:spcAft>
-            </a:pPr>
-            <a:r>
-              <a:rPr sz="1300" b="0" i="0">
-                <a:solidFill>
-                  <a:srgbClr val="1C1B19"/>
-                </a:solidFill>
-                <a:latin typeface="Source Serif 4"/>
-              </a:rPr>
-              <a:t/>
-            </a:r>
-          </a:p>
-          <a:p>
-            <a:pPr algn="l">
-              <a:spcAft>
-                <a:spcPts val="585"/>
-              </a:spcAft>
-            </a:pPr>
-            <a:r>
-              <a:rPr sz="1500" b="1" i="0">
-                <a:solidFill>
-                  <a:srgbClr val="1C1B19"/>
-                </a:solidFill>
-                <a:latin typeface="Source Serif 4"/>
-              </a:rPr>
-              <a:t>Nobody shares their own blowup.</a:t>
-            </a:r>
-          </a:p>
-          <a:p>
-            <a:pPr algn="l">
-              <a:spcAft>
-                <a:spcPts val="585"/>
-              </a:spcAft>
-            </a:pPr>
-            <a:r>
-              <a:rPr sz="1300" b="0" i="0">
-                <a:solidFill>
-                  <a:srgbClr val="1C1B19"/>
-                </a:solidFill>
-                <a:latin typeface="Source Serif 4"/>
-              </a:rPr>
-              <a:t>The reflection card is private and goes home with the student. Passing is always fine in the circle.</a:t>
-            </a:r>
-          </a:p>
-          <a:p>
-            <a:pPr algn="l">
-              <a:spcAft>
-                <a:spcPts val="585"/>
-              </a:spcAft>
-            </a:pPr>
-            <a:r>
-              <a:rPr sz="1300" b="0" i="0">
-                <a:solidFill>
-                  <a:srgbClr val="1C1B19"/>
-                </a:solidFill>
-                <a:latin typeface="Source Serif 4"/>
-              </a:rPr>
-              <a:t/>
-            </a:r>
-          </a:p>
-          <a:p>
-            <a:pPr algn="l">
-              <a:spcAft>
-                <a:spcPts val="585"/>
-              </a:spcAft>
-            </a:pPr>
-            <a:r>
-              <a:rPr sz="1500" b="1" i="0">
-                <a:solidFill>
-                  <a:srgbClr val="1C1B19"/>
-                </a:solidFill>
-                <a:latin typeface="Source Serif 4"/>
-              </a:rPr>
-              <a:t>If someone else's anger feels unsafe.</a:t>
-            </a:r>
-          </a:p>
-          <a:p>
-            <a:pPr algn="l">
-              <a:spcAft>
-                <a:spcPts val="585"/>
-              </a:spcAft>
-            </a:pPr>
-            <a:r>
-              <a:rPr sz="1300" b="0" i="0">
-                <a:solidFill>
-                  <a:srgbClr val="1C1B19"/>
-                </a:solidFill>
-                <a:latin typeface="Source Serif 4"/>
-              </a:rPr>
-              <a:t>If a student says anger at home, in a relationship or at school makes them feel unsafe, thank them, don't dig for details in the group, and connect them with a counselor that day. The student page says plainly that this isn't theirs to handle alone.</a:t>
-            </a:r>
-          </a:p>
-          <a:p>
-            <a:pPr algn="l">
-              <a:spcAft>
-                <a:spcPts val="585"/>
-              </a:spcAft>
-            </a:pPr>
-            <a:r>
-              <a:rPr sz="1300" b="0" i="0">
-                <a:solidFill>
-                  <a:srgbClr val="1C1B19"/>
-                </a:solidFill>
-                <a:latin typeface="Source Serif 4"/>
-              </a:rPr>
-              <a:t/>
-            </a:r>
-          </a:p>
-        </p:txBody>
-      </p:sp>
-      <p:sp>
-        <p:nvSpPr>
-          <p:cNvPr id="6" name="TextBox 5"/>
-          <p:cNvSpPr txBox="1"/>
-          <p:nvPr/>
-        </p:nvSpPr>
-        <p:spPr>
-          <a:xfrm>
-            <a:off x="6217920" y="1463040"/>
-            <a:ext cx="5394960" cy="4937760"/>
-          </a:xfrm>
-          <a:prstGeom prst="rect">
-            <a:avLst/>
-          </a:prstGeom>
-          <a:noFill/>
-        </p:spPr>
-        <p:txBody>
-          <a:bodyPr wrap="square" anchor="t" lIns="0" rIns="0" tIns="0" bIns="0">
-            <a:spAutoFit/>
-          </a:bodyPr>
-          <a:lstStyle/>
-          <a:p>
-            <a:pPr algn="l">
-              <a:spcAft>
-                <a:spcPts val="585"/>
-              </a:spcAft>
-            </a:pPr>
-            <a:r>
-              <a:rPr sz="1500" b="1" i="0">
-                <a:solidFill>
-                  <a:srgbClr val="1C1B19"/>
-                </a:solidFill>
-                <a:latin typeface="Source Serif 4"/>
-              </a:rPr>
-              <a:t>If a student has hurt someone or themselves when angry.</a:t>
-            </a:r>
-          </a:p>
-          <a:p>
-            <a:pPr algn="l">
-              <a:spcAft>
-                <a:spcPts val="585"/>
-              </a:spcAft>
-            </a:pPr>
-            <a:r>
-              <a:rPr sz="1300" b="0" i="0">
-                <a:solidFill>
-                  <a:srgbClr val="1C1B19"/>
-                </a:solidFill>
-                <a:latin typeface="Source Serif 4"/>
-              </a:rPr>
-              <a:t>That's a counselor conversation, not a discussion topic. Don't ask screening questions in advisory. Walk them over or let the counselor know after.</a:t>
-            </a:r>
-          </a:p>
-          <a:p>
-            <a:pPr algn="l">
-              <a:spcAft>
-                <a:spcPts val="585"/>
-              </a:spcAft>
-            </a:pPr>
-            <a:r>
-              <a:rPr sz="1300" b="0" i="0">
-                <a:solidFill>
-                  <a:srgbClr val="1C1B19"/>
-                </a:solidFill>
-                <a:latin typeface="Source Serif 4"/>
-              </a:rPr>
-              <a:t/>
-            </a:r>
-          </a:p>
-          <a:p>
-            <a:pPr algn="l">
-              <a:spcAft>
-                <a:spcPts val="585"/>
-              </a:spcAft>
-            </a:pPr>
-            <a:r>
-              <a:rPr sz="1500" b="1" i="0">
-                <a:solidFill>
-                  <a:srgbClr val="1C1B19"/>
-                </a:solidFill>
-                <a:latin typeface="Source Serif 4"/>
-              </a:rPr>
-              <a:t>Who gets read as angry is a real topic.</a:t>
-            </a:r>
-          </a:p>
-          <a:p>
-            <a:pPr algn="l">
-              <a:spcAft>
-                <a:spcPts val="585"/>
-              </a:spcAft>
-            </a:pPr>
-            <a:r>
-              <a:rPr sz="1300" b="0" i="0">
-                <a:solidFill>
-                  <a:srgbClr val="1C1B19"/>
-                </a:solidFill>
-                <a:latin typeface="Source Serif 4"/>
-              </a:rPr>
-              <a:t>Some students, often Black students and students of color, have been called aggressive when they were being firm. If it comes up, believe them and name it as unfair. Don't ask anyone to prove it or explain it for the group.</a:t>
-            </a:r>
-          </a:p>
-          <a:p>
-            <a:pPr algn="l">
-              <a:spcAft>
-                <a:spcPts val="585"/>
-              </a:spcAft>
-            </a:pPr>
-            <a:r>
-              <a:rPr sz="1300" b="0" i="0">
-                <a:solidFill>
-                  <a:srgbClr val="1C1B19"/>
-                </a:solidFill>
-                <a:latin typeface="Source Serif 4"/>
-              </a:rPr>
-              <a:t/>
-            </a:r>
-          </a:p>
-          <a:p>
-            <a:pPr algn="l">
-              <a:spcAft>
-                <a:spcPts val="585"/>
-              </a:spcAft>
-            </a:pPr>
-            <a:r>
-              <a:rPr sz="1500" b="1" i="0">
-                <a:solidFill>
-                  <a:srgbClr val="1C1B19"/>
-                </a:solidFill>
-                <a:latin typeface="Source Serif 4"/>
-              </a:rPr>
-              <a:t>Model the skill you're teaching.</a:t>
-            </a:r>
-          </a:p>
-          <a:p>
-            <a:pPr algn="l">
-              <a:spcAft>
-                <a:spcPts val="585"/>
-              </a:spcAft>
-            </a:pPr>
-            <a:r>
-              <a:rPr sz="1300" b="0" i="0">
-                <a:solidFill>
-                  <a:srgbClr val="1C1B19"/>
-                </a:solidFill>
-                <a:latin typeface="Source Serif 4"/>
-              </a:rPr>
-              <a:t>If the room gets heated, you can say it out loud: "I'm going to slow this down for a second." Students learn the time-out from watching an adult use one.</a:t>
-            </a:r>
-          </a:p>
-          <a:p>
-            <a:pPr algn="l">
-              <a:spcAft>
-                <a:spcPts val="585"/>
-              </a:spcAft>
-            </a:pPr>
-            <a:r>
-              <a:rPr sz="1300" b="0" i="0">
-                <a:solidFill>
-                  <a:srgbClr val="1C1B19"/>
-                </a:solidFill>
-                <a:latin typeface="Source Serif 4"/>
-              </a:rPr>
-              <a:t/>
-            </a:r>
-          </a:p>
-        </p:txBody>
-      </p:sp>
-    </p:spTree>
-  </p:cSld>
-  <p:clrMapOvr>
-    <a:masterClrMapping/>
-  </p:clrMapOvr>
-</p:sld>
-</file>
-
-<file path=ppt/slides/slide3.xml><?xml version="1.0" encoding="utf-8"?>
-<p:sld xmlns:a="http://schemas.openxmlformats.org/drawingml/2006/main" xmlns:p="http://schemas.openxmlformats.org/presentationml/2006/main" xmlns:r="http://schemas.openxmlformats.org/officeDocument/2006/relationships" show="0">
-  <p:cSld>
-    <p:bg>
-      <p:bgPr>
-        <a:solidFill>
-          <a:srgbClr val="EEEBE4"/>
-        </a:solidFill>
-        <a:effectLst/>
-      </p:bgPr>
-    </p:bg>
-    <p:spTree>
-      <p:nvGrpSpPr>
-        <p:cNvPr id="1" name=""/>
-        <p:cNvGrpSpPr/>
-        <p:nvPr/>
-      </p:nvGrpSpPr>
-      <p:grpSpPr/>
-      <p:sp>
-        <p:nvSpPr>
-          <p:cNvPr id="2" name="Rectangle 1"/>
-          <p:cNvSpPr/>
-          <p:nvPr/>
-        </p:nvSpPr>
-        <p:spPr>
-          <a:xfrm>
-            <a:off x="0" y="0"/>
-            <a:ext cx="12191695" cy="384048"/>
-          </a:xfrm>
-          <a:prstGeom prst="rect">
-            <a:avLst/>
-          </a:prstGeom>
-          <a:solidFill>
-            <a:srgbClr val="0B2D5B"/>
-          </a:solidFill>
-          <a:ln>
-            <a:noFill/>
-          </a:ln>
-          <a:effectLst/>
-        </p:spPr>
-        <p:style>
-          <a:lnRef idx="1">
-            <a:schemeClr val="accent1"/>
-          </a:lnRef>
-          <a:fillRef idx="3">
-            <a:schemeClr val="accent1"/>
-          </a:fillRef>
-          <a:effectRef idx="2">
-            <a:schemeClr val="accent1"/>
-          </a:effectRef>
-          <a:fontRef idx="minor">
-            <a:schemeClr val="lt1"/>
-          </a:fontRef>
-        </p:style>
-        <p:txBody>
-          <a:bodyPr rtlCol="0" anchor="ctr"/>
-          <a:lstStyle/>
-          <a:p>
-            <a:pPr algn="ctr"/>
-          </a:p>
-        </p:txBody>
-      </p:sp>
-      <p:sp>
-        <p:nvSpPr>
-          <p:cNvPr id="3" name="TextBox 2"/>
-          <p:cNvSpPr txBox="1"/>
-          <p:nvPr/>
-        </p:nvSpPr>
-        <p:spPr>
-          <a:xfrm>
-            <a:off x="548640" y="100584"/>
-            <a:ext cx="10972800" cy="274320"/>
-          </a:xfrm>
-          <a:prstGeom prst="rect">
-            <a:avLst/>
-          </a:prstGeom>
-          <a:noFill/>
-        </p:spPr>
-        <p:txBody>
-          <a:bodyPr wrap="square" anchor="t" lIns="0" rIns="0" tIns="0" bIns="0">
-            <a:spAutoFit/>
-          </a:bodyPr>
-          <a:lstStyle/>
-          <a:p>
-            <a:pPr algn="l">
-              <a:spcAft>
-                <a:spcPts val="495"/>
-              </a:spcAft>
-            </a:pPr>
-            <a:r>
-              <a:rPr sz="1100" b="1" i="0">
-                <a:solidFill>
-                  <a:srgbClr val="FFFFFF"/>
-                </a:solidFill>
-                <a:latin typeface="Inter Tight"/>
-              </a:rPr>
-              <a:t>TEACHER PAGE  ·  skipped when you present  ·  Every student in the room</a:t>
-            </a:r>
-          </a:p>
-        </p:txBody>
-      </p:sp>
-      <p:sp>
-        <p:nvSpPr>
-          <p:cNvPr id="4" name="TextBox 3"/>
-          <p:cNvSpPr txBox="1"/>
-          <p:nvPr/>
-        </p:nvSpPr>
-        <p:spPr>
-          <a:xfrm>
-            <a:off x="548640" y="685800"/>
-            <a:ext cx="10972800" cy="640080"/>
-          </a:xfrm>
-          <a:prstGeom prst="rect">
-            <a:avLst/>
-          </a:prstGeom>
-          <a:noFill/>
-        </p:spPr>
-        <p:txBody>
-          <a:bodyPr wrap="square" anchor="t" lIns="0" rIns="0" tIns="0" bIns="0">
-            <a:spAutoFit/>
-          </a:bodyPr>
-          <a:lstStyle/>
-          <a:p>
-            <a:pPr algn="l">
-              <a:spcAft>
-                <a:spcPts val="1350"/>
-              </a:spcAft>
-            </a:pPr>
-            <a:r>
-              <a:rPr sz="3000" b="1" i="0">
-                <a:solidFill>
-                  <a:srgbClr val="1C1B19"/>
-                </a:solidFill>
-                <a:latin typeface="Source Serif 4"/>
-              </a:rPr>
-              <a:t>Every student in the room</a:t>
-            </a:r>
-          </a:p>
-        </p:txBody>
-      </p:sp>
-      <p:sp>
-        <p:nvSpPr>
-          <p:cNvPr id="5" name="TextBox 4"/>
-          <p:cNvSpPr txBox="1"/>
-          <p:nvPr/>
-        </p:nvSpPr>
-        <p:spPr>
-          <a:xfrm>
-            <a:off x="548640" y="1325880"/>
-            <a:ext cx="10972800" cy="365760"/>
-          </a:xfrm>
-          <a:prstGeom prst="rect">
-            <a:avLst/>
-          </a:prstGeom>
-          <a:noFill/>
-        </p:spPr>
-        <p:txBody>
-          <a:bodyPr wrap="square" anchor="t" lIns="0" rIns="0" tIns="0" bIns="0">
-            <a:spAutoFit/>
-          </a:bodyPr>
-          <a:lstStyle/>
-          <a:p>
-            <a:pPr algn="l">
-              <a:spcAft>
-                <a:spcPts val="630"/>
-              </a:spcAft>
-            </a:pPr>
-            <a:r>
-              <a:rPr sz="1400" b="0" i="0">
-                <a:solidFill>
-                  <a:srgbClr val="5D5A54"/>
-                </a:solidFill>
-                <a:latin typeface="Inter Tight"/>
-              </a:rPr>
-              <a:t>Culture, family, identity, ability and money: what to keep in mind for this topic.</a:t>
-            </a:r>
-          </a:p>
-        </p:txBody>
-      </p:sp>
-      <p:sp>
-        <p:nvSpPr>
-          <p:cNvPr id="6" name="TextBox 5"/>
-          <p:cNvSpPr txBox="1"/>
-          <p:nvPr/>
-        </p:nvSpPr>
-        <p:spPr>
-          <a:xfrm>
-            <a:off x="548640" y="1828800"/>
-            <a:ext cx="5394960" cy="4572000"/>
-          </a:xfrm>
-          <a:prstGeom prst="rect">
-            <a:avLst/>
-          </a:prstGeom>
-          <a:noFill/>
-        </p:spPr>
-        <p:txBody>
-          <a:bodyPr wrap="square" anchor="t" lIns="0" rIns="0" tIns="0" bIns="0">
-            <a:spAutoFit/>
-          </a:bodyPr>
-          <a:lstStyle/>
-          <a:p>
-            <a:pPr algn="l">
-              <a:spcAft>
-                <a:spcPts val="585"/>
-              </a:spcAft>
-            </a:pPr>
-            <a:r>
-              <a:rPr sz="1500" b="1" i="0">
-                <a:solidFill>
-                  <a:srgbClr val="1C1B19"/>
-                </a:solidFill>
-                <a:latin typeface="Source Serif 4"/>
-              </a:rPr>
-              <a:t>Race and who gets called aggressive.</a:t>
-            </a:r>
-          </a:p>
-          <a:p>
-            <a:pPr algn="l">
-              <a:spcAft>
-                <a:spcPts val="585"/>
-              </a:spcAft>
-            </a:pPr>
-            <a:r>
-              <a:rPr sz="1300" b="0" i="0">
-                <a:solidFill>
-                  <a:srgbClr val="1C1B19"/>
-                </a:solidFill>
-                <a:latin typeface="Source Serif 4"/>
-              </a:rPr>
-              <a:t>The Hugenberg study is on the slide on purpose. Present it as bias in the people watching, and keep the focus on what a student can do if they've been misread: talk it through with someone they trust. Avoid using any student's experience as the example.</a:t>
-            </a:r>
-          </a:p>
-          <a:p>
-            <a:pPr algn="l">
-              <a:spcAft>
-                <a:spcPts val="585"/>
-              </a:spcAft>
-            </a:pPr>
-            <a:r>
-              <a:rPr sz="1300" b="0" i="0">
-                <a:solidFill>
-                  <a:srgbClr val="1C1B19"/>
-                </a:solidFill>
-                <a:latin typeface="Source Serif 4"/>
-              </a:rPr>
-              <a:t/>
-            </a:r>
-          </a:p>
-          <a:p>
-            <a:pPr algn="l">
-              <a:spcAft>
-                <a:spcPts val="585"/>
-              </a:spcAft>
-            </a:pPr>
-            <a:r>
-              <a:rPr sz="1500" b="1" i="0">
-                <a:solidFill>
-                  <a:srgbClr val="1C1B19"/>
-                </a:solidFill>
-                <a:latin typeface="Source Serif 4"/>
-              </a:rPr>
-              <a:t>Family anger rules differ.</a:t>
-            </a:r>
-          </a:p>
-          <a:p>
-            <a:pPr algn="l">
-              <a:spcAft>
-                <a:spcPts val="585"/>
-              </a:spcAft>
-            </a:pPr>
-            <a:r>
-              <a:rPr sz="1300" b="0" i="0">
-                <a:solidFill>
-                  <a:srgbClr val="1C1B19"/>
-                </a:solidFill>
-                <a:latin typeface="Source Serif 4"/>
-              </a:rPr>
-              <a:t>In some homes raised voices blow over in minutes. In others, anger at an elder crosses a serious line. Present both as normal, avoid "In X families" generalizations, and keep the family-rules question private. Say "parent or caregiver": Sam's scenario uses a grandmother.</a:t>
-            </a:r>
-          </a:p>
-          <a:p>
-            <a:pPr algn="l">
-              <a:spcAft>
-                <a:spcPts val="585"/>
-              </a:spcAft>
-            </a:pPr>
-            <a:r>
-              <a:rPr sz="1300" b="0" i="0">
-                <a:solidFill>
-                  <a:srgbClr val="1C1B19"/>
-                </a:solidFill>
-                <a:latin typeface="Source Serif 4"/>
-              </a:rPr>
-              <a:t/>
-            </a:r>
-          </a:p>
-          <a:p>
-            <a:pPr algn="l">
-              <a:spcAft>
-                <a:spcPts val="585"/>
-              </a:spcAft>
-            </a:pPr>
-            <a:r>
-              <a:rPr sz="1500" b="1" i="0">
-                <a:solidFill>
-                  <a:srgbClr val="1C1B19"/>
-                </a:solidFill>
-                <a:latin typeface="Source Serif 4"/>
-              </a:rPr>
-              <a:t>Girls get angry. Boys get hurt.</a:t>
-            </a:r>
-          </a:p>
-          <a:p>
-            <a:pPr algn="l">
-              <a:spcAft>
-                <a:spcPts val="585"/>
-              </a:spcAft>
-            </a:pPr>
-            <a:r>
-              <a:rPr sz="1300" b="0" i="0">
-                <a:solidFill>
-                  <a:srgbClr val="1C1B19"/>
-                </a:solidFill>
-                <a:latin typeface="Source Serif 4"/>
-              </a:rPr>
-              <a:t>Students hear early on that anger is unattractive in girls and that boys should only show anger. Mix genders in your examples, and when naming what's under anger, say clearly that anyone can be hurt, scared or embarrassed.</a:t>
-            </a:r>
-          </a:p>
-          <a:p>
-            <a:pPr algn="l">
-              <a:spcAft>
-                <a:spcPts val="585"/>
-              </a:spcAft>
-            </a:pPr>
-            <a:r>
-              <a:rPr sz="1300" b="0" i="0">
-                <a:solidFill>
-                  <a:srgbClr val="1C1B19"/>
-                </a:solidFill>
-                <a:latin typeface="Source Serif 4"/>
-              </a:rPr>
-              <a:t/>
-            </a:r>
-          </a:p>
-        </p:txBody>
-      </p:sp>
-      <p:sp>
-        <p:nvSpPr>
-          <p:cNvPr id="7" name="TextBox 6"/>
-          <p:cNvSpPr txBox="1"/>
-          <p:nvPr/>
-        </p:nvSpPr>
-        <p:spPr>
-          <a:xfrm>
-            <a:off x="6217920" y="1828800"/>
-            <a:ext cx="5394960" cy="4572000"/>
-          </a:xfrm>
-          <a:prstGeom prst="rect">
-            <a:avLst/>
-          </a:prstGeom>
-          <a:noFill/>
-        </p:spPr>
-        <p:txBody>
-          <a:bodyPr wrap="square" anchor="t" lIns="0" rIns="0" tIns="0" bIns="0">
-            <a:spAutoFit/>
-          </a:bodyPr>
-          <a:lstStyle/>
-          <a:p>
-            <a:pPr algn="l">
-              <a:spcAft>
-                <a:spcPts val="585"/>
-              </a:spcAft>
-            </a:pPr>
-            <a:r>
-              <a:rPr sz="1500" b="1" i="0">
-                <a:solidFill>
-                  <a:srgbClr val="1C1B19"/>
-                </a:solidFill>
-                <a:latin typeface="Source Serif 4"/>
-              </a:rPr>
-              <a:t>Bodies and brains signal differently.</a:t>
-            </a:r>
-          </a:p>
-          <a:p>
-            <a:pPr algn="l">
-              <a:spcAft>
-                <a:spcPts val="585"/>
-              </a:spcAft>
-            </a:pPr>
-            <a:r>
-              <a:rPr sz="1300" b="0" i="0">
-                <a:solidFill>
-                  <a:srgbClr val="1C1B19"/>
-                </a:solidFill>
-                <a:latin typeface="Source Serif 4"/>
-              </a:rPr>
-              <a:t>Some students, including autistic students and students with ADHD, notice body signals late, or get flooded by noise, crowds or sensory overload before anger shows. "Catch it early" can mean noticing the room, too. Don't treat eye contact or staying seated as signs of calm, and never use "psycho" or "crazy" as shorthand.</a:t>
-            </a:r>
-          </a:p>
-          <a:p>
-            <a:pPr algn="l">
-              <a:spcAft>
-                <a:spcPts val="585"/>
-              </a:spcAft>
-            </a:pPr>
-            <a:r>
-              <a:rPr sz="1300" b="0" i="0">
-                <a:solidFill>
-                  <a:srgbClr val="1C1B19"/>
-                </a:solidFill>
-                <a:latin typeface="Source Serif 4"/>
-              </a:rPr>
-              <a:t/>
-            </a:r>
-          </a:p>
-          <a:p>
-            <a:pPr algn="l">
-              <a:spcAft>
-                <a:spcPts val="585"/>
-              </a:spcAft>
-            </a:pPr>
-            <a:r>
-              <a:rPr sz="1500" b="1" i="0">
-                <a:solidFill>
-                  <a:srgbClr val="1C1B19"/>
-                </a:solidFill>
-                <a:latin typeface="Source Serif 4"/>
-              </a:rPr>
-              <a:t>Not everyone can walk away.</a:t>
-            </a:r>
-          </a:p>
-          <a:p>
-            <a:pPr algn="l">
-              <a:spcAft>
-                <a:spcPts val="585"/>
-              </a:spcAft>
-            </a:pPr>
-            <a:r>
-              <a:rPr sz="1300" b="0" i="0">
-                <a:solidFill>
-                  <a:srgbClr val="1C1B19"/>
-                </a:solidFill>
-                <a:latin typeface="Source Serif 4"/>
-              </a:rPr>
-              <a:t>Ines may not be able to quit a job her family counts on, and some students can't leave a room at work or at home. Breathing out slowly and cold water on the hands work anywhere and cost nothing. Name those first.</a:t>
-            </a:r>
-          </a:p>
-          <a:p>
-            <a:pPr algn="l">
-              <a:spcAft>
-                <a:spcPts val="585"/>
-              </a:spcAft>
-            </a:pPr>
-            <a:r>
-              <a:rPr sz="1300" b="0" i="0">
-                <a:solidFill>
-                  <a:srgbClr val="1C1B19"/>
-                </a:solidFill>
-                <a:latin typeface="Source Serif 4"/>
-              </a:rPr>
-              <a:t/>
-            </a:r>
-          </a:p>
-          <a:p>
-            <a:pPr algn="l">
-              <a:spcAft>
-                <a:spcPts val="585"/>
-              </a:spcAft>
-            </a:pPr>
-            <a:r>
-              <a:rPr sz="1500" b="1" i="0">
-                <a:solidFill>
-                  <a:srgbClr val="1C1B19"/>
-                </a:solidFill>
-                <a:latin typeface="Source Serif 4"/>
-              </a:rPr>
-              <a:t>Faith can be a tool.</a:t>
-            </a:r>
-          </a:p>
-          <a:p>
-            <a:pPr algn="l">
-              <a:spcAft>
-                <a:spcPts val="585"/>
-              </a:spcAft>
-            </a:pPr>
-            <a:r>
-              <a:rPr sz="1300" b="0" i="0">
-                <a:solidFill>
-                  <a:srgbClr val="1C1B19"/>
-                </a:solidFill>
-                <a:latin typeface="Source Serif 4"/>
-              </a:rPr>
-              <a:t>For some students, prayer, a verse or a moment of quiet is how they cool down. For others it's music or a walk. "Whatever brings your body down" covers all of it.</a:t>
-            </a:r>
-          </a:p>
-          <a:p>
-            <a:pPr algn="l">
-              <a:spcAft>
-                <a:spcPts val="585"/>
-              </a:spcAft>
-            </a:pPr>
-            <a:r>
-              <a:rPr sz="1300" b="0" i="0">
-                <a:solidFill>
-                  <a:srgbClr val="1C1B19"/>
-                </a:solidFill>
-                <a:latin typeface="Source Serif 4"/>
-              </a:rPr>
-              <a:t/>
-            </a:r>
-          </a:p>
-        </p:txBody>
-      </p:sp>
-    </p:spTree>
-  </p:cSld>
-  <p:clrMapOvr>
-    <a:masterClrMapping/>
-  </p:clrMapOvr>
-</p:sld>
-</file>
-
-<file path=ppt/slides/slide4.xml><?xml version="1.0" encoding="utf-8"?>
-<p:sld xmlns:a="http://schemas.openxmlformats.org/drawingml/2006/main" xmlns:p="http://schemas.openxmlformats.org/presentationml/2006/main" xmlns:r="http://schemas.openxmlformats.org/officeDocument/2006/relationships" show="0">
-  <p:cSld>
-    <p:bg>
-      <p:bgPr>
-        <a:solidFill>
-          <a:srgbClr val="EEEBE4"/>
-        </a:solidFill>
-        <a:effectLst/>
-      </p:bgPr>
-    </p:bg>
-    <p:spTree>
-      <p:nvGrpSpPr>
-        <p:cNvPr id="1" name=""/>
-        <p:cNvGrpSpPr/>
-        <p:nvPr/>
-      </p:nvGrpSpPr>
-      <p:grpSpPr/>
-      <p:sp>
-        <p:nvSpPr>
-          <p:cNvPr id="2" name="Rectangle 1"/>
-          <p:cNvSpPr/>
-          <p:nvPr/>
-        </p:nvSpPr>
-        <p:spPr>
-          <a:xfrm>
-            <a:off x="0" y="0"/>
-            <a:ext cx="12191695" cy="384048"/>
-          </a:xfrm>
-          <a:prstGeom prst="rect">
-            <a:avLst/>
-          </a:prstGeom>
-          <a:solidFill>
-            <a:srgbClr val="0B2D5B"/>
-          </a:solidFill>
-          <a:ln>
-            <a:noFill/>
-          </a:ln>
-          <a:effectLst/>
-        </p:spPr>
-        <p:style>
-          <a:lnRef idx="1">
-            <a:schemeClr val="accent1"/>
-          </a:lnRef>
-          <a:fillRef idx="3">
-            <a:schemeClr val="accent1"/>
-          </a:fillRef>
-          <a:effectRef idx="2">
-            <a:schemeClr val="accent1"/>
-          </a:effectRef>
-          <a:fontRef idx="minor">
-            <a:schemeClr val="lt1"/>
-          </a:fontRef>
-        </p:style>
-        <p:txBody>
-          <a:bodyPr rtlCol="0" anchor="ctr"/>
-          <a:lstStyle/>
-          <a:p>
-            <a:pPr algn="ctr"/>
-          </a:p>
-        </p:txBody>
-      </p:sp>
-      <p:sp>
-        <p:nvSpPr>
-          <p:cNvPr id="3" name="TextBox 2"/>
-          <p:cNvSpPr txBox="1"/>
-          <p:nvPr/>
-        </p:nvSpPr>
-        <p:spPr>
-          <a:xfrm>
-            <a:off x="548640" y="100584"/>
-            <a:ext cx="10972800" cy="274320"/>
-          </a:xfrm>
-          <a:prstGeom prst="rect">
-            <a:avLst/>
-          </a:prstGeom>
-          <a:noFill/>
-        </p:spPr>
-        <p:txBody>
-          <a:bodyPr wrap="square" anchor="t" lIns="0" rIns="0" tIns="0" bIns="0">
-            <a:spAutoFit/>
-          </a:bodyPr>
-          <a:lstStyle/>
-          <a:p>
-            <a:pPr algn="l">
-              <a:spcAft>
-                <a:spcPts val="495"/>
-              </a:spcAft>
-            </a:pPr>
-            <a:r>
-              <a:rPr sz="1100" b="1" i="0">
-                <a:solidFill>
-                  <a:srgbClr val="FFFFFF"/>
-                </a:solidFill>
-                <a:latin typeface="Inter Tight"/>
-              </a:rPr>
-              <a:t>TEACHER PAGE  ·  skipped when you present  ·  Background</a:t>
-            </a:r>
-          </a:p>
-        </p:txBody>
-      </p:sp>
-      <p:sp>
-        <p:nvSpPr>
-          <p:cNvPr id="4" name="TextBox 3"/>
-          <p:cNvSpPr txBox="1"/>
-          <p:nvPr/>
-        </p:nvSpPr>
-        <p:spPr>
-          <a:xfrm>
-            <a:off x="548640" y="685800"/>
-            <a:ext cx="10972800" cy="640080"/>
-          </a:xfrm>
-          <a:prstGeom prst="rect">
-            <a:avLst/>
-          </a:prstGeom>
-          <a:noFill/>
-        </p:spPr>
-        <p:txBody>
-          <a:bodyPr wrap="square" anchor="t" lIns="0" rIns="0" tIns="0" bIns="0">
-            <a:spAutoFit/>
-          </a:bodyPr>
-          <a:lstStyle/>
-          <a:p>
-            <a:pPr algn="l">
-              <a:spcAft>
-                <a:spcPts val="1350"/>
-              </a:spcAft>
-            </a:pPr>
-            <a:r>
-              <a:rPr sz="3000" b="1" i="0">
-                <a:solidFill>
-                  <a:srgbClr val="1C1B19"/>
-                </a:solidFill>
-                <a:latin typeface="Source Serif 4"/>
-              </a:rPr>
-              <a:t>What the research says</a:t>
-            </a:r>
-          </a:p>
-        </p:txBody>
-      </p:sp>
-      <p:sp>
-        <p:nvSpPr>
-          <p:cNvPr id="5" name="TextBox 4"/>
-          <p:cNvSpPr txBox="1"/>
-          <p:nvPr/>
-        </p:nvSpPr>
-        <p:spPr>
-          <a:xfrm>
-            <a:off x="548640" y="1463040"/>
-            <a:ext cx="5394960" cy="4937760"/>
-          </a:xfrm>
-          <a:prstGeom prst="rect">
-            <a:avLst/>
-          </a:prstGeom>
-          <a:noFill/>
-        </p:spPr>
-        <p:txBody>
-          <a:bodyPr wrap="square" anchor="t" lIns="0" rIns="0" tIns="0" bIns="0">
-            <a:spAutoFit/>
-          </a:bodyPr>
-          <a:lstStyle/>
-          <a:p>
-            <a:pPr algn="l">
-              <a:spcAft>
-                <a:spcPts val="585"/>
-              </a:spcAft>
-            </a:pPr>
-            <a:r>
-              <a:rPr sz="1300" b="0" i="0">
-                <a:solidFill>
-                  <a:srgbClr val="1C1B19"/>
-                </a:solidFill>
-                <a:latin typeface="Source Serif 4"/>
-              </a:rPr>
-              <a:t>Neuroscientist James Blair calls the amygdala, hypothalamus and periaqueductal gray the brain's "basic threat system" and links it to both anger and reactive aggression. The prefrontal cortex reads context and can turn the alarm down.</a:t>
-            </a:r>
-          </a:p>
-          <a:p>
-            <a:pPr algn="l">
-              <a:spcAft>
-                <a:spcPts val="585"/>
-              </a:spcAft>
-            </a:pPr>
-            <a:r>
-              <a:rPr sz="1050" b="0" i="0">
-                <a:solidFill>
-                  <a:srgbClr val="5D5A54"/>
-                </a:solidFill>
-                <a:latin typeface="Inter Tight"/>
-              </a:rPr>
-              <a:t>Blair, 2012, WIREs Cognitive Science</a:t>
-            </a:r>
-          </a:p>
-          <a:p>
-            <a:pPr algn="l">
-              <a:spcAft>
-                <a:spcPts val="585"/>
-              </a:spcAft>
-            </a:pPr>
-            <a:r>
-              <a:rPr sz="1300" b="0" i="0">
-                <a:solidFill>
-                  <a:srgbClr val="1C1B19"/>
-                </a:solidFill>
-                <a:latin typeface="Source Serif 4"/>
-              </a:rPr>
-              <a:t>Angry college students who hit a punching bag while thinking about the person who angered them ended up angrier and more aggressive than students who did nothing at all.</a:t>
-            </a:r>
-          </a:p>
-          <a:p>
-            <a:pPr algn="l">
-              <a:spcAft>
-                <a:spcPts val="585"/>
-              </a:spcAft>
-            </a:pPr>
-            <a:r>
-              <a:rPr sz="1050" b="0" i="0">
-                <a:solidFill>
-                  <a:srgbClr val="5D5A54"/>
-                </a:solidFill>
-                <a:latin typeface="Inter Tight"/>
-              </a:rPr>
-              <a:t>Bushman, 2002, Personality and Social Psychology Bulletin</a:t>
-            </a:r>
-          </a:p>
-          <a:p>
-            <a:pPr algn="l">
-              <a:spcAft>
-                <a:spcPts val="585"/>
-              </a:spcAft>
-            </a:pPr>
-            <a:r>
-              <a:rPr sz="1300" b="0" i="0">
-                <a:solidFill>
-                  <a:srgbClr val="1C1B19"/>
-                </a:solidFill>
-                <a:latin typeface="Source Serif 4"/>
-              </a:rPr>
-              <a:t>A review of 154 studies found that activities that lower arousal (slow breathing, muscle relaxation, mindfulness, slow yoga, a time-out) reduced anger. Activities that raise it, like running or boxing, generally did not, and sometimes made it worse.</a:t>
-            </a:r>
-          </a:p>
-          <a:p>
-            <a:pPr algn="l">
-              <a:spcAft>
-                <a:spcPts val="585"/>
-              </a:spcAft>
-            </a:pPr>
-            <a:r>
-              <a:rPr sz="1050" b="0" i="0">
-                <a:solidFill>
-                  <a:srgbClr val="5D5A54"/>
-                </a:solidFill>
-                <a:latin typeface="Inter Tight"/>
-              </a:rPr>
-              <a:t>Kjærvik and Bushman, 2024, Clinical Psychology Review</a:t>
-            </a:r>
-          </a:p>
-        </p:txBody>
-      </p:sp>
-      <p:sp>
-        <p:nvSpPr>
-          <p:cNvPr id="6" name="TextBox 5"/>
-          <p:cNvSpPr txBox="1"/>
-          <p:nvPr/>
-        </p:nvSpPr>
-        <p:spPr>
-          <a:xfrm>
-            <a:off x="6217920" y="1463040"/>
-            <a:ext cx="5394960" cy="4937760"/>
-          </a:xfrm>
-          <a:prstGeom prst="rect">
-            <a:avLst/>
-          </a:prstGeom>
-          <a:noFill/>
-        </p:spPr>
-        <p:txBody>
-          <a:bodyPr wrap="square" anchor="t" lIns="0" rIns="0" tIns="0" bIns="0">
-            <a:spAutoFit/>
-          </a:bodyPr>
-          <a:lstStyle/>
-          <a:p>
-            <a:pPr algn="l">
-              <a:spcAft>
-                <a:spcPts val="585"/>
-              </a:spcAft>
-            </a:pPr>
-            <a:r>
-              <a:rPr sz="1300" b="0" i="0">
-                <a:solidFill>
-                  <a:srgbClr val="1C1B19"/>
-                </a:solidFill>
-                <a:latin typeface="Source Serif 4"/>
-              </a:rPr>
-              <a:t>People who looked back on an angering memory from a "fly on the wall" view felt less angry than people who relived it from the inside.</a:t>
-            </a:r>
-          </a:p>
-          <a:p>
-            <a:pPr algn="l">
-              <a:spcAft>
-                <a:spcPts val="585"/>
-              </a:spcAft>
-            </a:pPr>
-            <a:r>
-              <a:rPr sz="1050" b="0" i="0">
-                <a:solidFill>
-                  <a:srgbClr val="5D5A54"/>
-                </a:solidFill>
-                <a:latin typeface="Inter Tight"/>
-              </a:rPr>
-              <a:t>Kross, Ayduk and Mischel, 2005, Psychological Science</a:t>
-            </a:r>
-          </a:p>
-          <a:p>
-            <a:pPr algn="l">
-              <a:spcAft>
-                <a:spcPts val="585"/>
-              </a:spcAft>
-            </a:pPr>
-            <a:r>
-              <a:rPr sz="1300" b="0" i="0">
-                <a:solidFill>
-                  <a:srgbClr val="1C1B19"/>
-                </a:solidFill>
-                <a:latin typeface="Source Serif 4"/>
-              </a:rPr>
-              <a:t>White participants with more implicit racial bias were quicker to see anger in Black faces than in white faces.</a:t>
-            </a:r>
-          </a:p>
-          <a:p>
-            <a:pPr algn="l">
-              <a:spcAft>
-                <a:spcPts val="585"/>
-              </a:spcAft>
-            </a:pPr>
-            <a:r>
-              <a:rPr sz="1050" b="0" i="0">
-                <a:solidFill>
-                  <a:srgbClr val="5D5A54"/>
-                </a:solidFill>
-                <a:latin typeface="Inter Tight"/>
-              </a:rPr>
-              <a:t>Hugenberg and Bodenhausen, 2003, Psychological Science</a:t>
-            </a:r>
-          </a:p>
-          <a:p>
-            <a:pPr algn="l">
-              <a:spcAft>
-                <a:spcPts val="585"/>
-              </a:spcAft>
-            </a:pPr>
-            <a:r>
-              <a:rPr sz="1300" b="0" i="0">
-                <a:solidFill>
-                  <a:srgbClr val="1C1B19"/>
-                </a:solidFill>
-                <a:latin typeface="Source Serif 4"/>
-              </a:rPr>
-              <a:t>People who suppressed their emotions during a conversation came across as less responsive, and their partners formed more negative impressions. The cost was smaller for people with more Asian cultural values, where restraint is expected.</a:t>
-            </a:r>
-          </a:p>
-          <a:p>
-            <a:pPr algn="l">
-              <a:spcAft>
-                <a:spcPts val="585"/>
-              </a:spcAft>
-            </a:pPr>
-            <a:r>
-              <a:rPr sz="1050" b="0" i="0">
-                <a:solidFill>
-                  <a:srgbClr val="5D5A54"/>
-                </a:solidFill>
-                <a:latin typeface="Inter Tight"/>
-              </a:rPr>
-              <a:t>Butler, Lee and Gross, 2007, Emotion</a:t>
-            </a:r>
-          </a:p>
-        </p:txBody>
-      </p:sp>
-    </p:spTree>
-  </p:cSld>
-  <p:clrMapOvr>
-    <a:masterClrMapping/>
-  </p:clrMapOvr>
-</p:sld>
-</file>
-
-<file path=ppt/slides/slide5.xml><?xml version="1.0" encoding="utf-8"?>
-<p:sld xmlns:a="http://schemas.openxmlformats.org/drawingml/2006/main" xmlns:p="http://schemas.openxmlformats.org/presentationml/2006/main" xmlns:r="http://schemas.openxmlformats.org/officeDocument/2006/relationships">
-  <p:cSld>
-    <p:bg>
-      <p:bgPr>
-        <a:solidFill>
-          <a:srgbClr val="0B2D5B"/>
-        </a:solidFill>
-        <a:effectLst/>
-      </p:bgPr>
-    </p:bg>
-    <p:spTree>
-      <p:nvGrpSpPr>
-        <p:cNvPr id="1" name=""/>
-        <p:cNvGrpSpPr/>
-        <p:nvPr/>
-      </p:nvGrpSpPr>
-      <p:grpSpPr/>
-      <p:sp>
-        <p:nvSpPr>
-          <p:cNvPr id="2" name="Rectangle 1"/>
-          <p:cNvSpPr/>
-          <p:nvPr/>
-        </p:nvSpPr>
-        <p:spPr>
-          <a:xfrm>
-            <a:off x="548640" y="502920"/>
-            <a:ext cx="457200" cy="54864"/>
-          </a:xfrm>
-          <a:prstGeom prst="rect">
-            <a:avLst/>
-          </a:prstGeom>
-          <a:solidFill>
-            <a:srgbClr val="F47B20"/>
-          </a:solidFill>
-          <a:ln>
-            <a:noFill/>
-          </a:ln>
-          <a:effectLst/>
-        </p:spPr>
-        <p:style>
-          <a:lnRef idx="1">
-            <a:schemeClr val="accent1"/>
-          </a:lnRef>
-          <a:fillRef idx="3">
-            <a:schemeClr val="accent1"/>
-          </a:fillRef>
-          <a:effectRef idx="2">
-            <a:schemeClr val="accent1"/>
-          </a:effectRef>
-          <a:fontRef idx="minor">
-            <a:schemeClr val="lt1"/>
-          </a:fontRef>
-        </p:style>
-        <p:txBody>
-          <a:bodyPr rtlCol="0" anchor="ctr"/>
-          <a:lstStyle/>
-          <a:p>
-            <a:pPr algn="ctr"/>
-          </a:p>
-        </p:txBody>
-      </p:sp>
-      <p:sp>
-        <p:nvSpPr>
-          <p:cNvPr id="3" name="TextBox 2"/>
-          <p:cNvSpPr txBox="1"/>
-          <p:nvPr/>
-        </p:nvSpPr>
-        <p:spPr>
-          <a:xfrm>
-            <a:off x="1143000" y="393192"/>
-            <a:ext cx="8229600" cy="274320"/>
-          </a:xfrm>
-          <a:prstGeom prst="rect">
-            <a:avLst/>
-          </a:prstGeom>
-          <a:noFill/>
-        </p:spPr>
-        <p:txBody>
-          <a:bodyPr wrap="square" anchor="t" lIns="0" rIns="0" tIns="0" bIns="0">
-            <a:spAutoFit/>
-          </a:bodyPr>
-          <a:lstStyle/>
-          <a:p>
-            <a:pPr algn="l">
-              <a:spcAft>
-                <a:spcPts val="540"/>
-              </a:spcAft>
-            </a:pPr>
-            <a:r>
-              <a:rPr sz="1200" b="1" i="0">
-                <a:solidFill>
-                  <a:srgbClr val="5D5A54"/>
-                </a:solidFill>
-                <a:latin typeface="Inter Tight"/>
-              </a:rPr>
-              <a:t>ANGER IS INFORMATION</a:t>
-            </a:r>
-          </a:p>
-        </p:txBody>
-      </p:sp>
-      <p:sp>
-        <p:nvSpPr>
-          <p:cNvPr id="4" name="TextBox 3"/>
-          <p:cNvSpPr txBox="1"/>
-          <p:nvPr/>
-        </p:nvSpPr>
-        <p:spPr>
-          <a:xfrm>
-            <a:off x="8229600" y="6400800"/>
-            <a:ext cx="3410712" cy="274320"/>
-          </a:xfrm>
-          <a:prstGeom prst="rect">
-            <a:avLst/>
-          </a:prstGeom>
-          <a:noFill/>
-        </p:spPr>
-        <p:txBody>
-          <a:bodyPr wrap="square" anchor="t" lIns="0" rIns="0" tIns="0" bIns="0">
-            <a:spAutoFit/>
-          </a:bodyPr>
-          <a:lstStyle/>
-          <a:p>
-            <a:pPr algn="r">
-              <a:spcAft>
-                <a:spcPts val="450"/>
-              </a:spcAft>
-            </a:pPr>
-            <a:r>
-              <a:rPr sz="1000" b="0" i="0">
-                <a:solidFill>
-                  <a:srgbClr val="5D5A54"/>
-                </a:solidFill>
-                <a:latin typeface="Inter Tight"/>
-              </a:rPr>
-              <a:t>Beaver Counseling</a:t>
-            </a:r>
-          </a:p>
-        </p:txBody>
-      </p:sp>
-      <p:sp>
-        <p:nvSpPr>
-          <p:cNvPr id="5" name="TextBox 4"/>
-          <p:cNvSpPr txBox="1"/>
-          <p:nvPr/>
-        </p:nvSpPr>
-        <p:spPr>
-          <a:xfrm>
-            <a:off x="822960" y="2011680"/>
-            <a:ext cx="10515600" cy="1463040"/>
-          </a:xfrm>
-          <a:prstGeom prst="rect">
-            <a:avLst/>
-          </a:prstGeom>
-          <a:noFill/>
-        </p:spPr>
-        <p:txBody>
-          <a:bodyPr wrap="square" anchor="b" lIns="0" rIns="0" tIns="0" bIns="0">
-            <a:spAutoFit/>
-          </a:bodyPr>
-          <a:lstStyle/>
-          <a:p>
-            <a:pPr algn="l">
-              <a:spcAft>
-                <a:spcPts val="2700"/>
-              </a:spcAft>
-            </a:pPr>
-            <a:r>
-              <a:rPr sz="6000" b="1" i="0">
-                <a:solidFill>
-                  <a:srgbClr val="FFFFFF"/>
-                </a:solidFill>
-                <a:latin typeface="Source Serif 4"/>
-              </a:rPr>
-              <a:t>Anger Is Information</a:t>
-            </a:r>
-          </a:p>
-        </p:txBody>
-      </p:sp>
-      <p:sp>
-        <p:nvSpPr>
-          <p:cNvPr id="6" name="TextBox 5"/>
-          <p:cNvSpPr txBox="1"/>
-          <p:nvPr/>
-        </p:nvSpPr>
-        <p:spPr>
-          <a:xfrm>
-            <a:off x="822960" y="3611880"/>
-            <a:ext cx="10515600" cy="914400"/>
-          </a:xfrm>
-          <a:prstGeom prst="rect">
-            <a:avLst/>
-          </a:prstGeom>
-          <a:noFill/>
-        </p:spPr>
-        <p:txBody>
-          <a:bodyPr wrap="square" anchor="t" lIns="0" rIns="0" tIns="0" bIns="0">
-            <a:spAutoFit/>
-          </a:bodyPr>
-          <a:lstStyle/>
-          <a:p>
-            <a:pPr algn="l">
-              <a:spcAft>
-                <a:spcPts val="1080"/>
-              </a:spcAft>
-            </a:pPr>
-            <a:r>
-              <a:rPr sz="2400" b="0" i="1">
-                <a:solidFill>
-                  <a:srgbClr val="E8E4DA"/>
-                </a:solidFill>
-                <a:latin typeface="Source Serif 4"/>
-              </a:rPr>
-              <a:t>Usually right about the problem. Often wrong about the response.</a:t>
-            </a:r>
-          </a:p>
-        </p:txBody>
-      </p:sp>
-      <p:sp>
-        <p:nvSpPr>
-          <p:cNvPr id="7" name="TextBox 6"/>
-          <p:cNvSpPr txBox="1"/>
-          <p:nvPr/>
-        </p:nvSpPr>
-        <p:spPr>
-          <a:xfrm>
-            <a:off x="822960" y="6035040"/>
-            <a:ext cx="7315200" cy="365760"/>
-          </a:xfrm>
-          <a:prstGeom prst="rect">
-            <a:avLst/>
-          </a:prstGeom>
-          <a:noFill/>
-        </p:spPr>
-        <p:txBody>
-          <a:bodyPr wrap="square" anchor="t" lIns="0" rIns="0" tIns="0" bIns="0">
-            <a:spAutoFit/>
-          </a:bodyPr>
-          <a:lstStyle/>
-          <a:p>
-            <a:pPr algn="l">
-              <a:spcAft>
-                <a:spcPts val="585"/>
-              </a:spcAft>
-            </a:pPr>
-            <a:r>
-              <a:rPr sz="1300" b="0" i="0">
-                <a:solidFill>
-                  <a:srgbClr val="E8E4DA"/>
-                </a:solidFill>
-                <a:latin typeface="Inter Tight"/>
-              </a:rPr>
-              <a:t>Beaver Upper School · Counseling</a:t>
+              <a:t>Thumbs up for yes, down for no, sideways if you're not sure.</a:t>
             </a:r>
           </a:p>
         </p:txBody>
@@ -7582,7 +8206,7 @@
                 </a:solidFill>
                 <a:latin typeface="Inter Tight"/>
               </a:rPr>
-              <a:t>SOUND FAMILIAR?</a:t>
+              <a:t>THE CORE SKILL</a:t>
             </a:r>
           </a:p>
         </p:txBody>
@@ -7635,7 +8259,7 @@
         <p:spPr>
           <a:xfrm>
             <a:off x="822960" y="1005840"/>
-            <a:ext cx="10515600" cy="1097280"/>
+            <a:ext cx="10515600" cy="914400"/>
           </a:xfrm>
           <a:prstGeom prst="rect">
             <a:avLst/>
@@ -7650,31 +8274,479 @@
           <a:p>
             <a:pPr algn="l">
               <a:spcAft>
-                <a:spcPts val="1620"/>
-              </a:spcAft>
-            </a:pPr>
-            <a:r>
-              <a:rPr sz="3600" b="1" i="0">
+                <a:spcPts val="1530"/>
+              </a:spcAft>
+            </a:pPr>
+            <a:r>
+              <a:rPr sz="3400" b="1" i="0">
                 <a:solidFill>
                   <a:srgbClr val="1C1B19"/>
                 </a:solidFill>
                 <a:latin typeface="Source Serif 4"/>
               </a:rPr>
-              <a:t>Hand up if this has happened to you.</a:t>
-            </a:r>
-          </a:p>
-        </p:txBody>
-      </p:sp>
-      <p:sp>
-        <p:nvSpPr>
-          <p:cNvPr id="6" name="TextBox 5"/>
+              <a:t>Two things arrive at once. Handle them in order.</a:t>
+            </a:r>
+          </a:p>
+        </p:txBody>
+      </p:sp>
+      <p:sp>
+        <p:nvSpPr>
+          <p:cNvPr id="6" name="Rectangle 5"/>
+          <p:cNvSpPr/>
+          <p:nvPr/>
+        </p:nvSpPr>
+        <p:spPr>
+          <a:xfrm>
+            <a:off x="822960" y="2743200"/>
+            <a:ext cx="1874519" cy="1005840"/>
+          </a:xfrm>
+          <a:prstGeom prst="rect">
+            <a:avLst/>
+          </a:prstGeom>
+          <a:solidFill>
+            <a:srgbClr val="FFFFFF"/>
+          </a:solidFill>
+          <a:ln w="15875">
+            <a:solidFill>
+              <a:srgbClr val="0B2D5B"/>
+            </a:solidFill>
+          </a:ln>
+          <a:effectLst/>
+        </p:spPr>
+        <p:style>
+          <a:lnRef idx="1">
+            <a:schemeClr val="accent1"/>
+          </a:lnRef>
+          <a:fillRef idx="3">
+            <a:schemeClr val="accent1"/>
+          </a:fillRef>
+          <a:effectRef idx="2">
+            <a:schemeClr val="accent1"/>
+          </a:effectRef>
+          <a:fontRef idx="minor">
+            <a:schemeClr val="lt1"/>
+          </a:fontRef>
+        </p:style>
+        <p:txBody>
+          <a:bodyPr rtlCol="0" anchor="ctr"/>
+          <a:lstStyle/>
+          <a:p>
+            <a:pPr algn="ctr"/>
+          </a:p>
+        </p:txBody>
+      </p:sp>
+      <p:sp>
+        <p:nvSpPr>
+          <p:cNvPr id="7" name="TextBox 6"/>
           <p:cNvSpPr txBox="1"/>
           <p:nvPr/>
         </p:nvSpPr>
         <p:spPr>
           <a:xfrm>
-            <a:off x="822960" y="2057400"/>
-            <a:ext cx="548640" cy="804672"/>
+            <a:off x="822960" y="2743200"/>
+            <a:ext cx="1874519" cy="1005840"/>
+          </a:xfrm>
+          <a:prstGeom prst="rect">
+            <a:avLst/>
+          </a:prstGeom>
+          <a:noFill/>
+        </p:spPr>
+        <p:txBody>
+          <a:bodyPr wrap="square" anchor="ctr" lIns="0" rIns="0" tIns="0" bIns="0">
+            <a:spAutoFit/>
+          </a:bodyPr>
+          <a:lstStyle/>
+          <a:p>
+            <a:pPr algn="ctr">
+              <a:spcAft>
+                <a:spcPts val="900"/>
+              </a:spcAft>
+            </a:pPr>
+            <a:r>
+              <a:rPr sz="2000" b="1" i="0">
+                <a:solidFill>
+                  <a:srgbClr val="1C1B19"/>
+                </a:solidFill>
+                <a:latin typeface="Source Serif 4"/>
+              </a:rPr>
+              <a:t>Catch it early</a:t>
+            </a:r>
+          </a:p>
+        </p:txBody>
+      </p:sp>
+      <p:cxnSp>
+        <p:nvCxnSpPr>
+          <p:cNvPr id="8" name="Connector 7"/>
+          <p:cNvCxnSpPr/>
+          <p:nvPr/>
+        </p:nvCxnSpPr>
+        <p:spPr>
+          <a:xfrm>
+            <a:off x="2752344" y="3246120"/>
+            <a:ext cx="896112" cy="0"/>
+          </a:xfrm>
+          <a:prstGeom prst="line">
+            <a:avLst/>
+          </a:prstGeom>
+          <a:ln w="31750">
+            <a:solidFill>
+              <a:srgbClr val="F47B20"/>
+            </a:solidFill>
+            <a:tailEnd type="triangle"/>
+          </a:ln>
+        </p:spPr>
+        <p:style>
+          <a:lnRef idx="2">
+            <a:schemeClr val="accent1"/>
+          </a:lnRef>
+          <a:fillRef idx="0">
+            <a:schemeClr val="accent1"/>
+          </a:fillRef>
+          <a:effectRef idx="1">
+            <a:schemeClr val="accent1"/>
+          </a:effectRef>
+          <a:fontRef idx="minor">
+            <a:schemeClr val="tx1"/>
+          </a:fontRef>
+        </p:style>
+      </p:cxnSp>
+      <p:sp>
+        <p:nvSpPr>
+          <p:cNvPr id="9" name="Rectangle 8"/>
+          <p:cNvSpPr/>
+          <p:nvPr/>
+        </p:nvSpPr>
+        <p:spPr>
+          <a:xfrm>
+            <a:off x="3703320" y="2743200"/>
+            <a:ext cx="1874519" cy="1005840"/>
+          </a:xfrm>
+          <a:prstGeom prst="rect">
+            <a:avLst/>
+          </a:prstGeom>
+          <a:solidFill>
+            <a:srgbClr val="FFFFFF"/>
+          </a:solidFill>
+          <a:ln w="15875">
+            <a:solidFill>
+              <a:srgbClr val="0B2D5B"/>
+            </a:solidFill>
+          </a:ln>
+          <a:effectLst/>
+        </p:spPr>
+        <p:style>
+          <a:lnRef idx="1">
+            <a:schemeClr val="accent1"/>
+          </a:lnRef>
+          <a:fillRef idx="3">
+            <a:schemeClr val="accent1"/>
+          </a:fillRef>
+          <a:effectRef idx="2">
+            <a:schemeClr val="accent1"/>
+          </a:effectRef>
+          <a:fontRef idx="minor">
+            <a:schemeClr val="lt1"/>
+          </a:fontRef>
+        </p:style>
+        <p:txBody>
+          <a:bodyPr rtlCol="0" anchor="ctr"/>
+          <a:lstStyle/>
+          <a:p>
+            <a:pPr algn="ctr"/>
+          </a:p>
+        </p:txBody>
+      </p:sp>
+      <p:sp>
+        <p:nvSpPr>
+          <p:cNvPr id="10" name="TextBox 9"/>
+          <p:cNvSpPr txBox="1"/>
+          <p:nvPr/>
+        </p:nvSpPr>
+        <p:spPr>
+          <a:xfrm>
+            <a:off x="3703320" y="2743200"/>
+            <a:ext cx="1874519" cy="1005840"/>
+          </a:xfrm>
+          <a:prstGeom prst="rect">
+            <a:avLst/>
+          </a:prstGeom>
+          <a:noFill/>
+        </p:spPr>
+        <p:txBody>
+          <a:bodyPr wrap="square" anchor="ctr" lIns="0" rIns="0" tIns="0" bIns="0">
+            <a:spAutoFit/>
+          </a:bodyPr>
+          <a:lstStyle/>
+          <a:p>
+            <a:pPr algn="ctr">
+              <a:spcAft>
+                <a:spcPts val="900"/>
+              </a:spcAft>
+            </a:pPr>
+            <a:r>
+              <a:rPr sz="2000" b="1" i="0">
+                <a:solidFill>
+                  <a:srgbClr val="1C1B19"/>
+                </a:solidFill>
+                <a:latin typeface="Source Serif 4"/>
+              </a:rPr>
+              <a:t>Bring it down</a:t>
+            </a:r>
+          </a:p>
+        </p:txBody>
+      </p:sp>
+      <p:cxnSp>
+        <p:nvCxnSpPr>
+          <p:cNvPr id="11" name="Connector 10"/>
+          <p:cNvCxnSpPr/>
+          <p:nvPr/>
+        </p:nvCxnSpPr>
+        <p:spPr>
+          <a:xfrm>
+            <a:off x="5632704" y="3246120"/>
+            <a:ext cx="896112" cy="0"/>
+          </a:xfrm>
+          <a:prstGeom prst="line">
+            <a:avLst/>
+          </a:prstGeom>
+          <a:ln w="31750">
+            <a:solidFill>
+              <a:srgbClr val="F47B20"/>
+            </a:solidFill>
+            <a:tailEnd type="triangle"/>
+          </a:ln>
+        </p:spPr>
+        <p:style>
+          <a:lnRef idx="2">
+            <a:schemeClr val="accent1"/>
+          </a:lnRef>
+          <a:fillRef idx="0">
+            <a:schemeClr val="accent1"/>
+          </a:fillRef>
+          <a:effectRef idx="1">
+            <a:schemeClr val="accent1"/>
+          </a:effectRef>
+          <a:fontRef idx="minor">
+            <a:schemeClr val="tx1"/>
+          </a:fontRef>
+        </p:style>
+      </p:cxnSp>
+      <p:sp>
+        <p:nvSpPr>
+          <p:cNvPr id="12" name="Rectangle 11"/>
+          <p:cNvSpPr/>
+          <p:nvPr/>
+        </p:nvSpPr>
+        <p:spPr>
+          <a:xfrm>
+            <a:off x="6583680" y="2743200"/>
+            <a:ext cx="1874519" cy="1005840"/>
+          </a:xfrm>
+          <a:prstGeom prst="rect">
+            <a:avLst/>
+          </a:prstGeom>
+          <a:solidFill>
+            <a:srgbClr val="FFFFFF"/>
+          </a:solidFill>
+          <a:ln w="15875">
+            <a:solidFill>
+              <a:srgbClr val="0B2D5B"/>
+            </a:solidFill>
+          </a:ln>
+          <a:effectLst/>
+        </p:spPr>
+        <p:style>
+          <a:lnRef idx="1">
+            <a:schemeClr val="accent1"/>
+          </a:lnRef>
+          <a:fillRef idx="3">
+            <a:schemeClr val="accent1"/>
+          </a:fillRef>
+          <a:effectRef idx="2">
+            <a:schemeClr val="accent1"/>
+          </a:effectRef>
+          <a:fontRef idx="minor">
+            <a:schemeClr val="lt1"/>
+          </a:fontRef>
+        </p:style>
+        <p:txBody>
+          <a:bodyPr rtlCol="0" anchor="ctr"/>
+          <a:lstStyle/>
+          <a:p>
+            <a:pPr algn="ctr"/>
+          </a:p>
+        </p:txBody>
+      </p:sp>
+      <p:sp>
+        <p:nvSpPr>
+          <p:cNvPr id="13" name="TextBox 12"/>
+          <p:cNvSpPr txBox="1"/>
+          <p:nvPr/>
+        </p:nvSpPr>
+        <p:spPr>
+          <a:xfrm>
+            <a:off x="6583680" y="2743200"/>
+            <a:ext cx="1874519" cy="1005840"/>
+          </a:xfrm>
+          <a:prstGeom prst="rect">
+            <a:avLst/>
+          </a:prstGeom>
+          <a:noFill/>
+        </p:spPr>
+        <p:txBody>
+          <a:bodyPr wrap="square" anchor="ctr" lIns="0" rIns="0" tIns="0" bIns="0">
+            <a:spAutoFit/>
+          </a:bodyPr>
+          <a:lstStyle/>
+          <a:p>
+            <a:pPr algn="ctr">
+              <a:spcAft>
+                <a:spcPts val="900"/>
+              </a:spcAft>
+            </a:pPr>
+            <a:r>
+              <a:rPr sz="2000" b="1" i="0">
+                <a:solidFill>
+                  <a:srgbClr val="1C1B19"/>
+                </a:solidFill>
+                <a:latin typeface="Source Serif 4"/>
+              </a:rPr>
+              <a:t>Zoom out</a:t>
+            </a:r>
+          </a:p>
+        </p:txBody>
+      </p:sp>
+      <p:cxnSp>
+        <p:nvCxnSpPr>
+          <p:cNvPr id="14" name="Connector 13"/>
+          <p:cNvCxnSpPr/>
+          <p:nvPr/>
+        </p:nvCxnSpPr>
+        <p:spPr>
+          <a:xfrm>
+            <a:off x="8513064" y="3246120"/>
+            <a:ext cx="896112" cy="0"/>
+          </a:xfrm>
+          <a:prstGeom prst="line">
+            <a:avLst/>
+          </a:prstGeom>
+          <a:ln w="31750">
+            <a:solidFill>
+              <a:srgbClr val="F47B20"/>
+            </a:solidFill>
+            <a:tailEnd type="triangle"/>
+          </a:ln>
+        </p:spPr>
+        <p:style>
+          <a:lnRef idx="2">
+            <a:schemeClr val="accent1"/>
+          </a:lnRef>
+          <a:fillRef idx="0">
+            <a:schemeClr val="accent1"/>
+          </a:fillRef>
+          <a:effectRef idx="1">
+            <a:schemeClr val="accent1"/>
+          </a:effectRef>
+          <a:fontRef idx="minor">
+            <a:schemeClr val="tx1"/>
+          </a:fontRef>
+        </p:style>
+      </p:cxnSp>
+      <p:sp>
+        <p:nvSpPr>
+          <p:cNvPr id="15" name="Rectangle 14"/>
+          <p:cNvSpPr/>
+          <p:nvPr/>
+        </p:nvSpPr>
+        <p:spPr>
+          <a:xfrm>
+            <a:off x="9464040" y="2743200"/>
+            <a:ext cx="1874519" cy="1005840"/>
+          </a:xfrm>
+          <a:prstGeom prst="rect">
+            <a:avLst/>
+          </a:prstGeom>
+          <a:solidFill>
+            <a:srgbClr val="FFFFFF"/>
+          </a:solidFill>
+          <a:ln w="15875">
+            <a:solidFill>
+              <a:srgbClr val="0B2D5B"/>
+            </a:solidFill>
+          </a:ln>
+          <a:effectLst/>
+        </p:spPr>
+        <p:style>
+          <a:lnRef idx="1">
+            <a:schemeClr val="accent1"/>
+          </a:lnRef>
+          <a:fillRef idx="3">
+            <a:schemeClr val="accent1"/>
+          </a:fillRef>
+          <a:effectRef idx="2">
+            <a:schemeClr val="accent1"/>
+          </a:effectRef>
+          <a:fontRef idx="minor">
+            <a:schemeClr val="lt1"/>
+          </a:fontRef>
+        </p:style>
+        <p:txBody>
+          <a:bodyPr rtlCol="0" anchor="ctr"/>
+          <a:lstStyle/>
+          <a:p>
+            <a:pPr algn="ctr"/>
+          </a:p>
+        </p:txBody>
+      </p:sp>
+      <p:sp>
+        <p:nvSpPr>
+          <p:cNvPr id="16" name="TextBox 15"/>
+          <p:cNvSpPr txBox="1"/>
+          <p:nvPr/>
+        </p:nvSpPr>
+        <p:spPr>
+          <a:xfrm>
+            <a:off x="9464040" y="2743200"/>
+            <a:ext cx="1874519" cy="1005840"/>
+          </a:xfrm>
+          <a:prstGeom prst="rect">
+            <a:avLst/>
+          </a:prstGeom>
+          <a:noFill/>
+        </p:spPr>
+        <p:txBody>
+          <a:bodyPr wrap="square" anchor="ctr" lIns="0" rIns="0" tIns="0" bIns="0">
+            <a:spAutoFit/>
+          </a:bodyPr>
+          <a:lstStyle/>
+          <a:p>
+            <a:pPr algn="ctr">
+              <a:spcAft>
+                <a:spcPts val="900"/>
+              </a:spcAft>
+            </a:pPr>
+            <a:r>
+              <a:rPr sz="2000" b="1" i="0">
+                <a:solidFill>
+                  <a:srgbClr val="1C1B19"/>
+                </a:solidFill>
+                <a:latin typeface="Source Serif 4"/>
+              </a:rPr>
+              <a:t>Then decide</a:t>
+            </a:r>
+          </a:p>
+        </p:txBody>
+      </p:sp>
+      <p:sp>
+        <p:nvSpPr>
+          <p:cNvPr id="17" name="TextBox 16"/>
+          <p:cNvSpPr txBox="1"/>
+          <p:nvPr/>
+        </p:nvSpPr>
+        <p:spPr>
+          <a:xfrm>
+            <a:off x="822960" y="4160520"/>
+            <a:ext cx="10515600" cy="457200"/>
           </a:xfrm>
           <a:prstGeom prst="rect">
             <a:avLst/>
@@ -7687,33 +8759,33 @@
           </a:bodyPr>
           <a:lstStyle/>
           <a:p>
-            <a:pPr algn="l">
-              <a:spcAft>
-                <a:spcPts val="1170"/>
-              </a:spcAft>
-            </a:pPr>
-            <a:r>
-              <a:rPr sz="2600" b="1" i="0">
+            <a:pPr algn="ctr">
+              <a:spcAft>
+                <a:spcPts val="810"/>
+              </a:spcAft>
+            </a:pPr>
+            <a:r>
+              <a:rPr sz="1800" b="1" i="0">
                 <a:solidFill>
                   <a:srgbClr val="F47B20"/>
                 </a:solidFill>
-                <a:latin typeface="Source Serif 4"/>
-              </a:rPr>
-              <a:t>•</a:t>
-            </a:r>
-          </a:p>
-        </p:txBody>
-      </p:sp>
-      <p:sp>
-        <p:nvSpPr>
-          <p:cNvPr id="7" name="TextBox 6"/>
+                <a:latin typeface="Inter Tight"/>
+              </a:rPr>
+              <a:t>↺  and around again</a:t>
+            </a:r>
+          </a:p>
+        </p:txBody>
+      </p:sp>
+      <p:sp>
+        <p:nvSpPr>
+          <p:cNvPr id="18" name="TextBox 17"/>
           <p:cNvSpPr txBox="1"/>
           <p:nvPr/>
         </p:nvSpPr>
         <p:spPr>
           <a:xfrm>
-            <a:off x="1463040" y="2093976"/>
-            <a:ext cx="9875520" cy="804672"/>
+            <a:off x="822960" y="4846320"/>
+            <a:ext cx="10515600" cy="1188720"/>
           </a:xfrm>
           <a:prstGeom prst="rect">
             <a:avLst/>
@@ -7726,395 +8798,19 @@
           </a:bodyPr>
           <a:lstStyle/>
           <a:p>
-            <a:pPr algn="l">
-              <a:spcAft>
-                <a:spcPts val="945"/>
-              </a:spcAft>
-            </a:pPr>
-            <a:r>
-              <a:rPr sz="2100" b="1" i="0">
-                <a:solidFill>
-                  <a:srgbClr val="1C1B19"/>
+            <a:pPr algn="ctr">
+              <a:spcAft>
+                <a:spcPts val="900"/>
+              </a:spcAft>
+            </a:pPr>
+            <a:r>
+              <a:rPr sz="2000" b="0" i="1">
+                <a:solidFill>
+                  <a:srgbClr val="5D5A54"/>
                 </a:solidFill>
                 <a:latin typeface="Source Serif 4"/>
               </a:rPr>
-              <a:t>Your voice came out louder than you meant.</a:t>
-            </a:r>
-          </a:p>
-          <a:p>
-            <a:pPr algn="l">
-              <a:spcAft>
-                <a:spcPts val="945"/>
-              </a:spcAft>
-            </a:pPr>
-            <a:r>
-              <a:rPr sz="1600" b="0" i="0">
-                <a:solidFill>
-                  <a:srgbClr val="5D5A54"/>
-                </a:solidFill>
-                <a:latin typeface="Source Serif 4"/>
-              </a:rPr>
-              <a:t>Marked late when you weren't, for example.</a:t>
-            </a:r>
-          </a:p>
-        </p:txBody>
-      </p:sp>
-      <p:sp>
-        <p:nvSpPr>
-          <p:cNvPr id="8" name="TextBox 7"/>
-          <p:cNvSpPr txBox="1"/>
-          <p:nvPr/>
-        </p:nvSpPr>
-        <p:spPr>
-          <a:xfrm>
-            <a:off x="822960" y="2862072"/>
-            <a:ext cx="548640" cy="804672"/>
-          </a:xfrm>
-          <a:prstGeom prst="rect">
-            <a:avLst/>
-          </a:prstGeom>
-          <a:noFill/>
-        </p:spPr>
-        <p:txBody>
-          <a:bodyPr wrap="square" anchor="t" lIns="0" rIns="0" tIns="0" bIns="0">
-            <a:spAutoFit/>
-          </a:bodyPr>
-          <a:lstStyle/>
-          <a:p>
-            <a:pPr algn="l">
-              <a:spcAft>
-                <a:spcPts val="1170"/>
-              </a:spcAft>
-            </a:pPr>
-            <a:r>
-              <a:rPr sz="2600" b="1" i="0">
-                <a:solidFill>
-                  <a:srgbClr val="F47B20"/>
-                </a:solidFill>
-                <a:latin typeface="Source Serif 4"/>
-              </a:rPr>
-              <a:t>•</a:t>
-            </a:r>
-          </a:p>
-        </p:txBody>
-      </p:sp>
-      <p:sp>
-        <p:nvSpPr>
-          <p:cNvPr id="9" name="TextBox 8"/>
-          <p:cNvSpPr txBox="1"/>
-          <p:nvPr/>
-        </p:nvSpPr>
-        <p:spPr>
-          <a:xfrm>
-            <a:off x="1463040" y="2898648"/>
-            <a:ext cx="9875520" cy="804672"/>
-          </a:xfrm>
-          <a:prstGeom prst="rect">
-            <a:avLst/>
-          </a:prstGeom>
-          <a:noFill/>
-        </p:spPr>
-        <p:txBody>
-          <a:bodyPr wrap="square" anchor="t" lIns="0" rIns="0" tIns="0" bIns="0">
-            <a:spAutoFit/>
-          </a:bodyPr>
-          <a:lstStyle/>
-          <a:p>
-            <a:pPr algn="l">
-              <a:spcAft>
-                <a:spcPts val="945"/>
-              </a:spcAft>
-            </a:pPr>
-            <a:r>
-              <a:rPr sz="2100" b="1" i="0">
-                <a:solidFill>
-                  <a:srgbClr val="1C1B19"/>
-                </a:solidFill>
-                <a:latin typeface="Source Serif 4"/>
-              </a:rPr>
-              <a:t>You sent a reply in 40 seconds.</a:t>
-            </a:r>
-          </a:p>
-          <a:p>
-            <a:pPr algn="l">
-              <a:spcAft>
-                <a:spcPts val="945"/>
-              </a:spcAft>
-            </a:pPr>
-            <a:r>
-              <a:rPr sz="1600" b="0" i="0">
-                <a:solidFill>
-                  <a:srgbClr val="5D5A54"/>
-                </a:solidFill>
-                <a:latin typeface="Source Serif 4"/>
-              </a:rPr>
-              <a:t>Then spent two days cleaning it up.</a:t>
-            </a:r>
-          </a:p>
-        </p:txBody>
-      </p:sp>
-      <p:sp>
-        <p:nvSpPr>
-          <p:cNvPr id="10" name="TextBox 9"/>
-          <p:cNvSpPr txBox="1"/>
-          <p:nvPr/>
-        </p:nvSpPr>
-        <p:spPr>
-          <a:xfrm>
-            <a:off x="822960" y="3666744"/>
-            <a:ext cx="548640" cy="804672"/>
-          </a:xfrm>
-          <a:prstGeom prst="rect">
-            <a:avLst/>
-          </a:prstGeom>
-          <a:noFill/>
-        </p:spPr>
-        <p:txBody>
-          <a:bodyPr wrap="square" anchor="t" lIns="0" rIns="0" tIns="0" bIns="0">
-            <a:spAutoFit/>
-          </a:bodyPr>
-          <a:lstStyle/>
-          <a:p>
-            <a:pPr algn="l">
-              <a:spcAft>
-                <a:spcPts val="1170"/>
-              </a:spcAft>
-            </a:pPr>
-            <a:r>
-              <a:rPr sz="2600" b="1" i="0">
-                <a:solidFill>
-                  <a:srgbClr val="F47B20"/>
-                </a:solidFill>
-                <a:latin typeface="Source Serif 4"/>
-              </a:rPr>
-              <a:t>•</a:t>
-            </a:r>
-          </a:p>
-        </p:txBody>
-      </p:sp>
-      <p:sp>
-        <p:nvSpPr>
-          <p:cNvPr id="11" name="TextBox 10"/>
-          <p:cNvSpPr txBox="1"/>
-          <p:nvPr/>
-        </p:nvSpPr>
-        <p:spPr>
-          <a:xfrm>
-            <a:off x="1463040" y="3703320"/>
-            <a:ext cx="9875520" cy="804672"/>
-          </a:xfrm>
-          <a:prstGeom prst="rect">
-            <a:avLst/>
-          </a:prstGeom>
-          <a:noFill/>
-        </p:spPr>
-        <p:txBody>
-          <a:bodyPr wrap="square" anchor="t" lIns="0" rIns="0" tIns="0" bIns="0">
-            <a:spAutoFit/>
-          </a:bodyPr>
-          <a:lstStyle/>
-          <a:p>
-            <a:pPr algn="l">
-              <a:spcAft>
-                <a:spcPts val="945"/>
-              </a:spcAft>
-            </a:pPr>
-            <a:r>
-              <a:rPr sz="2100" b="1" i="0">
-                <a:solidFill>
-                  <a:srgbClr val="1C1B19"/>
-                </a:solidFill>
-                <a:latin typeface="Source Serif 4"/>
-              </a:rPr>
-              <a:t>"Watch your tone."</a:t>
-            </a:r>
-          </a:p>
-          <a:p>
-            <a:pPr algn="l">
-              <a:spcAft>
-                <a:spcPts val="945"/>
-              </a:spcAft>
-            </a:pPr>
-            <a:r>
-              <a:rPr sz="1600" b="0" i="0">
-                <a:solidFill>
-                  <a:srgbClr val="5D5A54"/>
-                </a:solidFill>
-                <a:latin typeface="Source Serif 4"/>
-              </a:rPr>
-              <a:t>Now the argument is about your tone, not the curfew.</a:t>
-            </a:r>
-          </a:p>
-        </p:txBody>
-      </p:sp>
-      <p:sp>
-        <p:nvSpPr>
-          <p:cNvPr id="12" name="TextBox 11"/>
-          <p:cNvSpPr txBox="1"/>
-          <p:nvPr/>
-        </p:nvSpPr>
-        <p:spPr>
-          <a:xfrm>
-            <a:off x="822960" y="4471416"/>
-            <a:ext cx="548640" cy="804672"/>
-          </a:xfrm>
-          <a:prstGeom prst="rect">
-            <a:avLst/>
-          </a:prstGeom>
-          <a:noFill/>
-        </p:spPr>
-        <p:txBody>
-          <a:bodyPr wrap="square" anchor="t" lIns="0" rIns="0" tIns="0" bIns="0">
-            <a:spAutoFit/>
-          </a:bodyPr>
-          <a:lstStyle/>
-          <a:p>
-            <a:pPr algn="l">
-              <a:spcAft>
-                <a:spcPts val="1170"/>
-              </a:spcAft>
-            </a:pPr>
-            <a:r>
-              <a:rPr sz="2600" b="1" i="0">
-                <a:solidFill>
-                  <a:srgbClr val="F47B20"/>
-                </a:solidFill>
-                <a:latin typeface="Source Serif 4"/>
-              </a:rPr>
-              <a:t>•</a:t>
-            </a:r>
-          </a:p>
-        </p:txBody>
-      </p:sp>
-      <p:sp>
-        <p:nvSpPr>
-          <p:cNvPr id="13" name="TextBox 12"/>
-          <p:cNvSpPr txBox="1"/>
-          <p:nvPr/>
-        </p:nvSpPr>
-        <p:spPr>
-          <a:xfrm>
-            <a:off x="1463040" y="4507992"/>
-            <a:ext cx="9875520" cy="804672"/>
-          </a:xfrm>
-          <a:prstGeom prst="rect">
-            <a:avLst/>
-          </a:prstGeom>
-          <a:noFill/>
-        </p:spPr>
-        <p:txBody>
-          <a:bodyPr wrap="square" anchor="t" lIns="0" rIns="0" tIns="0" bIns="0">
-            <a:spAutoFit/>
-          </a:bodyPr>
-          <a:lstStyle/>
-          <a:p>
-            <a:pPr algn="l">
-              <a:spcAft>
-                <a:spcPts val="945"/>
-              </a:spcAft>
-            </a:pPr>
-            <a:r>
-              <a:rPr sz="2100" b="1" i="0">
-                <a:solidFill>
-                  <a:srgbClr val="1C1B19"/>
-                </a:solidFill>
-                <a:latin typeface="Source Serif 4"/>
-              </a:rPr>
-              <a:t>A clip built to make people furious worked.</a:t>
-            </a:r>
-          </a:p>
-          <a:p>
-            <a:pPr algn="l">
-              <a:spcAft>
-                <a:spcPts val="945"/>
-              </a:spcAft>
-            </a:pPr>
-            <a:r>
-              <a:rPr sz="1600" b="0" i="0">
-                <a:solidFill>
-                  <a:srgbClr val="5D5A54"/>
-                </a:solidFill>
-                <a:latin typeface="Source Serif 4"/>
-              </a:rPr>
-              <a:t>For an hour.</a:t>
-            </a:r>
-          </a:p>
-        </p:txBody>
-      </p:sp>
-      <p:sp>
-        <p:nvSpPr>
-          <p:cNvPr id="14" name="TextBox 13"/>
-          <p:cNvSpPr txBox="1"/>
-          <p:nvPr/>
-        </p:nvSpPr>
-        <p:spPr>
-          <a:xfrm>
-            <a:off x="822960" y="5276088"/>
-            <a:ext cx="548640" cy="804672"/>
-          </a:xfrm>
-          <a:prstGeom prst="rect">
-            <a:avLst/>
-          </a:prstGeom>
-          <a:noFill/>
-        </p:spPr>
-        <p:txBody>
-          <a:bodyPr wrap="square" anchor="t" lIns="0" rIns="0" tIns="0" bIns="0">
-            <a:spAutoFit/>
-          </a:bodyPr>
-          <a:lstStyle/>
-          <a:p>
-            <a:pPr algn="l">
-              <a:spcAft>
-                <a:spcPts val="1170"/>
-              </a:spcAft>
-            </a:pPr>
-            <a:r>
-              <a:rPr sz="2600" b="1" i="0">
-                <a:solidFill>
-                  <a:srgbClr val="F47B20"/>
-                </a:solidFill>
-                <a:latin typeface="Source Serif 4"/>
-              </a:rPr>
-              <a:t>•</a:t>
-            </a:r>
-          </a:p>
-        </p:txBody>
-      </p:sp>
-      <p:sp>
-        <p:nvSpPr>
-          <p:cNvPr id="15" name="TextBox 14"/>
-          <p:cNvSpPr txBox="1"/>
-          <p:nvPr/>
-        </p:nvSpPr>
-        <p:spPr>
-          <a:xfrm>
-            <a:off x="1463040" y="5312664"/>
-            <a:ext cx="9875520" cy="804672"/>
-          </a:xfrm>
-          <a:prstGeom prst="rect">
-            <a:avLst/>
-          </a:prstGeom>
-          <a:noFill/>
-        </p:spPr>
-        <p:txBody>
-          <a:bodyPr wrap="square" anchor="t" lIns="0" rIns="0" tIns="0" bIns="0">
-            <a:spAutoFit/>
-          </a:bodyPr>
-          <a:lstStyle/>
-          <a:p>
-            <a:pPr algn="l">
-              <a:spcAft>
-                <a:spcPts val="945"/>
-              </a:spcAft>
-            </a:pPr>
-            <a:r>
-              <a:rPr sz="2100" b="1" i="0">
-                <a:solidFill>
-                  <a:srgbClr val="1C1B19"/>
-                </a:solidFill>
-                <a:latin typeface="Source Serif 4"/>
-              </a:rPr>
-              <a:t>Calm all day at school, then you come apart at home.</a:t>
+              <a:t>Anger brings information (a line got crossed) and energy (a body ready to fight).</a:t>
             </a:r>
           </a:p>
         </p:txBody>
@@ -8223,7 +8919,7 @@
                 </a:solidFill>
                 <a:latin typeface="Inter Tight"/>
               </a:rPr>
-              <a:t>WHAT HAPPENS IN YOUR BRAIN</a:t>
+              <a:t>THREE SITUATIONS</a:t>
             </a:r>
           </a:p>
         </p:txBody>
@@ -8301,7 +8997,7 @@
                 </a:solidFill>
                 <a:latin typeface="Source Serif 4"/>
               </a:rPr>
-              <a:t>A fast alarm, and slower brakes</a:t>
+              <a:t>Stand up without blowing up.</a:t>
             </a:r>
           </a:p>
         </p:txBody>
@@ -8315,7 +9011,7 @@
         <p:spPr>
           <a:xfrm>
             <a:off x="822960" y="2103120"/>
-            <a:ext cx="5120640" cy="3931920"/>
+            <a:ext cx="3322320" cy="3840480"/>
           </a:xfrm>
           <a:prstGeom prst="rect">
             <a:avLst/>
@@ -8360,8 +9056,8 @@
         </p:nvSpPr>
         <p:spPr>
           <a:xfrm>
-            <a:off x="1097280" y="2286000"/>
-            <a:ext cx="4572000" cy="457200"/>
+            <a:off x="1051560" y="2286000"/>
+            <a:ext cx="2865120" cy="365760"/>
           </a:xfrm>
           <a:prstGeom prst="rect">
             <a:avLst/>
@@ -8386,7 +9082,7 @@
                 </a:solidFill>
                 <a:latin typeface="Inter Tight"/>
               </a:rPr>
-              <a:t>THE ALARM (FAST)</a:t>
+              <a:t>INES</a:t>
             </a:r>
           </a:p>
         </p:txBody>
@@ -8399,8 +9095,8 @@
         </p:nvSpPr>
         <p:spPr>
           <a:xfrm>
-            <a:off x="1097280" y="2788920"/>
-            <a:ext cx="4572000" cy="3108960"/>
+            <a:off x="1051560" y="2743200"/>
+            <a:ext cx="2865120" cy="3017520"/>
           </a:xfrm>
           <a:prstGeom prst="rect">
             <a:avLst/>
@@ -8415,65 +9111,17 @@
           <a:p>
             <a:pPr algn="l">
               <a:spcAft>
-                <a:spcPts val="855"/>
-              </a:spcAft>
-            </a:pPr>
-            <a:r>
-              <a:rPr sz="1900" b="0" i="0">
+                <a:spcPts val="810"/>
+              </a:spcAft>
+            </a:pPr>
+            <a:r>
+              <a:rPr sz="1800" b="0" i="0">
                 <a:solidFill>
                   <a:srgbClr val="1C1B19"/>
                 </a:solidFill>
                 <a:latin typeface="Source Serif 4"/>
               </a:rPr>
-              <a:t>Spots an insult or something unfair</a:t>
-            </a:r>
-          </a:p>
-          <a:p>
-            <a:pPr algn="l">
-              <a:spcAft>
-                <a:spcPts val="855"/>
-              </a:spcAft>
-            </a:pPr>
-            <a:r>
-              <a:rPr sz="1900" b="0" i="0">
-                <a:solidFill>
-                  <a:srgbClr val="1C1B19"/>
-                </a:solidFill>
-                <a:latin typeface="Source Serif 4"/>
-              </a:rPr>
-              <a:t>Heart speeds up, face gets hot</a:t>
-            </a:r>
-          </a:p>
-          <a:p>
-            <a:pPr algn="l">
-              <a:spcAft>
-                <a:spcPts val="855"/>
-              </a:spcAft>
-            </a:pPr>
-            <a:r>
-              <a:rPr sz="1900" b="0" i="0">
-                <a:solidFill>
-                  <a:srgbClr val="1C1B19"/>
-                </a:solidFill>
-                <a:latin typeface="Source Serif 4"/>
-              </a:rPr>
-              <a:t>Muscles tighten, ready to push back</a:t>
-            </a:r>
-          </a:p>
-          <a:p>
-            <a:pPr algn="l">
-              <a:spcAft>
-                <a:spcPts val="855"/>
-              </a:spcAft>
-            </a:pPr>
-            <a:r>
-              <a:rPr sz="1900" b="0" i="0">
-                <a:solidFill>
-                  <a:srgbClr val="1C1B19"/>
-                </a:solidFill>
-                <a:latin typeface="Source Serif 4"/>
-              </a:rPr>
-              <a:t>Often before you've thought it through</a:t>
+              <a:t>Asked off from her weekend job weeks ago. Her manager scheduled her anyway, then said, "You should have reminded me."</a:t>
             </a:r>
           </a:p>
         </p:txBody>
@@ -8486,8 +9134,8 @@
         </p:nvSpPr>
         <p:spPr>
           <a:xfrm>
-            <a:off x="6309360" y="2103120"/>
-            <a:ext cx="5120640" cy="3931920"/>
+            <a:off x="4419600" y="2103120"/>
+            <a:ext cx="3322320" cy="3840480"/>
           </a:xfrm>
           <a:prstGeom prst="rect">
             <a:avLst/>
@@ -8532,8 +9180,8 @@
         </p:nvSpPr>
         <p:spPr>
           <a:xfrm>
-            <a:off x="6583680" y="2286000"/>
-            <a:ext cx="4572000" cy="457200"/>
+            <a:off x="4648200" y="2286000"/>
+            <a:ext cx="2865120" cy="365760"/>
           </a:xfrm>
           <a:prstGeom prst="rect">
             <a:avLst/>
@@ -8558,7 +9206,7 @@
                 </a:solidFill>
                 <a:latin typeface="Inter Tight"/>
               </a:rPr>
-              <a:t>THE BRAKES (SLOWER)</a:t>
+              <a:t>KOFI</a:t>
             </a:r>
           </a:p>
         </p:txBody>
@@ -8571,8 +9219,8 @@
         </p:nvSpPr>
         <p:spPr>
           <a:xfrm>
-            <a:off x="6583680" y="2788920"/>
-            <a:ext cx="4572000" cy="3108960"/>
+            <a:off x="4648200" y="2743200"/>
+            <a:ext cx="2865120" cy="3017520"/>
           </a:xfrm>
           <a:prstGeom prst="rect">
             <a:avLst/>
@@ -8587,65 +9235,141 @@
           <a:p>
             <a:pPr algn="l">
               <a:spcAft>
-                <a:spcPts val="855"/>
-              </a:spcAft>
-            </a:pPr>
-            <a:r>
-              <a:rPr sz="1900" b="0" i="0">
+                <a:spcPts val="810"/>
+              </a:spcAft>
+            </a:pPr>
+            <a:r>
+              <a:rPr sz="1800" b="0" i="0">
                 <a:solidFill>
                   <a:srgbClr val="1C1B19"/>
                 </a:solidFill>
                 <a:latin typeface="Source Serif 4"/>
               </a:rPr>
-              <a:t>Reads context: is this a real threat?</a:t>
-            </a:r>
-          </a:p>
-          <a:p>
-            <a:pPr algn="l">
-              <a:spcAft>
-                <a:spcPts val="855"/>
-              </a:spcAft>
-            </a:pPr>
-            <a:r>
-              <a:rPr sz="1900" b="0" i="0">
+              <a:t>In a class discussion, a classmate makes a comment about his neighborhood. A few people laugh.</a:t>
+            </a:r>
+          </a:p>
+        </p:txBody>
+      </p:sp>
+      <p:sp>
+        <p:nvSpPr>
+          <p:cNvPr id="12" name="Rectangle 11"/>
+          <p:cNvSpPr/>
+          <p:nvPr/>
+        </p:nvSpPr>
+        <p:spPr>
+          <a:xfrm>
+            <a:off x="8016239" y="2103120"/>
+            <a:ext cx="3322320" cy="3840480"/>
+          </a:xfrm>
+          <a:prstGeom prst="rect">
+            <a:avLst/>
+          </a:prstGeom>
+          <a:solidFill>
+            <a:srgbClr val="FFFFFF"/>
+          </a:solidFill>
+          <a:ln w="15875">
+            <a:solidFill>
+              <a:srgbClr val="D8D2C6"/>
+            </a:solidFill>
+          </a:ln>
+          <a:effectLst/>
+        </p:spPr>
+        <p:style>
+          <a:lnRef idx="1">
+            <a:schemeClr val="accent1"/>
+          </a:lnRef>
+          <a:fillRef idx="3">
+            <a:schemeClr val="accent1"/>
+          </a:fillRef>
+          <a:effectRef idx="2">
+            <a:schemeClr val="accent1"/>
+          </a:effectRef>
+          <a:fontRef idx="minor">
+            <a:schemeClr val="lt1"/>
+          </a:fontRef>
+        </p:style>
+        <p:txBody>
+          <a:bodyPr rtlCol="0" anchor="ctr"/>
+          <a:lstStyle/>
+          <a:p>
+            <a:pPr algn="ctr"/>
+          </a:p>
+        </p:txBody>
+      </p:sp>
+      <p:sp>
+        <p:nvSpPr>
+          <p:cNvPr id="13" name="TextBox 12"/>
+          <p:cNvSpPr txBox="1"/>
+          <p:nvPr/>
+        </p:nvSpPr>
+        <p:spPr>
+          <a:xfrm>
+            <a:off x="8244839" y="2286000"/>
+            <a:ext cx="2865120" cy="365760"/>
+          </a:xfrm>
+          <a:prstGeom prst="rect">
+            <a:avLst/>
+          </a:prstGeom>
+          <a:noFill/>
+        </p:spPr>
+        <p:txBody>
+          <a:bodyPr wrap="square" anchor="t" lIns="0" rIns="0" tIns="0" bIns="0">
+            <a:spAutoFit/>
+          </a:bodyPr>
+          <a:lstStyle/>
+          <a:p>
+            <a:pPr algn="l">
+              <a:spcAft>
+                <a:spcPts val="585"/>
+              </a:spcAft>
+            </a:pPr>
+            <a:r>
+              <a:rPr sz="1300" b="1" i="0">
+                <a:solidFill>
+                  <a:srgbClr val="0B2D5B"/>
+                </a:solidFill>
+                <a:latin typeface="Inter Tight"/>
+              </a:rPr>
+              <a:t>SAM</a:t>
+            </a:r>
+          </a:p>
+        </p:txBody>
+      </p:sp>
+      <p:sp>
+        <p:nvSpPr>
+          <p:cNvPr id="14" name="TextBox 13"/>
+          <p:cNvSpPr txBox="1"/>
+          <p:nvPr/>
+        </p:nvSpPr>
+        <p:spPr>
+          <a:xfrm>
+            <a:off x="8244839" y="2743200"/>
+            <a:ext cx="2865120" cy="3017520"/>
+          </a:xfrm>
+          <a:prstGeom prst="rect">
+            <a:avLst/>
+          </a:prstGeom>
+          <a:noFill/>
+        </p:spPr>
+        <p:txBody>
+          <a:bodyPr wrap="square" anchor="t" lIns="0" rIns="0" tIns="0" bIns="0">
+            <a:spAutoFit/>
+          </a:bodyPr>
+          <a:lstStyle/>
+          <a:p>
+            <a:pPr algn="l">
+              <a:spcAft>
+                <a:spcPts val="810"/>
+              </a:spcAft>
+            </a:pPr>
+            <a:r>
+              <a:rPr sz="1800" b="0" i="0">
                 <a:solidFill>
                   <a:srgbClr val="1C1B19"/>
                 </a:solidFill>
                 <a:latin typeface="Source Serif 4"/>
               </a:rPr>
-              <a:t>Asks what reacting will cost</a:t>
-            </a:r>
-          </a:p>
-          <a:p>
-            <a:pPr algn="l">
-              <a:spcAft>
-                <a:spcPts val="855"/>
-              </a:spcAft>
-            </a:pPr>
-            <a:r>
-              <a:rPr sz="1900" b="0" i="0">
-                <a:solidFill>
-                  <a:srgbClr val="1C1B19"/>
-                </a:solidFill>
-                <a:latin typeface="Source Serif 4"/>
-              </a:rPr>
-              <a:t>Can turn the alarm down</a:t>
-            </a:r>
-          </a:p>
-          <a:p>
-            <a:pPr algn="l">
-              <a:spcAft>
-                <a:spcPts val="855"/>
-              </a:spcAft>
-            </a:pPr>
-            <a:r>
-              <a:rPr sz="1900" b="0" i="0">
-                <a:solidFill>
-                  <a:srgbClr val="1C1B19"/>
-                </a:solidFill>
-                <a:latin typeface="Source Serif 4"/>
-              </a:rPr>
-              <a:t>Weaker when tired, hungry or flooded</a:t>
+              <a:t>Finds out his grandmother, who he lives with, has been reading his messages without asking. He's furious.</a:t>
             </a:r>
           </a:p>
         </p:txBody>
@@ -8754,7 +9478,7 @@
                 </a:solidFill>
                 <a:latin typeface="Inter Tight"/>
               </a:rPr>
-              <a:t>QUICK VOTE</a:t>
+              <a:t>PRIVATE REFLECTION</a:t>
             </a:r>
           </a:p>
         </p:txBody>
@@ -8876,7 +9600,7 @@
                 </a:solidFill>
                 <a:latin typeface="Source Serif 4"/>
               </a:rPr>
-              <a:t>Does hitting a punching bag help anger drain out?</a:t>
+              <a:t>Your last big blowup: what was underneath?</a:t>
             </a:r>
           </a:p>
         </p:txBody>
@@ -8915,7 +9639,7 @@
                 </a:solidFill>
                 <a:latin typeface="Inter Tight"/>
               </a:rPr>
-              <a:t>Thumbs up for yes, down for no, sideways if you're not sure.</a:t>
+              <a:t>Hurt, embarrassed, left out, scared, controlled, exhausted? On your card, just for you.</a:t>
             </a:r>
           </a:p>
         </p:txBody>
@@ -9024,7 +9748,7 @@
                 </a:solidFill>
                 <a:latin typeface="Inter Tight"/>
               </a:rPr>
-              <a:t>THE CORE SKILL</a:t>
+              <a:t>BEFORE YOU GO</a:t>
             </a:r>
           </a:p>
         </p:txBody>
@@ -9076,7 +9800,7 @@
         </p:nvSpPr>
         <p:spPr>
           <a:xfrm>
-            <a:off x="822960" y="1005840"/>
+            <a:off x="822960" y="1188720"/>
             <a:ext cx="10515600" cy="914400"/>
           </a:xfrm>
           <a:prstGeom prst="rect">
@@ -9092,31 +9816,70 @@
           <a:p>
             <a:pPr algn="l">
               <a:spcAft>
-                <a:spcPts val="1530"/>
-              </a:spcAft>
-            </a:pPr>
-            <a:r>
-              <a:rPr sz="3400" b="1" i="0">
+                <a:spcPts val="1620"/>
+              </a:spcAft>
+            </a:pPr>
+            <a:r>
+              <a:rPr sz="3600" b="1" i="0">
                 <a:solidFill>
                   <a:srgbClr val="1C1B19"/>
                 </a:solidFill>
                 <a:latin typeface="Source Serif 4"/>
               </a:rPr>
-              <a:t>Two things arrive at once. Handle them in order.</a:t>
-            </a:r>
-          </a:p>
-        </p:txBody>
-      </p:sp>
-      <p:sp>
-        <p:nvSpPr>
-          <p:cNvPr id="6" name="Rectangle 5"/>
+              <a:t>One move</a:t>
+            </a:r>
+          </a:p>
+        </p:txBody>
+      </p:sp>
+      <p:sp>
+        <p:nvSpPr>
+          <p:cNvPr id="6" name="TextBox 5"/>
+          <p:cNvSpPr txBox="1"/>
+          <p:nvPr/>
+        </p:nvSpPr>
+        <p:spPr>
+          <a:xfrm>
+            <a:off x="822960" y="2286000"/>
+            <a:ext cx="10515600" cy="1463040"/>
+          </a:xfrm>
+          <a:prstGeom prst="rect">
+            <a:avLst/>
+          </a:prstGeom>
+          <a:noFill/>
+        </p:spPr>
+        <p:txBody>
+          <a:bodyPr wrap="square" anchor="t" lIns="0" rIns="0" tIns="0" bIns="0">
+            <a:spAutoFit/>
+          </a:bodyPr>
+          <a:lstStyle/>
+          <a:p>
+            <a:pPr algn="l">
+              <a:spcAft>
+                <a:spcPts val="1080"/>
+              </a:spcAft>
+            </a:pPr>
+            <a:r>
+              <a:rPr sz="2400" b="0" i="0">
+                <a:solidFill>
+                  <a:srgbClr val="1C1B19"/>
+                </a:solidFill>
+                <a:latin typeface="Source Serif 4"/>
+              </a:rPr>
+              <a:t>Next time it hits a 7, what will you try first? Long exhales, cold water, a walk, a time-out, or the fly on the wall.</a:t>
+            </a:r>
+          </a:p>
+        </p:txBody>
+      </p:sp>
+      <p:sp>
+        <p:nvSpPr>
+          <p:cNvPr id="7" name="Rectangle 6"/>
           <p:cNvSpPr/>
           <p:nvPr/>
         </p:nvSpPr>
         <p:spPr>
           <a:xfrm>
-            <a:off x="822960" y="2743200"/>
-            <a:ext cx="1874519" cy="1005840"/>
+            <a:off x="822960" y="4023360"/>
+            <a:ext cx="10515600" cy="1371600"/>
           </a:xfrm>
           <a:prstGeom prst="rect">
             <a:avLst/>
@@ -9126,7 +9889,7 @@
           </a:solidFill>
           <a:ln w="15875">
             <a:solidFill>
-              <a:srgbClr val="0B2D5B"/>
+              <a:srgbClr val="1C1B19"/>
             </a:solidFill>
           </a:ln>
           <a:effectLst/>
@@ -9155,416 +9918,14 @@
       </p:sp>
       <p:sp>
         <p:nvSpPr>
-          <p:cNvPr id="7" name="TextBox 6"/>
+          <p:cNvPr id="8" name="TextBox 7"/>
           <p:cNvSpPr txBox="1"/>
           <p:nvPr/>
         </p:nvSpPr>
         <p:spPr>
           <a:xfrm>
-            <a:off x="822960" y="2743200"/>
-            <a:ext cx="1874519" cy="1005840"/>
-          </a:xfrm>
-          <a:prstGeom prst="rect">
-            <a:avLst/>
-          </a:prstGeom>
-          <a:noFill/>
-        </p:spPr>
-        <p:txBody>
-          <a:bodyPr wrap="square" anchor="ctr" lIns="0" rIns="0" tIns="0" bIns="0">
-            <a:spAutoFit/>
-          </a:bodyPr>
-          <a:lstStyle/>
-          <a:p>
-            <a:pPr algn="ctr">
-              <a:spcAft>
-                <a:spcPts val="900"/>
-              </a:spcAft>
-            </a:pPr>
-            <a:r>
-              <a:rPr sz="2000" b="1" i="0">
-                <a:solidFill>
-                  <a:srgbClr val="1C1B19"/>
-                </a:solidFill>
-                <a:latin typeface="Source Serif 4"/>
-              </a:rPr>
-              <a:t>Catch it early</a:t>
-            </a:r>
-          </a:p>
-        </p:txBody>
-      </p:sp>
-      <p:cxnSp>
-        <p:nvCxnSpPr>
-          <p:cNvPr id="8" name="Connector 7"/>
-          <p:cNvCxnSpPr/>
-          <p:nvPr/>
-        </p:nvCxnSpPr>
-        <p:spPr>
-          <a:xfrm>
-            <a:off x="2752344" y="3246120"/>
-            <a:ext cx="896112" cy="0"/>
-          </a:xfrm>
-          <a:prstGeom prst="line">
-            <a:avLst/>
-          </a:prstGeom>
-          <a:ln w="31750">
-            <a:solidFill>
-              <a:srgbClr val="F47B20"/>
-            </a:solidFill>
-            <a:tailEnd type="triangle"/>
-          </a:ln>
-        </p:spPr>
-        <p:style>
-          <a:lnRef idx="2">
-            <a:schemeClr val="accent1"/>
-          </a:lnRef>
-          <a:fillRef idx="0">
-            <a:schemeClr val="accent1"/>
-          </a:fillRef>
-          <a:effectRef idx="1">
-            <a:schemeClr val="accent1"/>
-          </a:effectRef>
-          <a:fontRef idx="minor">
-            <a:schemeClr val="tx1"/>
-          </a:fontRef>
-        </p:style>
-      </p:cxnSp>
-      <p:sp>
-        <p:nvSpPr>
-          <p:cNvPr id="9" name="Rectangle 8"/>
-          <p:cNvSpPr/>
-          <p:nvPr/>
-        </p:nvSpPr>
-        <p:spPr>
-          <a:xfrm>
-            <a:off x="3703320" y="2743200"/>
-            <a:ext cx="1874519" cy="1005840"/>
-          </a:xfrm>
-          <a:prstGeom prst="rect">
-            <a:avLst/>
-          </a:prstGeom>
-          <a:solidFill>
-            <a:srgbClr val="FFFFFF"/>
-          </a:solidFill>
-          <a:ln w="15875">
-            <a:solidFill>
-              <a:srgbClr val="0B2D5B"/>
-            </a:solidFill>
-          </a:ln>
-          <a:effectLst/>
-        </p:spPr>
-        <p:style>
-          <a:lnRef idx="1">
-            <a:schemeClr val="accent1"/>
-          </a:lnRef>
-          <a:fillRef idx="3">
-            <a:schemeClr val="accent1"/>
-          </a:fillRef>
-          <a:effectRef idx="2">
-            <a:schemeClr val="accent1"/>
-          </a:effectRef>
-          <a:fontRef idx="minor">
-            <a:schemeClr val="lt1"/>
-          </a:fontRef>
-        </p:style>
-        <p:txBody>
-          <a:bodyPr rtlCol="0" anchor="ctr"/>
-          <a:lstStyle/>
-          <a:p>
-            <a:pPr algn="ctr"/>
-          </a:p>
-        </p:txBody>
-      </p:sp>
-      <p:sp>
-        <p:nvSpPr>
-          <p:cNvPr id="10" name="TextBox 9"/>
-          <p:cNvSpPr txBox="1"/>
-          <p:nvPr/>
-        </p:nvSpPr>
-        <p:spPr>
-          <a:xfrm>
-            <a:off x="3703320" y="2743200"/>
-            <a:ext cx="1874519" cy="1005840"/>
-          </a:xfrm>
-          <a:prstGeom prst="rect">
-            <a:avLst/>
-          </a:prstGeom>
-          <a:noFill/>
-        </p:spPr>
-        <p:txBody>
-          <a:bodyPr wrap="square" anchor="ctr" lIns="0" rIns="0" tIns="0" bIns="0">
-            <a:spAutoFit/>
-          </a:bodyPr>
-          <a:lstStyle/>
-          <a:p>
-            <a:pPr algn="ctr">
-              <a:spcAft>
-                <a:spcPts val="900"/>
-              </a:spcAft>
-            </a:pPr>
-            <a:r>
-              <a:rPr sz="2000" b="1" i="0">
-                <a:solidFill>
-                  <a:srgbClr val="1C1B19"/>
-                </a:solidFill>
-                <a:latin typeface="Source Serif 4"/>
-              </a:rPr>
-              <a:t>Bring it down</a:t>
-            </a:r>
-          </a:p>
-        </p:txBody>
-      </p:sp>
-      <p:cxnSp>
-        <p:nvCxnSpPr>
-          <p:cNvPr id="11" name="Connector 10"/>
-          <p:cNvCxnSpPr/>
-          <p:nvPr/>
-        </p:nvCxnSpPr>
-        <p:spPr>
-          <a:xfrm>
-            <a:off x="5632704" y="3246120"/>
-            <a:ext cx="896112" cy="0"/>
-          </a:xfrm>
-          <a:prstGeom prst="line">
-            <a:avLst/>
-          </a:prstGeom>
-          <a:ln w="31750">
-            <a:solidFill>
-              <a:srgbClr val="F47B20"/>
-            </a:solidFill>
-            <a:tailEnd type="triangle"/>
-          </a:ln>
-        </p:spPr>
-        <p:style>
-          <a:lnRef idx="2">
-            <a:schemeClr val="accent1"/>
-          </a:lnRef>
-          <a:fillRef idx="0">
-            <a:schemeClr val="accent1"/>
-          </a:fillRef>
-          <a:effectRef idx="1">
-            <a:schemeClr val="accent1"/>
-          </a:effectRef>
-          <a:fontRef idx="minor">
-            <a:schemeClr val="tx1"/>
-          </a:fontRef>
-        </p:style>
-      </p:cxnSp>
-      <p:sp>
-        <p:nvSpPr>
-          <p:cNvPr id="12" name="Rectangle 11"/>
-          <p:cNvSpPr/>
-          <p:nvPr/>
-        </p:nvSpPr>
-        <p:spPr>
-          <a:xfrm>
-            <a:off x="6583680" y="2743200"/>
-            <a:ext cx="1874519" cy="1005840"/>
-          </a:xfrm>
-          <a:prstGeom prst="rect">
-            <a:avLst/>
-          </a:prstGeom>
-          <a:solidFill>
-            <a:srgbClr val="FFFFFF"/>
-          </a:solidFill>
-          <a:ln w="15875">
-            <a:solidFill>
-              <a:srgbClr val="0B2D5B"/>
-            </a:solidFill>
-          </a:ln>
-          <a:effectLst/>
-        </p:spPr>
-        <p:style>
-          <a:lnRef idx="1">
-            <a:schemeClr val="accent1"/>
-          </a:lnRef>
-          <a:fillRef idx="3">
-            <a:schemeClr val="accent1"/>
-          </a:fillRef>
-          <a:effectRef idx="2">
-            <a:schemeClr val="accent1"/>
-          </a:effectRef>
-          <a:fontRef idx="minor">
-            <a:schemeClr val="lt1"/>
-          </a:fontRef>
-        </p:style>
-        <p:txBody>
-          <a:bodyPr rtlCol="0" anchor="ctr"/>
-          <a:lstStyle/>
-          <a:p>
-            <a:pPr algn="ctr"/>
-          </a:p>
-        </p:txBody>
-      </p:sp>
-      <p:sp>
-        <p:nvSpPr>
-          <p:cNvPr id="13" name="TextBox 12"/>
-          <p:cNvSpPr txBox="1"/>
-          <p:nvPr/>
-        </p:nvSpPr>
-        <p:spPr>
-          <a:xfrm>
-            <a:off x="6583680" y="2743200"/>
-            <a:ext cx="1874519" cy="1005840"/>
-          </a:xfrm>
-          <a:prstGeom prst="rect">
-            <a:avLst/>
-          </a:prstGeom>
-          <a:noFill/>
-        </p:spPr>
-        <p:txBody>
-          <a:bodyPr wrap="square" anchor="ctr" lIns="0" rIns="0" tIns="0" bIns="0">
-            <a:spAutoFit/>
-          </a:bodyPr>
-          <a:lstStyle/>
-          <a:p>
-            <a:pPr algn="ctr">
-              <a:spcAft>
-                <a:spcPts val="900"/>
-              </a:spcAft>
-            </a:pPr>
-            <a:r>
-              <a:rPr sz="2000" b="1" i="0">
-                <a:solidFill>
-                  <a:srgbClr val="1C1B19"/>
-                </a:solidFill>
-                <a:latin typeface="Source Serif 4"/>
-              </a:rPr>
-              <a:t>Zoom out</a:t>
-            </a:r>
-          </a:p>
-        </p:txBody>
-      </p:sp>
-      <p:cxnSp>
-        <p:nvCxnSpPr>
-          <p:cNvPr id="14" name="Connector 13"/>
-          <p:cNvCxnSpPr/>
-          <p:nvPr/>
-        </p:nvCxnSpPr>
-        <p:spPr>
-          <a:xfrm>
-            <a:off x="8513064" y="3246120"/>
-            <a:ext cx="896112" cy="0"/>
-          </a:xfrm>
-          <a:prstGeom prst="line">
-            <a:avLst/>
-          </a:prstGeom>
-          <a:ln w="31750">
-            <a:solidFill>
-              <a:srgbClr val="F47B20"/>
-            </a:solidFill>
-            <a:tailEnd type="triangle"/>
-          </a:ln>
-        </p:spPr>
-        <p:style>
-          <a:lnRef idx="2">
-            <a:schemeClr val="accent1"/>
-          </a:lnRef>
-          <a:fillRef idx="0">
-            <a:schemeClr val="accent1"/>
-          </a:fillRef>
-          <a:effectRef idx="1">
-            <a:schemeClr val="accent1"/>
-          </a:effectRef>
-          <a:fontRef idx="minor">
-            <a:schemeClr val="tx1"/>
-          </a:fontRef>
-        </p:style>
-      </p:cxnSp>
-      <p:sp>
-        <p:nvSpPr>
-          <p:cNvPr id="15" name="Rectangle 14"/>
-          <p:cNvSpPr/>
-          <p:nvPr/>
-        </p:nvSpPr>
-        <p:spPr>
-          <a:xfrm>
-            <a:off x="9464040" y="2743200"/>
-            <a:ext cx="1874519" cy="1005840"/>
-          </a:xfrm>
-          <a:prstGeom prst="rect">
-            <a:avLst/>
-          </a:prstGeom>
-          <a:solidFill>
-            <a:srgbClr val="FFFFFF"/>
-          </a:solidFill>
-          <a:ln w="15875">
-            <a:solidFill>
-              <a:srgbClr val="0B2D5B"/>
-            </a:solidFill>
-          </a:ln>
-          <a:effectLst/>
-        </p:spPr>
-        <p:style>
-          <a:lnRef idx="1">
-            <a:schemeClr val="accent1"/>
-          </a:lnRef>
-          <a:fillRef idx="3">
-            <a:schemeClr val="accent1"/>
-          </a:fillRef>
-          <a:effectRef idx="2">
-            <a:schemeClr val="accent1"/>
-          </a:effectRef>
-          <a:fontRef idx="minor">
-            <a:schemeClr val="lt1"/>
-          </a:fontRef>
-        </p:style>
-        <p:txBody>
-          <a:bodyPr rtlCol="0" anchor="ctr"/>
-          <a:lstStyle/>
-          <a:p>
-            <a:pPr algn="ctr"/>
-          </a:p>
-        </p:txBody>
-      </p:sp>
-      <p:sp>
-        <p:nvSpPr>
-          <p:cNvPr id="16" name="TextBox 15"/>
-          <p:cNvSpPr txBox="1"/>
-          <p:nvPr/>
-        </p:nvSpPr>
-        <p:spPr>
-          <a:xfrm>
-            <a:off x="9464040" y="2743200"/>
-            <a:ext cx="1874519" cy="1005840"/>
-          </a:xfrm>
-          <a:prstGeom prst="rect">
-            <a:avLst/>
-          </a:prstGeom>
-          <a:noFill/>
-        </p:spPr>
-        <p:txBody>
-          <a:bodyPr wrap="square" anchor="ctr" lIns="0" rIns="0" tIns="0" bIns="0">
-            <a:spAutoFit/>
-          </a:bodyPr>
-          <a:lstStyle/>
-          <a:p>
-            <a:pPr algn="ctr">
-              <a:spcAft>
-                <a:spcPts val="900"/>
-              </a:spcAft>
-            </a:pPr>
-            <a:r>
-              <a:rPr sz="2000" b="1" i="0">
-                <a:solidFill>
-                  <a:srgbClr val="1C1B19"/>
-                </a:solidFill>
-                <a:latin typeface="Source Serif 4"/>
-              </a:rPr>
-              <a:t>Then decide</a:t>
-            </a:r>
-          </a:p>
-        </p:txBody>
-      </p:sp>
-      <p:sp>
-        <p:nvSpPr>
-          <p:cNvPr id="17" name="TextBox 16"/>
-          <p:cNvSpPr txBox="1"/>
-          <p:nvPr/>
-        </p:nvSpPr>
-        <p:spPr>
-          <a:xfrm>
-            <a:off x="822960" y="4160520"/>
-            <a:ext cx="10515600" cy="457200"/>
+            <a:off x="1097280" y="4206240"/>
+            <a:ext cx="10058400" cy="365760"/>
           </a:xfrm>
           <a:prstGeom prst="rect">
             <a:avLst/>
@@ -9577,33 +9938,33 @@
           </a:bodyPr>
           <a:lstStyle/>
           <a:p>
-            <a:pPr algn="ctr">
-              <a:spcAft>
-                <a:spcPts val="810"/>
-              </a:spcAft>
-            </a:pPr>
-            <a:r>
-              <a:rPr sz="1800" b="1" i="0">
-                <a:solidFill>
-                  <a:srgbClr val="F47B20"/>
+            <a:pPr algn="l">
+              <a:spcAft>
+                <a:spcPts val="540"/>
+              </a:spcAft>
+            </a:pPr>
+            <a:r>
+              <a:rPr sz="1200" b="1" i="0">
+                <a:solidFill>
+                  <a:srgbClr val="0B2D5B"/>
                 </a:solidFill>
                 <a:latin typeface="Inter Tight"/>
               </a:rPr>
-              <a:t>↺  and around again</a:t>
-            </a:r>
-          </a:p>
-        </p:txBody>
-      </p:sp>
-      <p:sp>
-        <p:nvSpPr>
-          <p:cNvPr id="18" name="TextBox 17"/>
+              <a:t>STUDENT PAGE</a:t>
+            </a:r>
+          </a:p>
+        </p:txBody>
+      </p:sp>
+      <p:sp>
+        <p:nvSpPr>
+          <p:cNvPr id="9" name="TextBox 8"/>
           <p:cNvSpPr txBox="1"/>
           <p:nvPr/>
         </p:nvSpPr>
         <p:spPr>
           <a:xfrm>
-            <a:off x="822960" y="4846320"/>
-            <a:ext cx="10515600" cy="1188720"/>
+            <a:off x="1097280" y="4617720"/>
+            <a:ext cx="10058400" cy="640080"/>
           </a:xfrm>
           <a:prstGeom prst="rect">
             <a:avLst/>
@@ -9616,19 +9977,19 @@
           </a:bodyPr>
           <a:lstStyle/>
           <a:p>
-            <a:pPr algn="ctr">
+            <a:pPr algn="l">
               <a:spcAft>
                 <a:spcPts val="900"/>
               </a:spcAft>
             </a:pPr>
             <a:r>
-              <a:rPr sz="2000" b="0" i="1">
-                <a:solidFill>
-                  <a:srgbClr val="5D5A54"/>
-                </a:solidFill>
-                <a:latin typeface="Source Serif 4"/>
-              </a:rPr>
-              <a:t>Anger brings information (a line got crossed) and energy (a body ready to fight).</a:t>
+              <a:rPr sz="2000" b="0" i="0">
+                <a:solidFill>
+                  <a:srgbClr val="1C1B19"/>
+                </a:solidFill>
+                <a:latin typeface="Inter Tight"/>
+              </a:rPr>
+              <a:t>https://rmwtoolkit.github.io/bcds-toolkit/anger-is-information-high-school.html</a:t>
             </a:r>
           </a:p>
         </p:txBody>

--- a/decks/anger-is-information-lesson-v2.pptx
+++ b/decks/anger-is-information-lesson-v2.pptx
@@ -6656,6 +6656,45 @@
                 <a:latin typeface="Inter Tight"/>
               </a:rPr>
               <a:t>Beaver Upper School · Counseling</a:t>
+            </a:r>
+          </a:p>
+        </p:txBody>
+      </p:sp>
+      <p:sp>
+        <p:nvSpPr>
+          <p:cNvPr id="8" name="TextBox 7"/>
+          <p:cNvSpPr txBox="1"/>
+          <p:nvPr/>
+        </p:nvSpPr>
+        <p:spPr>
+          <a:xfrm>
+            <a:off x="6766560" y="5897880"/>
+            <a:ext cx="4846320" cy="640080"/>
+          </a:xfrm>
+          <a:prstGeom prst="rect">
+            <a:avLst/>
+          </a:prstGeom>
+          <a:noFill/>
+        </p:spPr>
+        <p:txBody>
+          <a:bodyPr wrap="square" anchor="t" lIns="0" rIns="0" tIns="0" bIns="0">
+            <a:spAutoFit/>
+          </a:bodyPr>
+          <a:lstStyle/>
+          <a:p>
+            <a:pPr algn="r">
+              <a:spcAft>
+                <a:spcPts val="495"/>
+              </a:spcAft>
+            </a:pPr>
+            <a:r>
+              <a:rPr sz="1100" b="0" i="0">
+                <a:solidFill>
+                  <a:srgbClr val="E8E4DA"/>
+                </a:solidFill>
+                <a:latin typeface="Inter Tight"/>
+              </a:rPr>
+              <a:t>Written by Dr. Rick Wilson, with AI-assisted drafting. Every lesson is reviewed and edited by Dr. Wilson.</a:t>
             </a:r>
           </a:p>
         </p:txBody>
